--- a/P12_Gerez_un_projet_d_infrastructure_aymeric_bailleul/_orchestration/_docs/ABAI_02_presentation.pptx
+++ b/P12_Gerez_un_projet_d_infrastructure_aymeric_bailleul/_orchestration/_docs/ABAI_02_presentation.pptx
@@ -209,7 +209,7 @@
           <a:p>
             <a:fld id="{F16B76E8-7572-4EB5-8BC1-D8F277DA4831}" type="datetimeFigureOut">
               <a:rPr lang="fr-FR" smtClean="0"/>
-              <a:t>24/03/2026</a:t>
+              <a:t>25/03/2026</a:t>
             </a:fld>
             <a:endParaRPr lang="fr-FR"/>
           </a:p>
@@ -3614,7 +3614,7 @@
           <a:p>
             <a:fld id="{C372C99E-D69C-4ADF-8C8D-41420D3DDB02}" type="datetimeFigureOut">
               <a:rPr lang="fr-FR" smtClean="0"/>
-              <a:t>24/03/2026</a:t>
+              <a:t>25/03/2026</a:t>
             </a:fld>
             <a:endParaRPr lang="fr-FR"/>
           </a:p>
@@ -3812,7 +3812,7 @@
           <a:p>
             <a:fld id="{C372C99E-D69C-4ADF-8C8D-41420D3DDB02}" type="datetimeFigureOut">
               <a:rPr lang="fr-FR" smtClean="0"/>
-              <a:t>24/03/2026</a:t>
+              <a:t>25/03/2026</a:t>
             </a:fld>
             <a:endParaRPr lang="fr-FR"/>
           </a:p>
@@ -4020,7 +4020,7 @@
           <a:p>
             <a:fld id="{C372C99E-D69C-4ADF-8C8D-41420D3DDB02}" type="datetimeFigureOut">
               <a:rPr lang="fr-FR" smtClean="0"/>
-              <a:t>24/03/2026</a:t>
+              <a:t>25/03/2026</a:t>
             </a:fld>
             <a:endParaRPr lang="fr-FR"/>
           </a:p>
@@ -4218,7 +4218,7 @@
           <a:p>
             <a:fld id="{C372C99E-D69C-4ADF-8C8D-41420D3DDB02}" type="datetimeFigureOut">
               <a:rPr lang="fr-FR" smtClean="0"/>
-              <a:t>24/03/2026</a:t>
+              <a:t>25/03/2026</a:t>
             </a:fld>
             <a:endParaRPr lang="fr-FR"/>
           </a:p>
@@ -4493,7 +4493,7 @@
           <a:p>
             <a:fld id="{C372C99E-D69C-4ADF-8C8D-41420D3DDB02}" type="datetimeFigureOut">
               <a:rPr lang="fr-FR" smtClean="0"/>
-              <a:t>24/03/2026</a:t>
+              <a:t>25/03/2026</a:t>
             </a:fld>
             <a:endParaRPr lang="fr-FR"/>
           </a:p>
@@ -4758,7 +4758,7 @@
           <a:p>
             <a:fld id="{C372C99E-D69C-4ADF-8C8D-41420D3DDB02}" type="datetimeFigureOut">
               <a:rPr lang="fr-FR" smtClean="0"/>
-              <a:t>24/03/2026</a:t>
+              <a:t>25/03/2026</a:t>
             </a:fld>
             <a:endParaRPr lang="fr-FR"/>
           </a:p>
@@ -5170,7 +5170,7 @@
           <a:p>
             <a:fld id="{C372C99E-D69C-4ADF-8C8D-41420D3DDB02}" type="datetimeFigureOut">
               <a:rPr lang="fr-FR" smtClean="0"/>
-              <a:t>24/03/2026</a:t>
+              <a:t>25/03/2026</a:t>
             </a:fld>
             <a:endParaRPr lang="fr-FR"/>
           </a:p>
@@ -5311,7 +5311,7 @@
           <a:p>
             <a:fld id="{C372C99E-D69C-4ADF-8C8D-41420D3DDB02}" type="datetimeFigureOut">
               <a:rPr lang="fr-FR" smtClean="0"/>
-              <a:t>24/03/2026</a:t>
+              <a:t>25/03/2026</a:t>
             </a:fld>
             <a:endParaRPr lang="fr-FR"/>
           </a:p>
@@ -5424,7 +5424,7 @@
           <a:p>
             <a:fld id="{C372C99E-D69C-4ADF-8C8D-41420D3DDB02}" type="datetimeFigureOut">
               <a:rPr lang="fr-FR" smtClean="0"/>
-              <a:t>24/03/2026</a:t>
+              <a:t>25/03/2026</a:t>
             </a:fld>
             <a:endParaRPr lang="fr-FR"/>
           </a:p>
@@ -5735,7 +5735,7 @@
           <a:p>
             <a:fld id="{C372C99E-D69C-4ADF-8C8D-41420D3DDB02}" type="datetimeFigureOut">
               <a:rPr lang="fr-FR" smtClean="0"/>
-              <a:t>24/03/2026</a:t>
+              <a:t>25/03/2026</a:t>
             </a:fld>
             <a:endParaRPr lang="fr-FR"/>
           </a:p>
@@ -6023,7 +6023,7 @@
           <a:p>
             <a:fld id="{C372C99E-D69C-4ADF-8C8D-41420D3DDB02}" type="datetimeFigureOut">
               <a:rPr lang="fr-FR" smtClean="0"/>
-              <a:t>24/03/2026</a:t>
+              <a:t>25/03/2026</a:t>
             </a:fld>
             <a:endParaRPr lang="fr-FR"/>
           </a:p>
@@ -6273,7 +6273,7 @@
           <a:p>
             <a:fld id="{C372C99E-D69C-4ADF-8C8D-41420D3DDB02}" type="datetimeFigureOut">
               <a:rPr lang="fr-FR" smtClean="0"/>
-              <a:t>24/03/2026</a:t>
+              <a:t>25/03/2026</a:t>
             </a:fld>
             <a:endParaRPr lang="fr-FR"/>
           </a:p>
@@ -7044,7 +7044,7 @@
           <p:nvPr>
             <p:extLst>
               <p:ext uri="{D42A27DB-BD31-4B8C-83A1-F6EECF244321}">
-                <p14:modId xmlns:p14="http://schemas.microsoft.com/office/powerpoint/2010/main" val="2849900708"/>
+                <p14:modId xmlns:p14="http://schemas.microsoft.com/office/powerpoint/2010/main" val="1977063740"/>
               </p:ext>
             </p:extLst>
           </p:nvPr>
@@ -7624,7 +7624,7 @@
                         <a:t>, </a:t>
                       </a:r>
                       <a:r>
-                        <a:rPr dirty="0" err="1">
+                        <a:rPr lang="fr-FR" dirty="0">
                           <a:solidFill>
                             <a:schemeClr val="accent2">
                               <a:lumMod val="50000"/>
@@ -13477,27 +13477,6 @@
                   <a:srgbClr val="2C3E50"/>
                 </a:solidFill>
               </a:rPr>
-              <a:t>• 66 NaN (41 %) → Non déclaré</a:t>
-            </a:r>
-          </a:p>
-          <a:p>
-            <a:pPr marL="360363" algn="l">
-              <a:spcAft>
-                <a:spcPts val="600"/>
-              </a:spcAft>
-              <a:defRPr sz="1100" b="0">
-                <a:solidFill>
-                  <a:srgbClr val="2C3E50"/>
-                </a:solidFill>
-                <a:latin typeface="Calibri"/>
-              </a:defRPr>
-            </a:pPr>
-            <a:r>
-              <a:rPr lang="fr-FR" noProof="0" dirty="0">
-                <a:solidFill>
-                  <a:srgbClr val="2C3E50"/>
-                </a:solidFill>
-              </a:rPr>
               <a:t>• Typo « </a:t>
             </a:r>
             <a:r>
@@ -14221,42 +14200,6 @@
           </a:p>
         </p:txBody>
       </p:sp>
-      <p:pic>
-        <p:nvPicPr>
-          <p:cNvPr id="6" name="Image 5">
-            <a:extLst>
-              <a:ext uri="{FF2B5EF4-FFF2-40B4-BE49-F238E27FC236}">
-                <a16:creationId xmlns:a16="http://schemas.microsoft.com/office/drawing/2014/main" id="{BB320341-4000-17A1-243A-431EB257EAC8}"/>
-              </a:ext>
-            </a:extLst>
-          </p:cNvPr>
-          <p:cNvPicPr>
-            <a:picLocks noChangeAspect="1"/>
-          </p:cNvPicPr>
-          <p:nvPr/>
-        </p:nvPicPr>
-        <p:blipFill>
-          <a:blip r:embed="rId3">
-            <a:extLst>
-              <a:ext uri="{28A0092B-C50C-407E-A947-70E740481C1C}">
-                <a14:useLocalDpi xmlns:a14="http://schemas.microsoft.com/office/drawing/2010/main" val="0"/>
-              </a:ext>
-            </a:extLst>
-          </a:blip>
-          <a:stretch>
-            <a:fillRect/>
-          </a:stretch>
-        </p:blipFill>
-        <p:spPr>
-          <a:xfrm>
-            <a:off x="427845" y="1585451"/>
-            <a:ext cx="7450082" cy="2666438"/>
-          </a:xfrm>
-          <a:prstGeom prst="rect">
-            <a:avLst/>
-          </a:prstGeom>
-        </p:spPr>
-      </p:pic>
       <p:sp>
         <p:nvSpPr>
           <p:cNvPr id="9" name="ZoneTexte 8">
@@ -15153,6 +15096,42 @@
           </a:graphicData>
         </a:graphic>
       </p:graphicFrame>
+      <p:pic>
+        <p:nvPicPr>
+          <p:cNvPr id="7" name="Image 6">
+            <a:extLst>
+              <a:ext uri="{FF2B5EF4-FFF2-40B4-BE49-F238E27FC236}">
+                <a16:creationId xmlns:a16="http://schemas.microsoft.com/office/drawing/2014/main" id="{08C9C24A-E066-CE47-E105-BD99C7A04847}"/>
+              </a:ext>
+            </a:extLst>
+          </p:cNvPr>
+          <p:cNvPicPr>
+            <a:picLocks noChangeAspect="1"/>
+          </p:cNvPicPr>
+          <p:nvPr/>
+        </p:nvPicPr>
+        <p:blipFill>
+          <a:blip r:embed="rId3">
+            <a:extLst>
+              <a:ext uri="{28A0092B-C50C-407E-A947-70E740481C1C}">
+                <a14:useLocalDpi xmlns:a14="http://schemas.microsoft.com/office/drawing/2010/main" val="0"/>
+              </a:ext>
+            </a:extLst>
+          </a:blip>
+          <a:stretch>
+            <a:fillRect/>
+          </a:stretch>
+        </p:blipFill>
+        <p:spPr>
+          <a:xfrm>
+            <a:off x="538919" y="1486901"/>
+            <a:ext cx="8020050" cy="2276475"/>
+          </a:xfrm>
+          <a:prstGeom prst="rect">
+            <a:avLst/>
+          </a:prstGeom>
+        </p:spPr>
+      </p:pic>
     </p:spTree>
     <p:extLst>
       <p:ext uri="{BB962C8B-B14F-4D97-AF65-F5344CB8AC3E}">
@@ -17335,7 +17314,29 @@
                   </a:schemeClr>
                 </a:solidFill>
               </a:rPr>
-              <a:t>Ingère le XLSX Sportif, nettoie les NaN et typos</a:t>
+              <a:t>Ingère le XLSX Sportif, </a:t>
+            </a:r>
+            <a:r>
+              <a:rPr lang="fr-FR" noProof="0" dirty="0" err="1">
+                <a:solidFill>
+                  <a:schemeClr val="accent2">
+                    <a:lumMod val="40000"/>
+                    <a:lumOff val="60000"/>
+                  </a:schemeClr>
+                </a:solidFill>
+              </a:rPr>
+              <a:t>nettoi</a:t>
+            </a:r>
+            <a:r>
+              <a:rPr lang="fr-FR" noProof="0" dirty="0">
+                <a:solidFill>
+                  <a:schemeClr val="accent2">
+                    <a:lumMod val="40000"/>
+                    <a:lumOff val="60000"/>
+                  </a:schemeClr>
+                </a:solidFill>
+              </a:rPr>
+              <a:t> ,et typos</a:t>
             </a:r>
           </a:p>
         </p:txBody>
@@ -19861,7 +19862,7 @@
               <a:t> et déclenchement par </a:t>
             </a:r>
             <a:r>
-              <a:rPr lang="fr-FR" noProof="0" dirty="0" err="1">
+              <a:rPr lang="fr-FR" b="1" noProof="0" dirty="0" err="1">
                 <a:solidFill>
                   <a:schemeClr val="accent2">
                     <a:lumMod val="40000"/>

--- a/P12_Gerez_un_projet_d_infrastructure_aymeric_bailleul/_orchestration/_docs/ABAI_02_presentation.pptx
+++ b/P12_Gerez_un_projet_d_infrastructure_aymeric_bailleul/_orchestration/_docs/ABAI_02_presentation.pptx
@@ -209,7 +209,7 @@
           <a:p>
             <a:fld id="{F16B76E8-7572-4EB5-8BC1-D8F277DA4831}" type="datetimeFigureOut">
               <a:rPr lang="fr-FR" smtClean="0"/>
-              <a:t>25/03/2026</a:t>
+              <a:t>30/03/2026</a:t>
             </a:fld>
             <a:endParaRPr lang="fr-FR"/>
           </a:p>
@@ -520,25 +520,8 @@
           <a:bodyPr/>
           <a:lstStyle/>
           <a:p>
-            <a:pPr marL="0" marR="0" lvl="0" indent="0" algn="l" defTabSz="914400" rtl="0" eaLnBrk="1" fontAlgn="auto" latinLnBrk="0" hangingPunct="1">
-              <a:lnSpc>
-                <a:spcPct val="100000"/>
-              </a:lnSpc>
-              <a:spcBef>
-                <a:spcPts val="0"/>
-              </a:spcBef>
-              <a:spcAft>
-                <a:spcPts val="0"/>
-              </a:spcAft>
-              <a:buClrTx/>
-              <a:buSzTx/>
-              <a:buFontTx/>
-              <a:buNone/>
-              <a:tabLst/>
-              <a:defRPr/>
-            </a:pPr>
-            <a:r>
-              <a:rPr lang="fr-FR" sz="1200" b="0" i="0" kern="1200" dirty="0">
+            <a:r>
+              <a:rPr lang="fr-FR" sz="1200" b="1" i="0" kern="1200" dirty="0">
                 <a:solidFill>
                   <a:schemeClr val="tx1"/>
                 </a:solidFill>
@@ -547,27 +530,8 @@
                 <a:ea typeface="+mn-ea"/>
                 <a:cs typeface="+mn-cs"/>
               </a:rPr>
-              <a:t>🟠 Orange 	&gt; Sources 	           &gt; Données d'entrée (XLSX, API)</a:t>
-            </a:r>
-          </a:p>
-          <a:p>
-            <a:pPr marL="0" marR="0" lvl="0" indent="0" algn="l" defTabSz="914400" rtl="0" eaLnBrk="1" fontAlgn="auto" latinLnBrk="0" hangingPunct="1">
-              <a:lnSpc>
-                <a:spcPct val="100000"/>
-              </a:lnSpc>
-              <a:spcBef>
-                <a:spcPts val="0"/>
-              </a:spcBef>
-              <a:spcAft>
-                <a:spcPts val="0"/>
-              </a:spcAft>
-              <a:buClrTx/>
-              <a:buSzTx/>
-              <a:buFontTx/>
-              <a:buNone/>
-              <a:tabLst/>
-              <a:defRPr/>
-            </a:pPr>
+              <a:t>Prime sportive (5 % salaire brut)</a:t>
+            </a:r>
             <a:r>
               <a:rPr lang="fr-FR" sz="1200" b="0" i="0" kern="1200" dirty="0">
                 <a:solidFill>
@@ -578,29 +542,10 @@
                 <a:ea typeface="+mn-ea"/>
                 <a:cs typeface="+mn-cs"/>
               </a:rPr>
-              <a:t>🔵 Bleu foncé	&gt; ETL, PostgreSQL      &gt; Traitement et stockage</a:t>
-            </a:r>
-          </a:p>
-          <a:p>
-            <a:pPr marL="0" marR="0" lvl="0" indent="0" algn="l" defTabSz="914400" rtl="0" eaLnBrk="1" fontAlgn="auto" latinLnBrk="0" hangingPunct="1">
-              <a:lnSpc>
-                <a:spcPct val="100000"/>
-              </a:lnSpc>
-              <a:spcBef>
-                <a:spcPts val="0"/>
-              </a:spcBef>
-              <a:spcAft>
-                <a:spcPts val="0"/>
-              </a:spcAft>
-              <a:buClrTx/>
-              <a:buSzTx/>
-              <a:buFontTx/>
-              <a:buNone/>
-              <a:tabLst/>
-              <a:defRPr/>
-            </a:pPr>
-            <a:r>
-              <a:rPr lang="fr-FR" sz="1200" b="0" i="0" kern="1200" dirty="0">
+              <a:t> : venir au bureau à pied/vélo/trottinette ET habiter à moins de 15 km (marche/running) ou 25 km (vélo/trottinette). Distance calculée par Google </a:t>
+            </a:r>
+            <a:r>
+              <a:rPr lang="fr-FR" sz="1200" b="0" i="0" kern="1200" dirty="0" err="1">
                 <a:solidFill>
                   <a:schemeClr val="tx1"/>
                 </a:solidFill>
@@ -609,10 +554,10 @@
                 <a:ea typeface="+mn-ea"/>
                 <a:cs typeface="+mn-cs"/>
               </a:rPr>
-              <a:t>🔵 Bleu 	&gt; </a:t>
-            </a:r>
-            <a:r>
-              <a:rPr lang="fr-FR" sz="1200" b="0" i="0" kern="1200" dirty="0" err="1">
+              <a:t>Maps</a:t>
+            </a:r>
+            <a:r>
+              <a:rPr lang="fr-FR" sz="1200" b="0" i="0" kern="1200" dirty="0">
                 <a:solidFill>
                   <a:schemeClr val="tx1"/>
                 </a:solidFill>
@@ -621,10 +566,12 @@
                 <a:ea typeface="+mn-ea"/>
                 <a:cs typeface="+mn-cs"/>
               </a:rPr>
-              <a:t>Kestra</a:t>
-            </a:r>
-            <a:r>
-              <a:rPr lang="fr-FR" sz="1200" b="0" i="0" kern="1200" dirty="0">
+              <a:t>.</a:t>
+            </a:r>
+          </a:p>
+          <a:p>
+            <a:r>
+              <a:rPr lang="fr-FR" sz="1200" b="1" i="0" kern="1200" dirty="0">
                 <a:solidFill>
                   <a:schemeClr val="tx1"/>
                 </a:solidFill>
@@ -633,27 +580,8 @@
                 <a:ea typeface="+mn-ea"/>
                 <a:cs typeface="+mn-cs"/>
               </a:rPr>
-              <a:t> 	           &gt; Orchestration (le "chef d'orchestre")</a:t>
-            </a:r>
-          </a:p>
-          <a:p>
-            <a:pPr marL="0" marR="0" lvl="0" indent="0" algn="l" defTabSz="914400" rtl="0" eaLnBrk="1" fontAlgn="auto" latinLnBrk="0" hangingPunct="1">
-              <a:lnSpc>
-                <a:spcPct val="100000"/>
-              </a:lnSpc>
-              <a:spcBef>
-                <a:spcPts val="0"/>
-              </a:spcBef>
-              <a:spcAft>
-                <a:spcPts val="0"/>
-              </a:spcAft>
-              <a:buClrTx/>
-              <a:buSzTx/>
-              <a:buFontTx/>
-              <a:buNone/>
-              <a:tabLst/>
-              <a:defRPr/>
-            </a:pPr>
+              <a:t>5 jours bien-être</a:t>
+            </a:r>
             <a:r>
               <a:rPr lang="fr-FR" sz="1200" b="0" i="0" kern="1200" dirty="0">
                 <a:solidFill>
@@ -664,7 +592,7 @@
                 <a:ea typeface="+mn-ea"/>
                 <a:cs typeface="+mn-cs"/>
               </a:rPr>
-              <a:t>🟢 Vert 	&gt; </a:t>
+              <a:t> : avoir fait au moins 15 activités </a:t>
             </a:r>
             <a:r>
               <a:rPr lang="fr-FR" sz="1200" b="0" i="0" kern="1200" dirty="0" err="1">
@@ -676,7 +604,7 @@
                 <a:ea typeface="+mn-ea"/>
                 <a:cs typeface="+mn-cs"/>
               </a:rPr>
-              <a:t>dbt</a:t>
+              <a:t>Strava</a:t>
             </a:r>
             <a:r>
               <a:rPr lang="fr-FR" sz="1200" b="0" i="0" kern="1200" dirty="0">
@@ -688,27 +616,21 @@
                 <a:ea typeface="+mn-ea"/>
                 <a:cs typeface="+mn-cs"/>
               </a:rPr>
-              <a:t>, Power BI          &gt; Valorisation des données (transformations + restitution)</a:t>
-            </a:r>
-          </a:p>
-          <a:p>
-            <a:pPr marL="0" marR="0" lvl="0" indent="0" algn="l" defTabSz="914400" rtl="0" eaLnBrk="1" fontAlgn="auto" latinLnBrk="0" hangingPunct="1">
-              <a:lnSpc>
-                <a:spcPct val="100000"/>
-              </a:lnSpc>
-              <a:spcBef>
-                <a:spcPts val="0"/>
-              </a:spcBef>
-              <a:spcAft>
-                <a:spcPts val="0"/>
-              </a:spcAft>
-              <a:buClrTx/>
-              <a:buSzTx/>
-              <a:buFontTx/>
-              <a:buNone/>
-              <a:tabLst/>
-              <a:defRPr/>
-            </a:pPr>
+              <a:t> dans l'année, peu importe le sport.</a:t>
+            </a:r>
+          </a:p>
+          <a:p>
+            <a:endParaRPr lang="fr-FR" sz="1200" b="0" i="0" kern="1200" dirty="0">
+              <a:solidFill>
+                <a:schemeClr val="tx1"/>
+              </a:solidFill>
+              <a:effectLst/>
+              <a:latin typeface="+mn-lt"/>
+              <a:ea typeface="+mn-ea"/>
+              <a:cs typeface="+mn-cs"/>
+            </a:endParaRPr>
+          </a:p>
+          <a:p>
             <a:r>
               <a:rPr lang="fr-FR" sz="1200" b="0" i="0" kern="1200" dirty="0">
                 <a:solidFill>
@@ -719,66 +641,11 @@
                 <a:ea typeface="+mn-ea"/>
                 <a:cs typeface="+mn-cs"/>
               </a:rPr>
-              <a:t>🟣 Violet 	&gt; Slack 	           &gt; Communication / notifications</a:t>
-            </a:r>
-          </a:p>
-          <a:p>
-            <a:pPr marL="0" marR="0" lvl="0" indent="0" algn="l" defTabSz="914400" rtl="0" eaLnBrk="1" fontAlgn="auto" latinLnBrk="0" hangingPunct="1">
-              <a:lnSpc>
-                <a:spcPct val="100000"/>
-              </a:lnSpc>
-              <a:spcBef>
-                <a:spcPts val="0"/>
-              </a:spcBef>
-              <a:spcAft>
-                <a:spcPts val="0"/>
-              </a:spcAft>
-              <a:buClrTx/>
-              <a:buSzTx/>
-              <a:buFontTx/>
-              <a:buNone/>
-              <a:tabLst/>
-              <a:defRPr/>
-            </a:pPr>
-            <a:r>
-              <a:rPr lang="fr-FR" sz="1200" b="0" i="0" kern="1200" dirty="0">
-                <a:solidFill>
-                  <a:schemeClr val="tx1"/>
-                </a:solidFill>
-                <a:effectLst/>
-                <a:latin typeface="+mn-lt"/>
-                <a:ea typeface="+mn-ea"/>
-                <a:cs typeface="+mn-cs"/>
-              </a:rPr>
-              <a:t>🔴 Rouge 	&gt; </a:t>
-            </a:r>
-            <a:r>
-              <a:rPr lang="fr-FR" sz="1200" b="0" i="0" kern="1200" dirty="0" err="1">
-                <a:solidFill>
-                  <a:schemeClr val="tx1"/>
-                </a:solidFill>
-                <a:effectLst/>
-                <a:latin typeface="+mn-lt"/>
-                <a:ea typeface="+mn-ea"/>
-                <a:cs typeface="+mn-cs"/>
-              </a:rPr>
-              <a:t>Error</a:t>
-            </a:r>
-            <a:r>
-              <a:rPr lang="fr-FR" sz="1200" b="0" i="0" kern="1200" dirty="0">
-                <a:solidFill>
-                  <a:schemeClr val="tx1"/>
-                </a:solidFill>
-                <a:effectLst/>
-                <a:latin typeface="+mn-lt"/>
-                <a:ea typeface="+mn-ea"/>
-                <a:cs typeface="+mn-cs"/>
-              </a:rPr>
-              <a:t> Handler          &gt; Gestion des erreurs</a:t>
-            </a:r>
-          </a:p>
-          <a:p>
-            <a:endParaRPr lang="fr-FR" dirty="0"/>
+              <a:t>Les salariés inactifs (démissions, etc.) sont exclus des deux calculs.</a:t>
+            </a:r>
+          </a:p>
+          <a:p>
+            <a:endParaRPr lang="en-US" dirty="0"/>
           </a:p>
         </p:txBody>
       </p:sp>
@@ -799,7 +666,7 @@
           <a:p>
             <a:fld id="{99C5AD06-CE33-4E6E-97A2-90C845482EC4}" type="slidenum">
               <a:rPr lang="fr-FR" smtClean="0"/>
-              <a:t>4</a:t>
+              <a:t>2</a:t>
             </a:fld>
             <a:endParaRPr lang="fr-FR"/>
           </a:p>
@@ -808,7 +675,7 @@
     </p:spTree>
     <p:extLst>
       <p:ext uri="{BB962C8B-B14F-4D97-AF65-F5344CB8AC3E}">
-        <p14:creationId xmlns:p14="http://schemas.microsoft.com/office/powerpoint/2010/main" val="31356481"/>
+        <p14:creationId xmlns:p14="http://schemas.microsoft.com/office/powerpoint/2010/main" val="456461880"/>
       </p:ext>
     </p:extLst>
   </p:cSld>
@@ -819,6 +686,114 @@
 </file>
 
 <file path=ppt/notesSlides/notesSlide10.xml><?xml version="1.0" encoding="utf-8"?>
+<p:notes xmlns:a="http://schemas.openxmlformats.org/drawingml/2006/main" xmlns:r="http://schemas.openxmlformats.org/officeDocument/2006/relationships" xmlns:p="http://schemas.openxmlformats.org/presentationml/2006/main">
+  <p:cSld>
+    <p:spTree>
+      <p:nvGrpSpPr>
+        <p:cNvPr id="1" name="">
+          <a:extLst>
+            <a:ext uri="{FF2B5EF4-FFF2-40B4-BE49-F238E27FC236}">
+              <a16:creationId xmlns:a16="http://schemas.microsoft.com/office/drawing/2014/main" id="{E90BD923-6122-2994-304C-69ECEE1204EB}"/>
+            </a:ext>
+          </a:extLst>
+        </p:cNvPr>
+        <p:cNvGrpSpPr/>
+        <p:nvPr/>
+      </p:nvGrpSpPr>
+      <p:grpSpPr>
+        <a:xfrm>
+          <a:off x="0" y="0"/>
+          <a:ext cx="0" cy="0"/>
+          <a:chOff x="0" y="0"/>
+          <a:chExt cx="0" cy="0"/>
+        </a:xfrm>
+      </p:grpSpPr>
+      <p:sp>
+        <p:nvSpPr>
+          <p:cNvPr id="2" name="Espace réservé de l'image des diapositives 1">
+            <a:extLst>
+              <a:ext uri="{FF2B5EF4-FFF2-40B4-BE49-F238E27FC236}">
+                <a16:creationId xmlns:a16="http://schemas.microsoft.com/office/drawing/2014/main" id="{D2648A9C-EE24-0816-5364-5F8DE3194A05}"/>
+              </a:ext>
+            </a:extLst>
+          </p:cNvPr>
+          <p:cNvSpPr>
+            <a:spLocks noGrp="1" noRot="1" noChangeAspect="1"/>
+          </p:cNvSpPr>
+          <p:nvPr>
+            <p:ph type="sldImg"/>
+          </p:nvPr>
+        </p:nvSpPr>
+        <p:spPr/>
+      </p:sp>
+      <p:sp>
+        <p:nvSpPr>
+          <p:cNvPr id="3" name="Espace réservé des notes 2">
+            <a:extLst>
+              <a:ext uri="{FF2B5EF4-FFF2-40B4-BE49-F238E27FC236}">
+                <a16:creationId xmlns:a16="http://schemas.microsoft.com/office/drawing/2014/main" id="{EA3361B9-F082-D177-2ACA-25C1C011FAAF}"/>
+              </a:ext>
+            </a:extLst>
+          </p:cNvPr>
+          <p:cNvSpPr>
+            <a:spLocks noGrp="1"/>
+          </p:cNvSpPr>
+          <p:nvPr>
+            <p:ph type="body" idx="1"/>
+          </p:nvPr>
+        </p:nvSpPr>
+        <p:spPr/>
+        <p:txBody>
+          <a:bodyPr/>
+          <a:lstStyle/>
+          <a:p>
+            <a:endParaRPr lang="fr-FR" dirty="0"/>
+          </a:p>
+        </p:txBody>
+      </p:sp>
+      <p:sp>
+        <p:nvSpPr>
+          <p:cNvPr id="4" name="Espace réservé du numéro de diapositive 3">
+            <a:extLst>
+              <a:ext uri="{FF2B5EF4-FFF2-40B4-BE49-F238E27FC236}">
+                <a16:creationId xmlns:a16="http://schemas.microsoft.com/office/drawing/2014/main" id="{BBDB3B88-6C84-B9FE-6F00-31A5537C9D08}"/>
+              </a:ext>
+            </a:extLst>
+          </p:cNvPr>
+          <p:cNvSpPr>
+            <a:spLocks noGrp="1"/>
+          </p:cNvSpPr>
+          <p:nvPr>
+            <p:ph type="sldNum" sz="quarter" idx="5"/>
+          </p:nvPr>
+        </p:nvSpPr>
+        <p:spPr/>
+        <p:txBody>
+          <a:bodyPr/>
+          <a:lstStyle/>
+          <a:p>
+            <a:fld id="{99C5AD06-CE33-4E6E-97A2-90C845482EC4}" type="slidenum">
+              <a:rPr lang="fr-FR" smtClean="0"/>
+              <a:t>12</a:t>
+            </a:fld>
+            <a:endParaRPr lang="fr-FR"/>
+          </a:p>
+        </p:txBody>
+      </p:sp>
+    </p:spTree>
+    <p:extLst>
+      <p:ext uri="{BB962C8B-B14F-4D97-AF65-F5344CB8AC3E}">
+        <p14:creationId xmlns:p14="http://schemas.microsoft.com/office/powerpoint/2010/main" val="2679833592"/>
+      </p:ext>
+    </p:extLst>
+  </p:cSld>
+  <p:clrMapOvr>
+    <a:masterClrMapping/>
+  </p:clrMapOvr>
+</p:notes>
+</file>
+
+<file path=ppt/notesSlides/notesSlide11.xml><?xml version="1.0" encoding="utf-8"?>
 <p:notes xmlns:a="http://schemas.openxmlformats.org/drawingml/2006/main" xmlns:r="http://schemas.openxmlformats.org/officeDocument/2006/relationships" xmlns:p="http://schemas.openxmlformats.org/presentationml/2006/main">
   <p:cSld>
     <p:spTree>
@@ -946,136 +921,23 @@
           <a:bodyPr/>
           <a:lstStyle/>
           <a:p>
-            <a:pPr algn="l">
+            <a:pPr marL="0" marR="0" lvl="0" indent="0" algn="l" defTabSz="914400" rtl="0" eaLnBrk="1" fontAlgn="auto" latinLnBrk="0" hangingPunct="1">
+              <a:lnSpc>
+                <a:spcPct val="100000"/>
+              </a:lnSpc>
+              <a:spcBef>
+                <a:spcPts val="0"/>
+              </a:spcBef>
               <a:spcAft>
-                <a:spcPts val="600"/>
+                <a:spcPts val="0"/>
               </a:spcAft>
-              <a:defRPr sz="1400" b="1">
-                <a:solidFill>
-                  <a:srgbClr val="2C3E50"/>
-                </a:solidFill>
-                <a:latin typeface="Calibri"/>
-              </a:defRPr>
+              <a:buClrTx/>
+              <a:buSzTx/>
+              <a:buFontTx/>
+              <a:buNone/>
+              <a:tabLst/>
+              <a:defRPr/>
             </a:pPr>
-            <a:r>
-              <a:rPr lang="fr-FR" dirty="0"/>
-              <a:t>10 tables + 1 vue — Architecture </a:t>
-            </a:r>
-            <a:r>
-              <a:rPr lang="fr-FR" dirty="0" err="1"/>
-              <a:t>Medallion</a:t>
-            </a:r>
-            <a:r>
-              <a:rPr lang="fr-FR" dirty="0"/>
-              <a:t> adaptée au RGPD</a:t>
-            </a:r>
-          </a:p>
-          <a:p>
-            <a:pPr algn="l">
-              <a:spcAft>
-                <a:spcPts val="600"/>
-              </a:spcAft>
-              <a:defRPr sz="1200" b="0">
-                <a:solidFill>
-                  <a:srgbClr val="85929E"/>
-                </a:solidFill>
-                <a:latin typeface="Calibri"/>
-              </a:defRPr>
-            </a:pPr>
-            <a:r>
-              <a:rPr lang="fr-FR" dirty="0"/>
-              <a:t>• XLSX = couche </a:t>
-            </a:r>
-            <a:r>
-              <a:rPr lang="fr-FR" dirty="0" err="1"/>
-              <a:t>raw</a:t>
-            </a:r>
-            <a:r>
-              <a:rPr lang="fr-FR" dirty="0"/>
-              <a:t> logique (sur disque, jamais copiés en base) — seules les données </a:t>
-            </a:r>
-            <a:r>
-              <a:rPr lang="fr-FR" dirty="0" err="1"/>
-              <a:t>Strava</a:t>
-            </a:r>
-            <a:r>
-              <a:rPr lang="fr-FR" dirty="0"/>
-              <a:t> passent par </a:t>
-            </a:r>
-            <a:r>
-              <a:rPr lang="fr-FR" dirty="0" err="1"/>
-              <a:t>raw</a:t>
-            </a:r>
-            <a:r>
-              <a:rPr lang="fr-FR" dirty="0"/>
-              <a:t> en base</a:t>
-            </a:r>
-          </a:p>
-          <a:p>
-            <a:pPr algn="l">
-              <a:spcAft>
-                <a:spcPts val="600"/>
-              </a:spcAft>
-              <a:defRPr sz="1200" b="0">
-                <a:solidFill>
-                  <a:srgbClr val="85929E"/>
-                </a:solidFill>
-                <a:latin typeface="Calibri"/>
-              </a:defRPr>
-            </a:pPr>
-            <a:r>
-              <a:rPr lang="fr-FR" dirty="0"/>
-              <a:t>• </a:t>
-            </a:r>
-            <a:r>
-              <a:rPr lang="fr-FR" dirty="0" err="1"/>
-              <a:t>staging</a:t>
-            </a:r>
-            <a:r>
-              <a:rPr lang="fr-FR" dirty="0"/>
-              <a:t> = 1er niveau DB : anonymisé, nettoyé, incrémental (UPSERT + soft-</a:t>
-            </a:r>
-            <a:r>
-              <a:rPr lang="fr-FR" dirty="0" err="1"/>
-              <a:t>delete</a:t>
-            </a:r>
-            <a:r>
-              <a:rPr lang="fr-FR" dirty="0"/>
-              <a:t>)</a:t>
-            </a:r>
-          </a:p>
-          <a:p>
-            <a:pPr algn="l">
-              <a:spcAft>
-                <a:spcPts val="600"/>
-              </a:spcAft>
-              <a:defRPr sz="1200" b="0">
-                <a:solidFill>
-                  <a:srgbClr val="85929E"/>
-                </a:solidFill>
-                <a:latin typeface="Calibri"/>
-              </a:defRPr>
-            </a:pPr>
-            <a:r>
-              <a:rPr lang="fr-FR" dirty="0"/>
-              <a:t>• gold = métriques métier calculées par </a:t>
-            </a:r>
-            <a:r>
-              <a:rPr lang="fr-FR" dirty="0" err="1"/>
-              <a:t>dbt</a:t>
-            </a:r>
-            <a:r>
-              <a:rPr lang="fr-FR" dirty="0"/>
-              <a:t> (éligibilités, impact financier)</a:t>
-            </a:r>
-          </a:p>
-          <a:p>
-            <a:endParaRPr lang="fr-FR" dirty="0"/>
-          </a:p>
-          <a:p>
-            <a:endParaRPr lang="fr-FR" dirty="0"/>
-          </a:p>
-          <a:p>
             <a:r>
               <a:rPr lang="fr-FR" sz="1200" b="0" i="0" kern="1200" dirty="0">
                 <a:solidFill>
@@ -1086,12 +948,29 @@
                 <a:ea typeface="+mn-ea"/>
                 <a:cs typeface="+mn-cs"/>
               </a:rPr>
-              <a:t>Architecture de données en 3 couches progressives, inspirée des médailles olympiques :</a:t>
-            </a:r>
-          </a:p>
-          <a:p>
-            <a:r>
-              <a:rPr lang="fr-FR" sz="1200" b="1" i="0" kern="1200" dirty="0">
+              <a:t>🟠 Orange 	&gt; Sources 	           &gt; Données d'entrée (XLSX, API)</a:t>
+            </a:r>
+          </a:p>
+          <a:p>
+            <a:pPr marL="0" marR="0" lvl="0" indent="0" algn="l" defTabSz="914400" rtl="0" eaLnBrk="1" fontAlgn="auto" latinLnBrk="0" hangingPunct="1">
+              <a:lnSpc>
+                <a:spcPct val="100000"/>
+              </a:lnSpc>
+              <a:spcBef>
+                <a:spcPts val="0"/>
+              </a:spcBef>
+              <a:spcAft>
+                <a:spcPts val="0"/>
+              </a:spcAft>
+              <a:buClrTx/>
+              <a:buSzTx/>
+              <a:buFontTx/>
+              <a:buNone/>
+              <a:tabLst/>
+              <a:defRPr/>
+            </a:pPr>
+            <a:r>
+              <a:rPr lang="fr-FR" sz="1200" b="0" i="0" kern="1200" dirty="0">
                 <a:solidFill>
                   <a:schemeClr val="tx1"/>
                 </a:solidFill>
@@ -1100,10 +979,29 @@
                 <a:ea typeface="+mn-ea"/>
                 <a:cs typeface="+mn-cs"/>
               </a:rPr>
-              <a:t>Bronze (</a:t>
-            </a:r>
-            <a:r>
-              <a:rPr lang="fr-FR" sz="1200" b="1" i="0" kern="1200" dirty="0" err="1">
+              <a:t>🔵 Bleu foncé	&gt; ETL, PostgreSQL      &gt; Traitement et stockage</a:t>
+            </a:r>
+          </a:p>
+          <a:p>
+            <a:pPr marL="0" marR="0" lvl="0" indent="0" algn="l" defTabSz="914400" rtl="0" eaLnBrk="1" fontAlgn="auto" latinLnBrk="0" hangingPunct="1">
+              <a:lnSpc>
+                <a:spcPct val="100000"/>
+              </a:lnSpc>
+              <a:spcBef>
+                <a:spcPts val="0"/>
+              </a:spcBef>
+              <a:spcAft>
+                <a:spcPts val="0"/>
+              </a:spcAft>
+              <a:buClrTx/>
+              <a:buSzTx/>
+              <a:buFontTx/>
+              <a:buNone/>
+              <a:tabLst/>
+              <a:defRPr/>
+            </a:pPr>
+            <a:r>
+              <a:rPr lang="fr-FR" sz="1200" b="0" i="0" kern="1200" dirty="0">
                 <a:solidFill>
                   <a:schemeClr val="tx1"/>
                 </a:solidFill>
@@ -1112,10 +1010,10 @@
                 <a:ea typeface="+mn-ea"/>
                 <a:cs typeface="+mn-cs"/>
               </a:rPr>
-              <a:t>raw</a:t>
-            </a:r>
-            <a:r>
-              <a:rPr lang="fr-FR" sz="1200" b="1" i="0" kern="1200" dirty="0">
+              <a:t>🔵 Bleu 	&gt; </a:t>
+            </a:r>
+            <a:r>
+              <a:rPr lang="fr-FR" sz="1200" b="0" i="0" kern="1200" dirty="0" err="1">
                 <a:solidFill>
                   <a:schemeClr val="tx1"/>
                 </a:solidFill>
@@ -1124,7 +1022,7 @@
                 <a:ea typeface="+mn-ea"/>
                 <a:cs typeface="+mn-cs"/>
               </a:rPr>
-              <a:t>)</a:t>
+              <a:t>Kestra</a:t>
             </a:r>
             <a:r>
               <a:rPr lang="fr-FR" sz="1200" b="0" i="0" kern="1200" dirty="0">
@@ -1136,12 +1034,29 @@
                 <a:ea typeface="+mn-ea"/>
                 <a:cs typeface="+mn-cs"/>
               </a:rPr>
-              <a:t> : données brutes, ingérées telles quelles depuis les sources</a:t>
-            </a:r>
-          </a:p>
-          <a:p>
-            <a:r>
-              <a:rPr lang="fr-FR" sz="1200" b="1" i="0" kern="1200" dirty="0">
+              <a:t> 	           &gt; Orchestration (le "chef d'orchestre")</a:t>
+            </a:r>
+          </a:p>
+          <a:p>
+            <a:pPr marL="0" marR="0" lvl="0" indent="0" algn="l" defTabSz="914400" rtl="0" eaLnBrk="1" fontAlgn="auto" latinLnBrk="0" hangingPunct="1">
+              <a:lnSpc>
+                <a:spcPct val="100000"/>
+              </a:lnSpc>
+              <a:spcBef>
+                <a:spcPts val="0"/>
+              </a:spcBef>
+              <a:spcAft>
+                <a:spcPts val="0"/>
+              </a:spcAft>
+              <a:buClrTx/>
+              <a:buSzTx/>
+              <a:buFontTx/>
+              <a:buNone/>
+              <a:tabLst/>
+              <a:defRPr/>
+            </a:pPr>
+            <a:r>
+              <a:rPr lang="fr-FR" sz="1200" b="0" i="0" kern="1200" dirty="0">
                 <a:solidFill>
                   <a:schemeClr val="tx1"/>
                 </a:solidFill>
@@ -1150,10 +1065,10 @@
                 <a:ea typeface="+mn-ea"/>
                 <a:cs typeface="+mn-cs"/>
               </a:rPr>
-              <a:t>Silver (</a:t>
-            </a:r>
-            <a:r>
-              <a:rPr lang="fr-FR" sz="1200" b="1" i="0" kern="1200" dirty="0" err="1">
+              <a:t>🟢 Vert 	&gt; </a:t>
+            </a:r>
+            <a:r>
+              <a:rPr lang="fr-FR" sz="1200" b="0" i="0" kern="1200" dirty="0" err="1">
                 <a:solidFill>
                   <a:schemeClr val="tx1"/>
                 </a:solidFill>
@@ -1162,10 +1077,10 @@
                 <a:ea typeface="+mn-ea"/>
                 <a:cs typeface="+mn-cs"/>
               </a:rPr>
-              <a:t>staging</a:t>
-            </a:r>
-            <a:r>
-              <a:rPr lang="fr-FR" sz="1200" b="1" i="0" kern="1200" dirty="0">
+              <a:t>dbt</a:t>
+            </a:r>
+            <a:r>
+              <a:rPr lang="fr-FR" sz="1200" b="0" i="0" kern="1200" dirty="0">
                 <a:solidFill>
                   <a:schemeClr val="tx1"/>
                 </a:solidFill>
@@ -1174,8 +1089,27 @@
                 <a:ea typeface="+mn-ea"/>
                 <a:cs typeface="+mn-cs"/>
               </a:rPr>
-              <a:t>)</a:t>
-            </a:r>
+              <a:t>, Power BI          &gt; Valorisation des données (transformations + restitution)</a:t>
+            </a:r>
+          </a:p>
+          <a:p>
+            <a:pPr marL="0" marR="0" lvl="0" indent="0" algn="l" defTabSz="914400" rtl="0" eaLnBrk="1" fontAlgn="auto" latinLnBrk="0" hangingPunct="1">
+              <a:lnSpc>
+                <a:spcPct val="100000"/>
+              </a:lnSpc>
+              <a:spcBef>
+                <a:spcPts val="0"/>
+              </a:spcBef>
+              <a:spcAft>
+                <a:spcPts val="0"/>
+              </a:spcAft>
+              <a:buClrTx/>
+              <a:buSzTx/>
+              <a:buFontTx/>
+              <a:buNone/>
+              <a:tabLst/>
+              <a:defRPr/>
+            </a:pPr>
             <a:r>
               <a:rPr lang="fr-FR" sz="1200" b="0" i="0" kern="1200" dirty="0">
                 <a:solidFill>
@@ -1186,12 +1120,29 @@
                 <a:ea typeface="+mn-ea"/>
                 <a:cs typeface="+mn-cs"/>
               </a:rPr>
-              <a:t> : données nettoyées, dédupliquées, anonymisées, conformes</a:t>
-            </a:r>
-          </a:p>
-          <a:p>
-            <a:r>
-              <a:rPr lang="fr-FR" sz="1200" b="1" i="0" kern="1200" dirty="0">
+              <a:t>🟣 Violet 	&gt; Slack 	           &gt; Communication / notifications</a:t>
+            </a:r>
+          </a:p>
+          <a:p>
+            <a:pPr marL="0" marR="0" lvl="0" indent="0" algn="l" defTabSz="914400" rtl="0" eaLnBrk="1" fontAlgn="auto" latinLnBrk="0" hangingPunct="1">
+              <a:lnSpc>
+                <a:spcPct val="100000"/>
+              </a:lnSpc>
+              <a:spcBef>
+                <a:spcPts val="0"/>
+              </a:spcBef>
+              <a:spcAft>
+                <a:spcPts val="0"/>
+              </a:spcAft>
+              <a:buClrTx/>
+              <a:buSzTx/>
+              <a:buFontTx/>
+              <a:buNone/>
+              <a:tabLst/>
+              <a:defRPr/>
+            </a:pPr>
+            <a:r>
+              <a:rPr lang="fr-FR" sz="1200" b="0" i="0" kern="1200" dirty="0">
                 <a:solidFill>
                   <a:schemeClr val="tx1"/>
                 </a:solidFill>
@@ -1200,10 +1151,10 @@
                 <a:ea typeface="+mn-ea"/>
                 <a:cs typeface="+mn-cs"/>
               </a:rPr>
-              <a:t>Gold</a:t>
-            </a:r>
-            <a:r>
-              <a:rPr lang="fr-FR" sz="1200" b="0" i="0" kern="1200" dirty="0">
+              <a:t>🔴 Rouge 	&gt; </a:t>
+            </a:r>
+            <a:r>
+              <a:rPr lang="fr-FR" sz="1200" b="0" i="0" kern="1200" dirty="0" err="1">
                 <a:solidFill>
                   <a:schemeClr val="tx1"/>
                 </a:solidFill>
@@ -1212,10 +1163,10 @@
                 <a:ea typeface="+mn-ea"/>
                 <a:cs typeface="+mn-cs"/>
               </a:rPr>
-              <a:t> : données agrégées et enrichies, prêtes à être consommées par les outils métier (</a:t>
-            </a:r>
-            <a:r>
-              <a:rPr lang="fr-FR" sz="1200" b="0" i="0" kern="1200" dirty="0" err="1">
+              <a:t>Error</a:t>
+            </a:r>
+            <a:r>
+              <a:rPr lang="fr-FR" sz="1200" b="0" i="0" kern="1200" dirty="0">
                 <a:solidFill>
                   <a:schemeClr val="tx1"/>
                 </a:solidFill>
@@ -1224,33 +1175,7 @@
                 <a:ea typeface="+mn-ea"/>
                 <a:cs typeface="+mn-cs"/>
               </a:rPr>
-              <a:t>dashboards</a:t>
-            </a:r>
-            <a:r>
-              <a:rPr lang="fr-FR" sz="1200" b="0" i="0" kern="1200" dirty="0">
-                <a:solidFill>
-                  <a:schemeClr val="tx1"/>
-                </a:solidFill>
-                <a:effectLst/>
-                <a:latin typeface="+mn-lt"/>
-                <a:ea typeface="+mn-ea"/>
-                <a:cs typeface="+mn-cs"/>
-              </a:rPr>
-              <a:t>, rapports)</a:t>
-            </a:r>
-          </a:p>
-          <a:p>
-            <a:r>
-              <a:rPr lang="fr-FR" sz="1200" b="0" i="0" kern="1200" dirty="0">
-                <a:solidFill>
-                  <a:schemeClr val="tx1"/>
-                </a:solidFill>
-                <a:effectLst/>
-                <a:latin typeface="+mn-lt"/>
-                <a:ea typeface="+mn-ea"/>
-                <a:cs typeface="+mn-cs"/>
-              </a:rPr>
-              <a:t>Chaque couche améliore la qualité et la fiabilité des données par rapport à la précédente.</a:t>
+              <a:t> Handler          &gt; Gestion des erreurs</a:t>
             </a:r>
           </a:p>
           <a:p>
@@ -1275,6 +1200,398 @@
           <a:p>
             <a:fld id="{99C5AD06-CE33-4E6E-97A2-90C845482EC4}" type="slidenum">
               <a:rPr lang="fr-FR" smtClean="0"/>
+              <a:t>4</a:t>
+            </a:fld>
+            <a:endParaRPr lang="fr-FR"/>
+          </a:p>
+        </p:txBody>
+      </p:sp>
+    </p:spTree>
+    <p:extLst>
+      <p:ext uri="{BB962C8B-B14F-4D97-AF65-F5344CB8AC3E}">
+        <p14:creationId xmlns:p14="http://schemas.microsoft.com/office/powerpoint/2010/main" val="31356481"/>
+      </p:ext>
+    </p:extLst>
+  </p:cSld>
+  <p:clrMapOvr>
+    <a:masterClrMapping/>
+  </p:clrMapOvr>
+</p:notes>
+</file>
+
+<file path=ppt/notesSlides/notesSlide3.xml><?xml version="1.0" encoding="utf-8"?>
+<p:notes xmlns:a="http://schemas.openxmlformats.org/drawingml/2006/main" xmlns:r="http://schemas.openxmlformats.org/officeDocument/2006/relationships" xmlns:p="http://schemas.openxmlformats.org/presentationml/2006/main">
+  <p:cSld>
+    <p:spTree>
+      <p:nvGrpSpPr>
+        <p:cNvPr id="1" name=""/>
+        <p:cNvGrpSpPr/>
+        <p:nvPr/>
+      </p:nvGrpSpPr>
+      <p:grpSpPr>
+        <a:xfrm>
+          <a:off x="0" y="0"/>
+          <a:ext cx="0" cy="0"/>
+          <a:chOff x="0" y="0"/>
+          <a:chExt cx="0" cy="0"/>
+        </a:xfrm>
+      </p:grpSpPr>
+      <p:sp>
+        <p:nvSpPr>
+          <p:cNvPr id="2" name="Espace réservé de l'image des diapositives 1"/>
+          <p:cNvSpPr>
+            <a:spLocks noGrp="1" noRot="1" noChangeAspect="1"/>
+          </p:cNvSpPr>
+          <p:nvPr>
+            <p:ph type="sldImg"/>
+          </p:nvPr>
+        </p:nvSpPr>
+        <p:spPr/>
+      </p:sp>
+      <p:sp>
+        <p:nvSpPr>
+          <p:cNvPr id="3" name="Espace réservé des notes 2"/>
+          <p:cNvSpPr>
+            <a:spLocks noGrp="1"/>
+          </p:cNvSpPr>
+          <p:nvPr>
+            <p:ph type="body" idx="1"/>
+          </p:nvPr>
+        </p:nvSpPr>
+        <p:spPr/>
+        <p:txBody>
+          <a:bodyPr/>
+          <a:lstStyle/>
+          <a:p>
+            <a:pPr algn="l">
+              <a:spcAft>
+                <a:spcPts val="600"/>
+              </a:spcAft>
+              <a:defRPr sz="1400" b="1">
+                <a:solidFill>
+                  <a:srgbClr val="2C3E50"/>
+                </a:solidFill>
+                <a:latin typeface="Calibri"/>
+              </a:defRPr>
+            </a:pPr>
+            <a:r>
+              <a:rPr lang="fr-FR" dirty="0"/>
+              <a:t>10 tables + 1 vue — Architecture </a:t>
+            </a:r>
+            <a:r>
+              <a:rPr lang="fr-FR" dirty="0" err="1"/>
+              <a:t>Medallion</a:t>
+            </a:r>
+            <a:r>
+              <a:rPr lang="fr-FR" dirty="0"/>
+              <a:t> adaptée au RGPD</a:t>
+            </a:r>
+          </a:p>
+          <a:p>
+            <a:pPr algn="l">
+              <a:spcAft>
+                <a:spcPts val="600"/>
+              </a:spcAft>
+              <a:defRPr sz="1200" b="0">
+                <a:solidFill>
+                  <a:srgbClr val="85929E"/>
+                </a:solidFill>
+                <a:latin typeface="Calibri"/>
+              </a:defRPr>
+            </a:pPr>
+            <a:r>
+              <a:rPr lang="fr-FR" dirty="0"/>
+              <a:t>• XLSX = couche </a:t>
+            </a:r>
+            <a:r>
+              <a:rPr lang="fr-FR" dirty="0" err="1"/>
+              <a:t>raw</a:t>
+            </a:r>
+            <a:r>
+              <a:rPr lang="fr-FR" dirty="0"/>
+              <a:t> logique (sur disque, jamais copiés en base) — seules les données </a:t>
+            </a:r>
+            <a:r>
+              <a:rPr lang="fr-FR" dirty="0" err="1"/>
+              <a:t>Strava</a:t>
+            </a:r>
+            <a:r>
+              <a:rPr lang="fr-FR" dirty="0"/>
+              <a:t> passent par </a:t>
+            </a:r>
+            <a:r>
+              <a:rPr lang="fr-FR" dirty="0" err="1"/>
+              <a:t>raw</a:t>
+            </a:r>
+            <a:r>
+              <a:rPr lang="fr-FR" dirty="0"/>
+              <a:t> en base</a:t>
+            </a:r>
+          </a:p>
+          <a:p>
+            <a:pPr algn="l">
+              <a:spcAft>
+                <a:spcPts val="600"/>
+              </a:spcAft>
+              <a:defRPr sz="1200" b="0">
+                <a:solidFill>
+                  <a:srgbClr val="85929E"/>
+                </a:solidFill>
+                <a:latin typeface="Calibri"/>
+              </a:defRPr>
+            </a:pPr>
+            <a:r>
+              <a:rPr lang="fr-FR" dirty="0"/>
+              <a:t>• </a:t>
+            </a:r>
+            <a:r>
+              <a:rPr lang="fr-FR" dirty="0" err="1"/>
+              <a:t>staging</a:t>
+            </a:r>
+            <a:r>
+              <a:rPr lang="fr-FR" dirty="0"/>
+              <a:t> = 1er niveau DB : anonymisé, nettoyé, incrémental (UPSERT + soft-</a:t>
+            </a:r>
+            <a:r>
+              <a:rPr lang="fr-FR" dirty="0" err="1"/>
+              <a:t>delete</a:t>
+            </a:r>
+            <a:r>
+              <a:rPr lang="fr-FR" dirty="0"/>
+              <a:t>)</a:t>
+            </a:r>
+          </a:p>
+          <a:p>
+            <a:pPr algn="l">
+              <a:spcAft>
+                <a:spcPts val="600"/>
+              </a:spcAft>
+              <a:defRPr sz="1200" b="0">
+                <a:solidFill>
+                  <a:srgbClr val="85929E"/>
+                </a:solidFill>
+                <a:latin typeface="Calibri"/>
+              </a:defRPr>
+            </a:pPr>
+            <a:r>
+              <a:rPr lang="fr-FR" dirty="0"/>
+              <a:t>• gold = métriques métier calculées par </a:t>
+            </a:r>
+            <a:r>
+              <a:rPr lang="fr-FR" dirty="0" err="1"/>
+              <a:t>dbt</a:t>
+            </a:r>
+            <a:r>
+              <a:rPr lang="fr-FR" dirty="0"/>
+              <a:t> (éligibilités, impact financier)</a:t>
+            </a:r>
+          </a:p>
+          <a:p>
+            <a:endParaRPr lang="fr-FR" dirty="0"/>
+          </a:p>
+          <a:p>
+            <a:endParaRPr lang="fr-FR" dirty="0"/>
+          </a:p>
+          <a:p>
+            <a:r>
+              <a:rPr lang="fr-FR" sz="1200" b="0" i="0" kern="1200" dirty="0">
+                <a:solidFill>
+                  <a:schemeClr val="tx1"/>
+                </a:solidFill>
+                <a:effectLst/>
+                <a:latin typeface="+mn-lt"/>
+                <a:ea typeface="+mn-ea"/>
+                <a:cs typeface="+mn-cs"/>
+              </a:rPr>
+              <a:t>Architecture de données en 3 couches progressives, inspirée des médailles olympiques :</a:t>
+            </a:r>
+          </a:p>
+          <a:p>
+            <a:r>
+              <a:rPr lang="fr-FR" sz="1200" b="1" i="0" kern="1200" dirty="0">
+                <a:solidFill>
+                  <a:schemeClr val="tx1"/>
+                </a:solidFill>
+                <a:effectLst/>
+                <a:latin typeface="+mn-lt"/>
+                <a:ea typeface="+mn-ea"/>
+                <a:cs typeface="+mn-cs"/>
+              </a:rPr>
+              <a:t>Bronze (</a:t>
+            </a:r>
+            <a:r>
+              <a:rPr lang="fr-FR" sz="1200" b="1" i="0" kern="1200" dirty="0" err="1">
+                <a:solidFill>
+                  <a:schemeClr val="tx1"/>
+                </a:solidFill>
+                <a:effectLst/>
+                <a:latin typeface="+mn-lt"/>
+                <a:ea typeface="+mn-ea"/>
+                <a:cs typeface="+mn-cs"/>
+              </a:rPr>
+              <a:t>raw</a:t>
+            </a:r>
+            <a:r>
+              <a:rPr lang="fr-FR" sz="1200" b="1" i="0" kern="1200" dirty="0">
+                <a:solidFill>
+                  <a:schemeClr val="tx1"/>
+                </a:solidFill>
+                <a:effectLst/>
+                <a:latin typeface="+mn-lt"/>
+                <a:ea typeface="+mn-ea"/>
+                <a:cs typeface="+mn-cs"/>
+              </a:rPr>
+              <a:t>)</a:t>
+            </a:r>
+            <a:r>
+              <a:rPr lang="fr-FR" sz="1200" b="0" i="0" kern="1200" dirty="0">
+                <a:solidFill>
+                  <a:schemeClr val="tx1"/>
+                </a:solidFill>
+                <a:effectLst/>
+                <a:latin typeface="+mn-lt"/>
+                <a:ea typeface="+mn-ea"/>
+                <a:cs typeface="+mn-cs"/>
+              </a:rPr>
+              <a:t> : données brutes, ingérées telles quelles depuis les sources</a:t>
+            </a:r>
+          </a:p>
+          <a:p>
+            <a:r>
+              <a:rPr lang="fr-FR" sz="1200" b="1" i="0" kern="1200" dirty="0">
+                <a:solidFill>
+                  <a:schemeClr val="tx1"/>
+                </a:solidFill>
+                <a:effectLst/>
+                <a:latin typeface="+mn-lt"/>
+                <a:ea typeface="+mn-ea"/>
+                <a:cs typeface="+mn-cs"/>
+              </a:rPr>
+              <a:t>Silver (</a:t>
+            </a:r>
+            <a:r>
+              <a:rPr lang="fr-FR" sz="1200" b="1" i="0" kern="1200" dirty="0" err="1">
+                <a:solidFill>
+                  <a:schemeClr val="tx1"/>
+                </a:solidFill>
+                <a:effectLst/>
+                <a:latin typeface="+mn-lt"/>
+                <a:ea typeface="+mn-ea"/>
+                <a:cs typeface="+mn-cs"/>
+              </a:rPr>
+              <a:t>staging</a:t>
+            </a:r>
+            <a:r>
+              <a:rPr lang="fr-FR" sz="1200" b="1" i="0" kern="1200" dirty="0">
+                <a:solidFill>
+                  <a:schemeClr val="tx1"/>
+                </a:solidFill>
+                <a:effectLst/>
+                <a:latin typeface="+mn-lt"/>
+                <a:ea typeface="+mn-ea"/>
+                <a:cs typeface="+mn-cs"/>
+              </a:rPr>
+              <a:t>)</a:t>
+            </a:r>
+            <a:r>
+              <a:rPr lang="fr-FR" sz="1200" b="0" i="0" kern="1200" dirty="0">
+                <a:solidFill>
+                  <a:schemeClr val="tx1"/>
+                </a:solidFill>
+                <a:effectLst/>
+                <a:latin typeface="+mn-lt"/>
+                <a:ea typeface="+mn-ea"/>
+                <a:cs typeface="+mn-cs"/>
+              </a:rPr>
+              <a:t> : données nettoyées, dédupliquées, anonymisées, conformes</a:t>
+            </a:r>
+          </a:p>
+          <a:p>
+            <a:r>
+              <a:rPr lang="fr-FR" sz="1200" b="1" i="0" kern="1200" dirty="0">
+                <a:solidFill>
+                  <a:schemeClr val="tx1"/>
+                </a:solidFill>
+                <a:effectLst/>
+                <a:latin typeface="+mn-lt"/>
+                <a:ea typeface="+mn-ea"/>
+                <a:cs typeface="+mn-cs"/>
+              </a:rPr>
+              <a:t>Gold</a:t>
+            </a:r>
+            <a:r>
+              <a:rPr lang="fr-FR" sz="1200" b="0" i="0" kern="1200" dirty="0">
+                <a:solidFill>
+                  <a:schemeClr val="tx1"/>
+                </a:solidFill>
+                <a:effectLst/>
+                <a:latin typeface="+mn-lt"/>
+                <a:ea typeface="+mn-ea"/>
+                <a:cs typeface="+mn-cs"/>
+              </a:rPr>
+              <a:t> : données agrégées et enrichies, prêtes à être consommées par les outils métier (</a:t>
+            </a:r>
+            <a:r>
+              <a:rPr lang="fr-FR" sz="1200" b="0" i="0" kern="1200" dirty="0" err="1">
+                <a:solidFill>
+                  <a:schemeClr val="tx1"/>
+                </a:solidFill>
+                <a:effectLst/>
+                <a:latin typeface="+mn-lt"/>
+                <a:ea typeface="+mn-ea"/>
+                <a:cs typeface="+mn-cs"/>
+              </a:rPr>
+              <a:t>dashboards</a:t>
+            </a:r>
+            <a:r>
+              <a:rPr lang="fr-FR" sz="1200" b="0" i="0" kern="1200" dirty="0">
+                <a:solidFill>
+                  <a:schemeClr val="tx1"/>
+                </a:solidFill>
+                <a:effectLst/>
+                <a:latin typeface="+mn-lt"/>
+                <a:ea typeface="+mn-ea"/>
+                <a:cs typeface="+mn-cs"/>
+              </a:rPr>
+              <a:t>, rapports)</a:t>
+            </a:r>
+          </a:p>
+          <a:p>
+            <a:r>
+              <a:rPr lang="fr-FR" sz="1200" b="0" i="0" kern="1200" dirty="0">
+                <a:solidFill>
+                  <a:schemeClr val="tx1"/>
+                </a:solidFill>
+                <a:effectLst/>
+                <a:latin typeface="+mn-lt"/>
+                <a:ea typeface="+mn-ea"/>
+                <a:cs typeface="+mn-cs"/>
+              </a:rPr>
+              <a:t>Chaque couche améliore la qualité et la fiabilité des données par rapport à la précédente.</a:t>
+            </a:r>
+          </a:p>
+          <a:p>
+            <a:endParaRPr lang="fr-FR" dirty="0"/>
+          </a:p>
+        </p:txBody>
+      </p:sp>
+      <p:sp>
+        <p:nvSpPr>
+          <p:cNvPr id="4" name="Espace réservé du numéro de diapositive 3"/>
+          <p:cNvSpPr>
+            <a:spLocks noGrp="1"/>
+          </p:cNvSpPr>
+          <p:nvPr>
+            <p:ph type="sldNum" sz="quarter" idx="5"/>
+          </p:nvPr>
+        </p:nvSpPr>
+        <p:spPr/>
+        <p:txBody>
+          <a:bodyPr/>
+          <a:lstStyle/>
+          <a:p>
+            <a:fld id="{99C5AD06-CE33-4E6E-97A2-90C845482EC4}" type="slidenum">
+              <a:rPr lang="fr-FR" smtClean="0"/>
               <a:t>5</a:t>
             </a:fld>
             <a:endParaRPr lang="fr-FR"/>
@@ -1294,7 +1611,7 @@
 </p:notes>
 </file>
 
-<file path=ppt/notesSlides/notesSlide3.xml><?xml version="1.0" encoding="utf-8"?>
+<file path=ppt/notesSlides/notesSlide4.xml><?xml version="1.0" encoding="utf-8"?>
 <p:notes xmlns:a="http://schemas.openxmlformats.org/drawingml/2006/main" xmlns:r="http://schemas.openxmlformats.org/officeDocument/2006/relationships" xmlns:p="http://schemas.openxmlformats.org/presentationml/2006/main">
   <p:cSld>
     <p:spTree>
@@ -1627,7 +1944,7 @@
 </p:notes>
 </file>
 
-<file path=ppt/notesSlides/notesSlide4.xml><?xml version="1.0" encoding="utf-8"?>
+<file path=ppt/notesSlides/notesSlide5.xml><?xml version="1.0" encoding="utf-8"?>
 <p:notes xmlns:a="http://schemas.openxmlformats.org/drawingml/2006/main" xmlns:r="http://schemas.openxmlformats.org/officeDocument/2006/relationships" xmlns:p="http://schemas.openxmlformats.org/presentationml/2006/main">
   <p:cSld>
     <p:spTree>
@@ -1871,7 +2188,7 @@
 </p:notes>
 </file>
 
-<file path=ppt/notesSlides/notesSlide5.xml><?xml version="1.0" encoding="utf-8"?>
+<file path=ppt/notesSlides/notesSlide6.xml><?xml version="1.0" encoding="utf-8"?>
 <p:notes xmlns:a="http://schemas.openxmlformats.org/drawingml/2006/main" xmlns:r="http://schemas.openxmlformats.org/officeDocument/2006/relationships" xmlns:p="http://schemas.openxmlformats.org/presentationml/2006/main">
   <p:cSld>
     <p:spTree>
@@ -1933,6 +2250,583 @@
           <a:bodyPr/>
           <a:lstStyle/>
           <a:p>
+            <a:r>
+              <a:rPr lang="fr-FR" sz="1200" b="0" i="0" kern="1200" dirty="0">
+                <a:solidFill>
+                  <a:schemeClr val="tx1"/>
+                </a:solidFill>
+                <a:effectLst/>
+                <a:latin typeface="+mn-lt"/>
+                <a:ea typeface="+mn-ea"/>
+                <a:cs typeface="+mn-cs"/>
+              </a:rPr>
+              <a:t>La vraie question serait plutôt </a:t>
+            </a:r>
+            <a:r>
+              <a:rPr lang="fr-FR" sz="1200" b="0" i="1" kern="1200" dirty="0">
+                <a:solidFill>
+                  <a:schemeClr val="tx1"/>
+                </a:solidFill>
+                <a:effectLst/>
+                <a:latin typeface="+mn-lt"/>
+                <a:ea typeface="+mn-ea"/>
+                <a:cs typeface="+mn-cs"/>
+              </a:rPr>
+              <a:t>pourquoi pas tout en Python</a:t>
+            </a:r>
+            <a:r>
+              <a:rPr lang="fr-FR" sz="1200" b="0" i="0" kern="1200" dirty="0">
+                <a:solidFill>
+                  <a:schemeClr val="tx1"/>
+                </a:solidFill>
+                <a:effectLst/>
+                <a:latin typeface="+mn-lt"/>
+                <a:ea typeface="+mn-ea"/>
+                <a:cs typeface="+mn-cs"/>
+              </a:rPr>
+              <a:t> : parce que les transformations SQL dans </a:t>
+            </a:r>
+            <a:r>
+              <a:rPr lang="fr-FR" sz="1200" b="0" i="0" kern="1200" dirty="0" err="1">
+                <a:solidFill>
+                  <a:schemeClr val="tx1"/>
+                </a:solidFill>
+                <a:effectLst/>
+                <a:latin typeface="+mn-lt"/>
+                <a:ea typeface="+mn-ea"/>
+                <a:cs typeface="+mn-cs"/>
+              </a:rPr>
+              <a:t>dbt</a:t>
+            </a:r>
+            <a:r>
+              <a:rPr lang="fr-FR" sz="1200" b="0" i="0" kern="1200" dirty="0">
+                <a:solidFill>
+                  <a:schemeClr val="tx1"/>
+                </a:solidFill>
+                <a:effectLst/>
+                <a:latin typeface="+mn-lt"/>
+                <a:ea typeface="+mn-ea"/>
+                <a:cs typeface="+mn-cs"/>
+              </a:rPr>
+              <a:t> sont plus lisibles, testables et maintenables que des </a:t>
+            </a:r>
+            <a:r>
+              <a:rPr lang="fr-FR" sz="1200" b="0" i="0" kern="1200" dirty="0" err="1">
+                <a:solidFill>
+                  <a:schemeClr val="tx1"/>
+                </a:solidFill>
+                <a:effectLst/>
+                <a:latin typeface="+mn-lt"/>
+                <a:ea typeface="+mn-ea"/>
+                <a:cs typeface="+mn-cs"/>
+              </a:rPr>
+              <a:t>DataFrames</a:t>
+            </a:r>
+            <a:r>
+              <a:rPr lang="fr-FR" sz="1200" b="0" i="0" kern="1200" dirty="0">
+                <a:solidFill>
+                  <a:schemeClr val="tx1"/>
+                </a:solidFill>
+                <a:effectLst/>
+                <a:latin typeface="+mn-lt"/>
+                <a:ea typeface="+mn-ea"/>
+                <a:cs typeface="+mn-cs"/>
+              </a:rPr>
+              <a:t> pandas pour de la logique métier complexe (croisements de tables, </a:t>
+            </a:r>
+            <a:r>
+              <a:rPr lang="fr-FR" sz="1200" b="0" i="0" kern="1200" dirty="0" err="1">
+                <a:solidFill>
+                  <a:schemeClr val="tx1"/>
+                </a:solidFill>
+                <a:effectLst/>
+                <a:latin typeface="+mn-lt"/>
+                <a:ea typeface="+mn-ea"/>
+                <a:cs typeface="+mn-cs"/>
+              </a:rPr>
+              <a:t>aggrégations</a:t>
+            </a:r>
+            <a:r>
+              <a:rPr lang="fr-FR" sz="1200" b="0" i="0" kern="1200" dirty="0">
+                <a:solidFill>
+                  <a:schemeClr val="tx1"/>
+                </a:solidFill>
+                <a:effectLst/>
+                <a:latin typeface="+mn-lt"/>
+                <a:ea typeface="+mn-ea"/>
+                <a:cs typeface="+mn-cs"/>
+              </a:rPr>
+              <a:t> par département)</a:t>
+            </a:r>
+          </a:p>
+          <a:p>
+            <a:endParaRPr lang="fr-FR" sz="1200" b="0" i="0" kern="1200" dirty="0">
+              <a:solidFill>
+                <a:schemeClr val="tx1"/>
+              </a:solidFill>
+              <a:effectLst/>
+              <a:latin typeface="+mn-lt"/>
+              <a:ea typeface="+mn-ea"/>
+              <a:cs typeface="+mn-cs"/>
+            </a:endParaRPr>
+          </a:p>
+          <a:p>
+            <a:r>
+              <a:rPr lang="fr-FR" sz="1200" b="1" i="0" kern="1200" dirty="0">
+                <a:solidFill>
+                  <a:schemeClr val="tx1"/>
+                </a:solidFill>
+                <a:effectLst/>
+                <a:latin typeface="+mn-lt"/>
+                <a:ea typeface="+mn-ea"/>
+                <a:cs typeface="+mn-cs"/>
+              </a:rPr>
+              <a:t>Tests intégrés</a:t>
+            </a:r>
+            <a:r>
+              <a:rPr lang="fr-FR" sz="1200" b="0" i="0" kern="1200" dirty="0">
+                <a:solidFill>
+                  <a:schemeClr val="tx1"/>
+                </a:solidFill>
+                <a:effectLst/>
+                <a:latin typeface="+mn-lt"/>
+                <a:ea typeface="+mn-ea"/>
+                <a:cs typeface="+mn-cs"/>
+              </a:rPr>
+              <a:t> — 37 tests SQL (</a:t>
+            </a:r>
+            <a:r>
+              <a:rPr lang="fr-FR" sz="1200" b="0" i="0" kern="1200" dirty="0" err="1">
+                <a:solidFill>
+                  <a:schemeClr val="tx1"/>
+                </a:solidFill>
+                <a:effectLst/>
+                <a:latin typeface="+mn-lt"/>
+                <a:ea typeface="+mn-ea"/>
+                <a:cs typeface="+mn-cs"/>
+              </a:rPr>
+              <a:t>not_null</a:t>
+            </a:r>
+            <a:r>
+              <a:rPr lang="fr-FR" sz="1200" b="0" i="0" kern="1200" dirty="0">
+                <a:solidFill>
+                  <a:schemeClr val="tx1"/>
+                </a:solidFill>
+                <a:effectLst/>
+                <a:latin typeface="+mn-lt"/>
+                <a:ea typeface="+mn-ea"/>
+                <a:cs typeface="+mn-cs"/>
+              </a:rPr>
+              <a:t>, unique, </a:t>
+            </a:r>
+            <a:r>
+              <a:rPr lang="fr-FR" sz="1200" b="0" i="0" kern="1200" dirty="0" err="1">
+                <a:solidFill>
+                  <a:schemeClr val="tx1"/>
+                </a:solidFill>
+                <a:effectLst/>
+                <a:latin typeface="+mn-lt"/>
+                <a:ea typeface="+mn-ea"/>
+                <a:cs typeface="+mn-cs"/>
+              </a:rPr>
+              <a:t>accepted_values</a:t>
+            </a:r>
+            <a:r>
+              <a:rPr lang="fr-FR" sz="1200" b="0" i="0" kern="1200" dirty="0">
+                <a:solidFill>
+                  <a:schemeClr val="tx1"/>
+                </a:solidFill>
+                <a:effectLst/>
+                <a:latin typeface="+mn-lt"/>
+                <a:ea typeface="+mn-ea"/>
+                <a:cs typeface="+mn-cs"/>
+              </a:rPr>
+              <a:t>) sans écrire de code de test supplémentaire</a:t>
+            </a:r>
+          </a:p>
+          <a:p>
+            <a:r>
+              <a:rPr lang="fr-FR" sz="1200" b="1" i="0" kern="1200" dirty="0">
+                <a:solidFill>
+                  <a:schemeClr val="tx1"/>
+                </a:solidFill>
+                <a:effectLst/>
+                <a:latin typeface="+mn-lt"/>
+                <a:ea typeface="+mn-ea"/>
+                <a:cs typeface="+mn-cs"/>
+              </a:rPr>
+              <a:t>Documentation automatique</a:t>
+            </a:r>
+            <a:r>
+              <a:rPr lang="fr-FR" sz="1200" b="0" i="0" kern="1200" dirty="0">
+                <a:solidFill>
+                  <a:schemeClr val="tx1"/>
+                </a:solidFill>
+                <a:effectLst/>
+                <a:latin typeface="+mn-lt"/>
+                <a:ea typeface="+mn-ea"/>
+                <a:cs typeface="+mn-cs"/>
+              </a:rPr>
+              <a:t> — </a:t>
+            </a:r>
+            <a:r>
+              <a:rPr lang="fr-FR" sz="1200" b="0" i="0" kern="1200" dirty="0" err="1">
+                <a:solidFill>
+                  <a:schemeClr val="tx1"/>
+                </a:solidFill>
+                <a:effectLst/>
+                <a:latin typeface="+mn-lt"/>
+                <a:ea typeface="+mn-ea"/>
+                <a:cs typeface="+mn-cs"/>
+              </a:rPr>
+              <a:t>dbt</a:t>
+            </a:r>
+            <a:r>
+              <a:rPr lang="fr-FR" sz="1200" b="0" i="0" kern="1200" dirty="0">
+                <a:solidFill>
+                  <a:schemeClr val="tx1"/>
+                </a:solidFill>
+                <a:effectLst/>
+                <a:latin typeface="+mn-lt"/>
+                <a:ea typeface="+mn-ea"/>
+                <a:cs typeface="+mn-cs"/>
+              </a:rPr>
+              <a:t> docs </a:t>
+            </a:r>
+            <a:r>
+              <a:rPr lang="fr-FR" sz="1200" b="0" i="0" kern="1200" dirty="0" err="1">
+                <a:solidFill>
+                  <a:schemeClr val="tx1"/>
+                </a:solidFill>
+                <a:effectLst/>
+                <a:latin typeface="+mn-lt"/>
+                <a:ea typeface="+mn-ea"/>
+                <a:cs typeface="+mn-cs"/>
+              </a:rPr>
+              <a:t>generate</a:t>
+            </a:r>
+            <a:r>
+              <a:rPr lang="fr-FR" sz="1200" b="0" i="0" kern="1200" dirty="0">
+                <a:solidFill>
+                  <a:schemeClr val="tx1"/>
+                </a:solidFill>
+                <a:effectLst/>
+                <a:latin typeface="+mn-lt"/>
+                <a:ea typeface="+mn-ea"/>
+                <a:cs typeface="+mn-cs"/>
+              </a:rPr>
+              <a:t> produit le </a:t>
+            </a:r>
+            <a:r>
+              <a:rPr lang="fr-FR" sz="1200" b="0" i="0" kern="1200" dirty="0" err="1">
+                <a:solidFill>
+                  <a:schemeClr val="tx1"/>
+                </a:solidFill>
+                <a:effectLst/>
+                <a:latin typeface="+mn-lt"/>
+                <a:ea typeface="+mn-ea"/>
+                <a:cs typeface="+mn-cs"/>
+              </a:rPr>
+              <a:t>lineage</a:t>
+            </a:r>
+            <a:r>
+              <a:rPr lang="fr-FR" sz="1200" b="0" i="0" kern="1200" dirty="0">
+                <a:solidFill>
+                  <a:schemeClr val="tx1"/>
+                </a:solidFill>
+                <a:effectLst/>
+                <a:latin typeface="+mn-lt"/>
+                <a:ea typeface="+mn-ea"/>
+                <a:cs typeface="+mn-cs"/>
+              </a:rPr>
+              <a:t> graph et le </a:t>
+            </a:r>
+            <a:r>
+              <a:rPr lang="fr-FR" sz="1200" b="0" i="0" kern="1200" dirty="0" err="1">
+                <a:solidFill>
+                  <a:schemeClr val="tx1"/>
+                </a:solidFill>
+                <a:effectLst/>
+                <a:latin typeface="+mn-lt"/>
+                <a:ea typeface="+mn-ea"/>
+                <a:cs typeface="+mn-cs"/>
+              </a:rPr>
+              <a:t>catalog</a:t>
+            </a:r>
+            <a:r>
+              <a:rPr lang="fr-FR" sz="1200" b="0" i="0" kern="1200" dirty="0">
+                <a:solidFill>
+                  <a:schemeClr val="tx1"/>
+                </a:solidFill>
+                <a:effectLst/>
+                <a:latin typeface="+mn-lt"/>
+                <a:ea typeface="+mn-ea"/>
+                <a:cs typeface="+mn-cs"/>
+              </a:rPr>
+              <a:t> servis par </a:t>
+            </a:r>
+            <a:r>
+              <a:rPr lang="fr-FR" sz="1200" b="0" i="0" kern="1200" dirty="0" err="1">
+                <a:solidFill>
+                  <a:schemeClr val="tx1"/>
+                </a:solidFill>
+                <a:effectLst/>
+                <a:latin typeface="+mn-lt"/>
+                <a:ea typeface="+mn-ea"/>
+                <a:cs typeface="+mn-cs"/>
+              </a:rPr>
+              <a:t>nginx</a:t>
+            </a:r>
+            <a:r>
+              <a:rPr lang="fr-FR" sz="1200" b="0" i="0" kern="1200" dirty="0">
+                <a:solidFill>
+                  <a:schemeClr val="tx1"/>
+                </a:solidFill>
+                <a:effectLst/>
+                <a:latin typeface="+mn-lt"/>
+                <a:ea typeface="+mn-ea"/>
+                <a:cs typeface="+mn-cs"/>
+              </a:rPr>
+              <a:t> sur le port 4080</a:t>
+            </a:r>
+          </a:p>
+          <a:p>
+            <a:r>
+              <a:rPr lang="fr-FR" sz="1200" b="1" i="0" kern="1200" dirty="0">
+                <a:solidFill>
+                  <a:schemeClr val="tx1"/>
+                </a:solidFill>
+                <a:effectLst/>
+                <a:latin typeface="+mn-lt"/>
+                <a:ea typeface="+mn-ea"/>
+                <a:cs typeface="+mn-cs"/>
+              </a:rPr>
+              <a:t>Idempotence garantie</a:t>
+            </a:r>
+            <a:r>
+              <a:rPr lang="fr-FR" sz="1200" b="0" i="0" kern="1200" dirty="0">
+                <a:solidFill>
+                  <a:schemeClr val="tx1"/>
+                </a:solidFill>
+                <a:effectLst/>
+                <a:latin typeface="+mn-lt"/>
+                <a:ea typeface="+mn-ea"/>
+                <a:cs typeface="+mn-cs"/>
+              </a:rPr>
+              <a:t> — un </a:t>
+            </a:r>
+            <a:r>
+              <a:rPr lang="fr-FR" sz="1200" b="0" i="0" kern="1200" dirty="0" err="1">
+                <a:solidFill>
+                  <a:schemeClr val="tx1"/>
+                </a:solidFill>
+                <a:effectLst/>
+                <a:latin typeface="+mn-lt"/>
+                <a:ea typeface="+mn-ea"/>
+                <a:cs typeface="+mn-cs"/>
+              </a:rPr>
+              <a:t>dbt</a:t>
+            </a:r>
+            <a:r>
+              <a:rPr lang="fr-FR" sz="1200" b="0" i="0" kern="1200" dirty="0">
+                <a:solidFill>
+                  <a:schemeClr val="tx1"/>
+                </a:solidFill>
+                <a:effectLst/>
+                <a:latin typeface="+mn-lt"/>
+                <a:ea typeface="+mn-ea"/>
+                <a:cs typeface="+mn-cs"/>
+              </a:rPr>
+              <a:t> run peut être relancé N fois sans effet de bord (contrairement aux INSERT/TRUNCATE manuels)</a:t>
+            </a:r>
+          </a:p>
+          <a:p>
+            <a:r>
+              <a:rPr lang="fr-FR" sz="1200" b="1" i="0" kern="1200" dirty="0">
+                <a:solidFill>
+                  <a:schemeClr val="tx1"/>
+                </a:solidFill>
+                <a:effectLst/>
+                <a:latin typeface="+mn-lt"/>
+                <a:ea typeface="+mn-ea"/>
+                <a:cs typeface="+mn-cs"/>
+              </a:rPr>
+              <a:t>Séparation des responsabilités</a:t>
+            </a:r>
+            <a:r>
+              <a:rPr lang="fr-FR" sz="1200" b="0" i="0" kern="1200" dirty="0">
+                <a:solidFill>
+                  <a:schemeClr val="tx1"/>
+                </a:solidFill>
+                <a:effectLst/>
+                <a:latin typeface="+mn-lt"/>
+                <a:ea typeface="+mn-ea"/>
+                <a:cs typeface="+mn-cs"/>
+              </a:rPr>
+              <a:t> — Python gère l'ingestion et les appels API (Google </a:t>
+            </a:r>
+            <a:r>
+              <a:rPr lang="fr-FR" sz="1200" b="0" i="0" kern="1200" dirty="0" err="1">
+                <a:solidFill>
+                  <a:schemeClr val="tx1"/>
+                </a:solidFill>
+                <a:effectLst/>
+                <a:latin typeface="+mn-lt"/>
+                <a:ea typeface="+mn-ea"/>
+                <a:cs typeface="+mn-cs"/>
+              </a:rPr>
+              <a:t>Maps</a:t>
+            </a:r>
+            <a:r>
+              <a:rPr lang="fr-FR" sz="1200" b="0" i="0" kern="1200" dirty="0">
+                <a:solidFill>
+                  <a:schemeClr val="tx1"/>
+                </a:solidFill>
+                <a:effectLst/>
+                <a:latin typeface="+mn-lt"/>
+                <a:ea typeface="+mn-ea"/>
+                <a:cs typeface="+mn-cs"/>
+              </a:rPr>
+              <a:t>, </a:t>
+            </a:r>
+            <a:r>
+              <a:rPr lang="fr-FR" sz="1200" b="0" i="0" kern="1200" dirty="0" err="1">
+                <a:solidFill>
+                  <a:schemeClr val="tx1"/>
+                </a:solidFill>
+                <a:effectLst/>
+                <a:latin typeface="+mn-lt"/>
+                <a:ea typeface="+mn-ea"/>
+                <a:cs typeface="+mn-cs"/>
+              </a:rPr>
+              <a:t>Strava</a:t>
+            </a:r>
+            <a:r>
+              <a:rPr lang="fr-FR" sz="1200" b="0" i="0" kern="1200" dirty="0">
+                <a:solidFill>
+                  <a:schemeClr val="tx1"/>
+                </a:solidFill>
+                <a:effectLst/>
+                <a:latin typeface="+mn-lt"/>
+                <a:ea typeface="+mn-ea"/>
+                <a:cs typeface="+mn-cs"/>
+              </a:rPr>
+              <a:t>), </a:t>
+            </a:r>
+            <a:r>
+              <a:rPr lang="fr-FR" sz="1200" b="0" i="0" kern="1200" dirty="0" err="1">
+                <a:solidFill>
+                  <a:schemeClr val="tx1"/>
+                </a:solidFill>
+                <a:effectLst/>
+                <a:latin typeface="+mn-lt"/>
+                <a:ea typeface="+mn-ea"/>
+                <a:cs typeface="+mn-cs"/>
+              </a:rPr>
+              <a:t>dbt</a:t>
+            </a:r>
+            <a:r>
+              <a:rPr lang="fr-FR" sz="1200" b="0" i="0" kern="1200" dirty="0">
+                <a:solidFill>
+                  <a:schemeClr val="tx1"/>
+                </a:solidFill>
+                <a:effectLst/>
+                <a:latin typeface="+mn-lt"/>
+                <a:ea typeface="+mn-ea"/>
+                <a:cs typeface="+mn-cs"/>
+              </a:rPr>
+              <a:t> gère uniquement les transformations SQL pures (</a:t>
+            </a:r>
+            <a:r>
+              <a:rPr lang="fr-FR" sz="1200" b="0" i="0" kern="1200" dirty="0" err="1">
+                <a:solidFill>
+                  <a:schemeClr val="tx1"/>
+                </a:solidFill>
+                <a:effectLst/>
+                <a:latin typeface="+mn-lt"/>
+                <a:ea typeface="+mn-ea"/>
+                <a:cs typeface="+mn-cs"/>
+              </a:rPr>
+              <a:t>staging</a:t>
+            </a:r>
+            <a:r>
+              <a:rPr lang="fr-FR" sz="1200" b="0" i="0" kern="1200" dirty="0">
+                <a:solidFill>
+                  <a:schemeClr val="tx1"/>
+                </a:solidFill>
+                <a:effectLst/>
+                <a:latin typeface="+mn-lt"/>
+                <a:ea typeface="+mn-ea"/>
+                <a:cs typeface="+mn-cs"/>
+              </a:rPr>
+              <a:t> → gold), ce qui est la bonne séparation selon les bonnes pratiques ELT</a:t>
+            </a:r>
+          </a:p>
+          <a:p>
+            <a:r>
+              <a:rPr lang="fr-FR" sz="1200" b="1" i="0" kern="1200" dirty="0">
+                <a:solidFill>
+                  <a:schemeClr val="tx1"/>
+                </a:solidFill>
+                <a:effectLst/>
+                <a:latin typeface="+mn-lt"/>
+                <a:ea typeface="+mn-ea"/>
+                <a:cs typeface="+mn-cs"/>
+              </a:rPr>
+              <a:t>Versioning</a:t>
+            </a:r>
+            <a:r>
+              <a:rPr lang="fr-FR" sz="1200" b="0" i="0" kern="1200" dirty="0">
+                <a:solidFill>
+                  <a:schemeClr val="tx1"/>
+                </a:solidFill>
+                <a:effectLst/>
+                <a:latin typeface="+mn-lt"/>
+                <a:ea typeface="+mn-ea"/>
+                <a:cs typeface="+mn-cs"/>
+              </a:rPr>
+              <a:t> — les modèles SQL sont dans Git, l'historique des changements est traçable</a:t>
+            </a:r>
+          </a:p>
+          <a:p>
+            <a:r>
+              <a:rPr lang="fr-FR" sz="1200" b="0" i="0" kern="1200" dirty="0">
+                <a:solidFill>
+                  <a:schemeClr val="tx1"/>
+                </a:solidFill>
+                <a:effectLst/>
+                <a:latin typeface="+mn-lt"/>
+                <a:ea typeface="+mn-ea"/>
+                <a:cs typeface="+mn-cs"/>
+              </a:rPr>
+              <a:t>La vraie question serait plutôt </a:t>
+            </a:r>
+            <a:r>
+              <a:rPr lang="fr-FR" sz="1200" b="0" i="1" kern="1200" dirty="0">
+                <a:solidFill>
+                  <a:schemeClr val="tx1"/>
+                </a:solidFill>
+                <a:effectLst/>
+                <a:latin typeface="+mn-lt"/>
+                <a:ea typeface="+mn-ea"/>
+                <a:cs typeface="+mn-cs"/>
+              </a:rPr>
+              <a:t>pourquoi pas tout en Python</a:t>
+            </a:r>
+            <a:r>
+              <a:rPr lang="fr-FR" sz="1200" b="0" i="0" kern="1200" dirty="0">
+                <a:solidFill>
+                  <a:schemeClr val="tx1"/>
+                </a:solidFill>
+                <a:effectLst/>
+                <a:latin typeface="+mn-lt"/>
+                <a:ea typeface="+mn-ea"/>
+                <a:cs typeface="+mn-cs"/>
+              </a:rPr>
+              <a:t> : parce que les transformations SQL</a:t>
+            </a:r>
+          </a:p>
+          <a:p>
             <a:endParaRPr lang="fr-FR" dirty="0"/>
           </a:p>
         </p:txBody>
@@ -1979,7 +2873,7 @@
 </p:notes>
 </file>
 
-<file path=ppt/notesSlides/notesSlide6.xml><?xml version="1.0" encoding="utf-8"?>
+<file path=ppt/notesSlides/notesSlide7.xml><?xml version="1.0" encoding="utf-8"?>
 <p:notes xmlns:a="http://schemas.openxmlformats.org/drawingml/2006/main" xmlns:r="http://schemas.openxmlformats.org/officeDocument/2006/relationships" xmlns:p="http://schemas.openxmlformats.org/presentationml/2006/main">
   <p:cSld>
     <p:spTree>
@@ -3071,7 +3965,7 @@
 </p:notes>
 </file>
 
-<file path=ppt/notesSlides/notesSlide7.xml><?xml version="1.0" encoding="utf-8"?>
+<file path=ppt/notesSlides/notesSlide8.xml><?xml version="1.0" encoding="utf-8"?>
 <p:notes xmlns:a="http://schemas.openxmlformats.org/drawingml/2006/main" xmlns:r="http://schemas.openxmlformats.org/officeDocument/2006/relationships" xmlns:p="http://schemas.openxmlformats.org/presentationml/2006/main">
   <p:cSld>
     <p:spTree>
@@ -3251,7 +4145,7 @@
 </p:notes>
 </file>
 
-<file path=ppt/notesSlides/notesSlide8.xml><?xml version="1.0" encoding="utf-8"?>
+<file path=ppt/notesSlides/notesSlide9.xml><?xml version="1.0" encoding="utf-8"?>
 <p:notes xmlns:a="http://schemas.openxmlformats.org/drawingml/2006/main" xmlns:r="http://schemas.openxmlformats.org/officeDocument/2006/relationships" xmlns:p="http://schemas.openxmlformats.org/presentationml/2006/main">
   <p:cSld>
     <p:spTree>
@@ -3350,114 +4244,6 @@
     <p:extLst>
       <p:ext uri="{BB962C8B-B14F-4D97-AF65-F5344CB8AC3E}">
         <p14:creationId xmlns:p14="http://schemas.microsoft.com/office/powerpoint/2010/main" val="2238431240"/>
-      </p:ext>
-    </p:extLst>
-  </p:cSld>
-  <p:clrMapOvr>
-    <a:masterClrMapping/>
-  </p:clrMapOvr>
-</p:notes>
-</file>
-
-<file path=ppt/notesSlides/notesSlide9.xml><?xml version="1.0" encoding="utf-8"?>
-<p:notes xmlns:a="http://schemas.openxmlformats.org/drawingml/2006/main" xmlns:r="http://schemas.openxmlformats.org/officeDocument/2006/relationships" xmlns:p="http://schemas.openxmlformats.org/presentationml/2006/main">
-  <p:cSld>
-    <p:spTree>
-      <p:nvGrpSpPr>
-        <p:cNvPr id="1" name="">
-          <a:extLst>
-            <a:ext uri="{FF2B5EF4-FFF2-40B4-BE49-F238E27FC236}">
-              <a16:creationId xmlns:a16="http://schemas.microsoft.com/office/drawing/2014/main" id="{E90BD923-6122-2994-304C-69ECEE1204EB}"/>
-            </a:ext>
-          </a:extLst>
-        </p:cNvPr>
-        <p:cNvGrpSpPr/>
-        <p:nvPr/>
-      </p:nvGrpSpPr>
-      <p:grpSpPr>
-        <a:xfrm>
-          <a:off x="0" y="0"/>
-          <a:ext cx="0" cy="0"/>
-          <a:chOff x="0" y="0"/>
-          <a:chExt cx="0" cy="0"/>
-        </a:xfrm>
-      </p:grpSpPr>
-      <p:sp>
-        <p:nvSpPr>
-          <p:cNvPr id="2" name="Espace réservé de l'image des diapositives 1">
-            <a:extLst>
-              <a:ext uri="{FF2B5EF4-FFF2-40B4-BE49-F238E27FC236}">
-                <a16:creationId xmlns:a16="http://schemas.microsoft.com/office/drawing/2014/main" id="{D2648A9C-EE24-0816-5364-5F8DE3194A05}"/>
-              </a:ext>
-            </a:extLst>
-          </p:cNvPr>
-          <p:cNvSpPr>
-            <a:spLocks noGrp="1" noRot="1" noChangeAspect="1"/>
-          </p:cNvSpPr>
-          <p:nvPr>
-            <p:ph type="sldImg"/>
-          </p:nvPr>
-        </p:nvSpPr>
-        <p:spPr/>
-      </p:sp>
-      <p:sp>
-        <p:nvSpPr>
-          <p:cNvPr id="3" name="Espace réservé des notes 2">
-            <a:extLst>
-              <a:ext uri="{FF2B5EF4-FFF2-40B4-BE49-F238E27FC236}">
-                <a16:creationId xmlns:a16="http://schemas.microsoft.com/office/drawing/2014/main" id="{EA3361B9-F082-D177-2ACA-25C1C011FAAF}"/>
-              </a:ext>
-            </a:extLst>
-          </p:cNvPr>
-          <p:cNvSpPr>
-            <a:spLocks noGrp="1"/>
-          </p:cNvSpPr>
-          <p:nvPr>
-            <p:ph type="body" idx="1"/>
-          </p:nvPr>
-        </p:nvSpPr>
-        <p:spPr/>
-        <p:txBody>
-          <a:bodyPr/>
-          <a:lstStyle/>
-          <a:p>
-            <a:endParaRPr lang="fr-FR" dirty="0"/>
-          </a:p>
-        </p:txBody>
-      </p:sp>
-      <p:sp>
-        <p:nvSpPr>
-          <p:cNvPr id="4" name="Espace réservé du numéro de diapositive 3">
-            <a:extLst>
-              <a:ext uri="{FF2B5EF4-FFF2-40B4-BE49-F238E27FC236}">
-                <a16:creationId xmlns:a16="http://schemas.microsoft.com/office/drawing/2014/main" id="{BBDB3B88-6C84-B9FE-6F00-31A5537C9D08}"/>
-              </a:ext>
-            </a:extLst>
-          </p:cNvPr>
-          <p:cNvSpPr>
-            <a:spLocks noGrp="1"/>
-          </p:cNvSpPr>
-          <p:nvPr>
-            <p:ph type="sldNum" sz="quarter" idx="5"/>
-          </p:nvPr>
-        </p:nvSpPr>
-        <p:spPr/>
-        <p:txBody>
-          <a:bodyPr/>
-          <a:lstStyle/>
-          <a:p>
-            <a:fld id="{99C5AD06-CE33-4E6E-97A2-90C845482EC4}" type="slidenum">
-              <a:rPr lang="fr-FR" smtClean="0"/>
-              <a:t>12</a:t>
-            </a:fld>
-            <a:endParaRPr lang="fr-FR"/>
-          </a:p>
-        </p:txBody>
-      </p:sp>
-    </p:spTree>
-    <p:extLst>
-      <p:ext uri="{BB962C8B-B14F-4D97-AF65-F5344CB8AC3E}">
-        <p14:creationId xmlns:p14="http://schemas.microsoft.com/office/powerpoint/2010/main" val="2679833592"/>
       </p:ext>
     </p:extLst>
   </p:cSld>
@@ -3614,7 +4400,7 @@
           <a:p>
             <a:fld id="{C372C99E-D69C-4ADF-8C8D-41420D3DDB02}" type="datetimeFigureOut">
               <a:rPr lang="fr-FR" smtClean="0"/>
-              <a:t>25/03/2026</a:t>
+              <a:t>30/03/2026</a:t>
             </a:fld>
             <a:endParaRPr lang="fr-FR"/>
           </a:p>
@@ -3812,7 +4598,7 @@
           <a:p>
             <a:fld id="{C372C99E-D69C-4ADF-8C8D-41420D3DDB02}" type="datetimeFigureOut">
               <a:rPr lang="fr-FR" smtClean="0"/>
-              <a:t>25/03/2026</a:t>
+              <a:t>30/03/2026</a:t>
             </a:fld>
             <a:endParaRPr lang="fr-FR"/>
           </a:p>
@@ -4020,7 +4806,7 @@
           <a:p>
             <a:fld id="{C372C99E-D69C-4ADF-8C8D-41420D3DDB02}" type="datetimeFigureOut">
               <a:rPr lang="fr-FR" smtClean="0"/>
-              <a:t>25/03/2026</a:t>
+              <a:t>30/03/2026</a:t>
             </a:fld>
             <a:endParaRPr lang="fr-FR"/>
           </a:p>
@@ -4218,7 +5004,7 @@
           <a:p>
             <a:fld id="{C372C99E-D69C-4ADF-8C8D-41420D3DDB02}" type="datetimeFigureOut">
               <a:rPr lang="fr-FR" smtClean="0"/>
-              <a:t>25/03/2026</a:t>
+              <a:t>30/03/2026</a:t>
             </a:fld>
             <a:endParaRPr lang="fr-FR"/>
           </a:p>
@@ -4493,7 +5279,7 @@
           <a:p>
             <a:fld id="{C372C99E-D69C-4ADF-8C8D-41420D3DDB02}" type="datetimeFigureOut">
               <a:rPr lang="fr-FR" smtClean="0"/>
-              <a:t>25/03/2026</a:t>
+              <a:t>30/03/2026</a:t>
             </a:fld>
             <a:endParaRPr lang="fr-FR"/>
           </a:p>
@@ -4758,7 +5544,7 @@
           <a:p>
             <a:fld id="{C372C99E-D69C-4ADF-8C8D-41420D3DDB02}" type="datetimeFigureOut">
               <a:rPr lang="fr-FR" smtClean="0"/>
-              <a:t>25/03/2026</a:t>
+              <a:t>30/03/2026</a:t>
             </a:fld>
             <a:endParaRPr lang="fr-FR"/>
           </a:p>
@@ -5170,7 +5956,7 @@
           <a:p>
             <a:fld id="{C372C99E-D69C-4ADF-8C8D-41420D3DDB02}" type="datetimeFigureOut">
               <a:rPr lang="fr-FR" smtClean="0"/>
-              <a:t>25/03/2026</a:t>
+              <a:t>30/03/2026</a:t>
             </a:fld>
             <a:endParaRPr lang="fr-FR"/>
           </a:p>
@@ -5311,7 +6097,7 @@
           <a:p>
             <a:fld id="{C372C99E-D69C-4ADF-8C8D-41420D3DDB02}" type="datetimeFigureOut">
               <a:rPr lang="fr-FR" smtClean="0"/>
-              <a:t>25/03/2026</a:t>
+              <a:t>30/03/2026</a:t>
             </a:fld>
             <a:endParaRPr lang="fr-FR"/>
           </a:p>
@@ -5424,7 +6210,7 @@
           <a:p>
             <a:fld id="{C372C99E-D69C-4ADF-8C8D-41420D3DDB02}" type="datetimeFigureOut">
               <a:rPr lang="fr-FR" smtClean="0"/>
-              <a:t>25/03/2026</a:t>
+              <a:t>30/03/2026</a:t>
             </a:fld>
             <a:endParaRPr lang="fr-FR"/>
           </a:p>
@@ -5735,7 +6521,7 @@
           <a:p>
             <a:fld id="{C372C99E-D69C-4ADF-8C8D-41420D3DDB02}" type="datetimeFigureOut">
               <a:rPr lang="fr-FR" smtClean="0"/>
-              <a:t>25/03/2026</a:t>
+              <a:t>30/03/2026</a:t>
             </a:fld>
             <a:endParaRPr lang="fr-FR"/>
           </a:p>
@@ -6023,7 +6809,7 @@
           <a:p>
             <a:fld id="{C372C99E-D69C-4ADF-8C8D-41420D3DDB02}" type="datetimeFigureOut">
               <a:rPr lang="fr-FR" smtClean="0"/>
-              <a:t>25/03/2026</a:t>
+              <a:t>30/03/2026</a:t>
             </a:fld>
             <a:endParaRPr lang="fr-FR"/>
           </a:p>
@@ -6273,7 +7059,7 @@
           <a:p>
             <a:fld id="{C372C99E-D69C-4ADF-8C8D-41420D3DDB02}" type="datetimeFigureOut">
               <a:rPr lang="fr-FR" smtClean="0"/>
-              <a:t>25/03/2026</a:t>
+              <a:t>30/03/2026</a:t>
             </a:fld>
             <a:endParaRPr lang="fr-FR"/>
           </a:p>
@@ -12482,7 +13268,7 @@
           <p:nvPr/>
         </p:nvPicPr>
         <p:blipFill>
-          <a:blip r:embed="rId2">
+          <a:blip r:embed="rId3">
             <a:extLst>
               <a:ext uri="{28A0092B-C50C-407E-A947-70E740481C1C}">
                 <a14:useLocalDpi xmlns:a14="http://schemas.microsoft.com/office/drawing/2010/main" val="0"/>
@@ -16305,42 +17091,6 @@
           </a:graphicData>
         </a:graphic>
       </p:graphicFrame>
-      <p:pic>
-        <p:nvPicPr>
-          <p:cNvPr id="11" name="Image 10">
-            <a:extLst>
-              <a:ext uri="{FF2B5EF4-FFF2-40B4-BE49-F238E27FC236}">
-                <a16:creationId xmlns:a16="http://schemas.microsoft.com/office/drawing/2014/main" id="{04D58951-D82C-6A8A-DD76-63777C25FDC8}"/>
-              </a:ext>
-            </a:extLst>
-          </p:cNvPr>
-          <p:cNvPicPr>
-            <a:picLocks noChangeAspect="1"/>
-          </p:cNvPicPr>
-          <p:nvPr/>
-        </p:nvPicPr>
-        <p:blipFill>
-          <a:blip r:embed="rId3">
-            <a:extLst>
-              <a:ext uri="{28A0092B-C50C-407E-A947-70E740481C1C}">
-                <a14:useLocalDpi xmlns:a14="http://schemas.microsoft.com/office/drawing/2010/main" val="0"/>
-              </a:ext>
-            </a:extLst>
-          </a:blip>
-          <a:stretch>
-            <a:fillRect/>
-          </a:stretch>
-        </p:blipFill>
-        <p:spPr>
-          <a:xfrm>
-            <a:off x="2121909" y="2221007"/>
-            <a:ext cx="8010525" cy="2247900"/>
-          </a:xfrm>
-          <a:prstGeom prst="rect">
-            <a:avLst/>
-          </a:prstGeom>
-        </p:spPr>
-      </p:pic>
       <p:sp>
         <p:nvSpPr>
           <p:cNvPr id="14" name="ZoneTexte 13">
@@ -16383,6 +17133,42 @@
           </a:p>
         </p:txBody>
       </p:sp>
+      <p:pic>
+        <p:nvPicPr>
+          <p:cNvPr id="10" name="Image 9">
+            <a:extLst>
+              <a:ext uri="{FF2B5EF4-FFF2-40B4-BE49-F238E27FC236}">
+                <a16:creationId xmlns:a16="http://schemas.microsoft.com/office/drawing/2014/main" id="{32782960-9BC5-9229-EC02-BAB0F9CFCF36}"/>
+              </a:ext>
+            </a:extLst>
+          </p:cNvPr>
+          <p:cNvPicPr>
+            <a:picLocks noChangeAspect="1"/>
+          </p:cNvPicPr>
+          <p:nvPr/>
+        </p:nvPicPr>
+        <p:blipFill>
+          <a:blip r:embed="rId3">
+            <a:extLst>
+              <a:ext uri="{28A0092B-C50C-407E-A947-70E740481C1C}">
+                <a14:useLocalDpi xmlns:a14="http://schemas.microsoft.com/office/drawing/2010/main" val="0"/>
+              </a:ext>
+            </a:extLst>
+          </a:blip>
+          <a:stretch>
+            <a:fillRect/>
+          </a:stretch>
+        </p:blipFill>
+        <p:spPr>
+          <a:xfrm>
+            <a:off x="2090737" y="2305050"/>
+            <a:ext cx="8010525" cy="2247900"/>
+          </a:xfrm>
+          <a:prstGeom prst="rect">
+            <a:avLst/>
+          </a:prstGeom>
+        </p:spPr>
+      </p:pic>
     </p:spTree>
     <p:extLst>
       <p:ext uri="{BB962C8B-B14F-4D97-AF65-F5344CB8AC3E}">
@@ -17488,8 +18274,49 @@
                   </a:schemeClr>
                 </a:solidFill>
               </a:rPr>
-              <a:t>Crée les schémas, tables et rôles PostgreSQL</a:t>
-            </a:r>
+              <a:t>Nettoie et valide les données </a:t>
+            </a:r>
+            <a:r>
+              <a:rPr lang="fr-FR" noProof="0" dirty="0" err="1">
+                <a:solidFill>
+                  <a:schemeClr val="accent2">
+                    <a:lumMod val="40000"/>
+                    <a:lumOff val="60000"/>
+                  </a:schemeClr>
+                </a:solidFill>
+              </a:rPr>
+              <a:t>raw</a:t>
+            </a:r>
+            <a:r>
+              <a:rPr lang="fr-FR" noProof="0" dirty="0">
+                <a:solidFill>
+                  <a:schemeClr val="accent2">
+                    <a:lumMod val="40000"/>
+                    <a:lumOff val="60000"/>
+                  </a:schemeClr>
+                </a:solidFill>
+              </a:rPr>
+              <a:t> → </a:t>
+            </a:r>
+            <a:r>
+              <a:rPr lang="fr-FR" noProof="0" dirty="0" err="1">
+                <a:solidFill>
+                  <a:schemeClr val="accent2">
+                    <a:lumMod val="40000"/>
+                    <a:lumOff val="60000"/>
+                  </a:schemeClr>
+                </a:solidFill>
+              </a:rPr>
+              <a:t>staging</a:t>
+            </a:r>
+            <a:endParaRPr lang="fr-FR" noProof="0" dirty="0">
+              <a:solidFill>
+                <a:schemeClr val="accent2">
+                  <a:lumMod val="40000"/>
+                  <a:lumOff val="60000"/>
+                </a:schemeClr>
+              </a:solidFill>
+            </a:endParaRPr>
           </a:p>
         </p:txBody>
       </p:sp>

--- a/P12_Gerez_un_projet_d_infrastructure_aymeric_bailleul/_orchestration/_docs/ABAI_02_presentation.pptx
+++ b/P12_Gerez_un_projet_d_infrastructure_aymeric_bailleul/_orchestration/_docs/ABAI_02_presentation.pptx
@@ -7644,7 +7644,7 @@
           <a:p>
             <a:pPr algn="r"/>
             <a:r>
-              <a:rPr lang="fr-FR" sz="3200" b="1" dirty="0">
+              <a:rPr lang="fr-FR" sz="3200" b="1" noProof="0" dirty="0">
                 <a:solidFill>
                   <a:schemeClr val="accent2">
                     <a:lumMod val="75000"/>
@@ -7653,13 +7653,6 @@
               </a:rPr>
               <a:t>9</a:t>
             </a:r>
-            <a:endParaRPr lang="fr-FR" sz="3200" b="1" noProof="0" dirty="0">
-              <a:solidFill>
-                <a:schemeClr val="accent2">
-                  <a:lumMod val="75000"/>
-                </a:schemeClr>
-              </a:solidFill>
-            </a:endParaRPr>
           </a:p>
         </p:txBody>
       </p:sp>
@@ -7830,7 +7823,7 @@
           <p:nvPr>
             <p:extLst>
               <p:ext uri="{D42A27DB-BD31-4B8C-83A1-F6EECF244321}">
-                <p14:modId xmlns:p14="http://schemas.microsoft.com/office/powerpoint/2010/main" val="1977063740"/>
+                <p14:modId xmlns:p14="http://schemas.microsoft.com/office/powerpoint/2010/main" val="3927818768"/>
               </p:ext>
             </p:extLst>
           </p:nvPr>
@@ -7883,7 +7876,7 @@
                         </a:defRPr>
                       </a:pPr>
                       <a:r>
-                        <a:rPr dirty="0">
+                        <a:rPr lang="fr-FR" noProof="0" dirty="0">
                           <a:solidFill>
                             <a:srgbClr val="FFFFFF">
                               <a:alpha val="80000"/>
@@ -7918,7 +7911,7 @@
                         </a:defRPr>
                       </a:pPr>
                       <a:r>
-                        <a:rPr dirty="0">
+                        <a:rPr lang="fr-FR" noProof="0" dirty="0">
                           <a:solidFill>
                             <a:srgbClr val="FFFFFF">
                               <a:alpha val="80000"/>
@@ -7953,7 +7946,7 @@
                         </a:defRPr>
                       </a:pPr>
                       <a:r>
-                        <a:rPr dirty="0">
+                        <a:rPr lang="fr-FR" noProof="0" dirty="0">
                           <a:solidFill>
                             <a:srgbClr val="FFFFFF">
                               <a:alpha val="80000"/>
@@ -7995,7 +7988,7 @@
                         </a:defRPr>
                       </a:pPr>
                       <a:r>
-                        <a:rPr dirty="0">
+                        <a:rPr lang="fr-FR" noProof="0" dirty="0">
                           <a:solidFill>
                             <a:schemeClr val="accent2">
                               <a:lumMod val="50000"/>
@@ -8029,7 +8022,7 @@
                         </a:defRPr>
                       </a:pPr>
                       <a:r>
-                        <a:rPr dirty="0">
+                        <a:rPr lang="fr-FR" noProof="0" dirty="0">
                           <a:solidFill>
                             <a:schemeClr val="accent2">
                               <a:lumMod val="50000"/>
@@ -8063,7 +8056,7 @@
                         </a:defRPr>
                       </a:pPr>
                       <a:r>
-                        <a:rPr dirty="0">
+                        <a:rPr lang="fr-FR" noProof="0" dirty="0" err="1">
                           <a:solidFill>
                             <a:schemeClr val="accent2">
                               <a:lumMod val="50000"/>
@@ -8071,10 +8064,10 @@
                             </a:schemeClr>
                           </a:solidFill>
                         </a:rPr>
-                        <a:t>Haversine, </a:t>
+                        <a:t>Haversine</a:t>
                       </a:r>
                       <a:r>
-                        <a:rPr dirty="0" err="1">
+                        <a:rPr lang="fr-FR" noProof="0" dirty="0">
                           <a:solidFill>
                             <a:schemeClr val="accent2">
                               <a:lumMod val="50000"/>
@@ -8082,82 +8075,8 @@
                             </a:schemeClr>
                           </a:solidFill>
                         </a:rPr>
-                        <a:t>seuils</a:t>
+                        <a:t>, seuils, éligibilité, adresse invalide</a:t>
                       </a:r>
-                      <a:r>
-                        <a:rPr dirty="0">
-                          <a:solidFill>
-                            <a:schemeClr val="accent2">
-                              <a:lumMod val="50000"/>
-                              <a:alpha val="80000"/>
-                            </a:schemeClr>
-                          </a:solidFill>
-                        </a:rPr>
-                        <a:t>, </a:t>
-                      </a:r>
-                      <a:r>
-                        <a:rPr dirty="0" err="1">
-                          <a:solidFill>
-                            <a:schemeClr val="accent2">
-                              <a:lumMod val="50000"/>
-                              <a:alpha val="80000"/>
-                            </a:schemeClr>
-                          </a:solidFill>
-                        </a:rPr>
-                        <a:t>éligibilité</a:t>
-                      </a:r>
-                      <a:r>
-                        <a:rPr dirty="0">
-                          <a:solidFill>
-                            <a:schemeClr val="accent2">
-                              <a:lumMod val="50000"/>
-                              <a:alpha val="80000"/>
-                            </a:schemeClr>
-                          </a:solidFill>
-                        </a:rPr>
-                        <a:t>, </a:t>
-                      </a:r>
-                      <a:r>
-                        <a:rPr dirty="0" err="1">
-                          <a:solidFill>
-                            <a:schemeClr val="accent2">
-                              <a:lumMod val="50000"/>
-                              <a:alpha val="80000"/>
-                            </a:schemeClr>
-                          </a:solidFill>
-                        </a:rPr>
-                        <a:t>adresse</a:t>
-                      </a:r>
-                      <a:r>
-                        <a:rPr dirty="0">
-                          <a:solidFill>
-                            <a:schemeClr val="accent2">
-                              <a:lumMod val="50000"/>
-                              <a:alpha val="80000"/>
-                            </a:schemeClr>
-                          </a:solidFill>
-                        </a:rPr>
-                        <a:t> </a:t>
-                      </a:r>
-                      <a:r>
-                        <a:rPr dirty="0" err="1">
-                          <a:solidFill>
-                            <a:schemeClr val="accent2">
-                              <a:lumMod val="50000"/>
-                              <a:alpha val="80000"/>
-                            </a:schemeClr>
-                          </a:solidFill>
-                        </a:rPr>
-                        <a:t>invalide</a:t>
-                      </a:r>
-                      <a:endParaRPr dirty="0">
-                        <a:solidFill>
-                          <a:schemeClr val="accent2">
-                            <a:lumMod val="50000"/>
-                            <a:alpha val="80000"/>
-                          </a:schemeClr>
-                        </a:solidFill>
-                      </a:endParaRPr>
                     </a:p>
                   </a:txBody>
                   <a:tcPr anchor="ctr">
@@ -8189,7 +8108,7 @@
                         </a:defRPr>
                       </a:pPr>
                       <a:r>
-                        <a:rPr>
+                        <a:rPr lang="fr-FR" noProof="0" dirty="0">
                           <a:solidFill>
                             <a:schemeClr val="accent2">
                               <a:lumMod val="50000"/>
@@ -8223,7 +8142,7 @@
                         </a:defRPr>
                       </a:pPr>
                       <a:r>
-                        <a:rPr dirty="0">
+                        <a:rPr lang="fr-FR" noProof="0" dirty="0">
                           <a:solidFill>
                             <a:schemeClr val="accent2">
                               <a:lumMod val="50000"/>
@@ -8257,7 +8176,7 @@
                         </a:defRPr>
                       </a:pPr>
                       <a:r>
-                        <a:rPr dirty="0">
+                        <a:rPr lang="fr-FR" noProof="0" dirty="0">
                           <a:solidFill>
                             <a:schemeClr val="accent2">
                               <a:lumMod val="50000"/>
@@ -8265,29 +8184,7 @@
                             </a:schemeClr>
                           </a:solidFill>
                         </a:rPr>
-                        <a:t>Distances, </a:t>
-                      </a:r>
-                      <a:r>
-                        <a:rPr dirty="0" err="1">
-                          <a:solidFill>
-                            <a:schemeClr val="accent2">
-                              <a:lumMod val="50000"/>
-                              <a:alpha val="80000"/>
-                            </a:schemeClr>
-                          </a:solidFill>
-                        </a:rPr>
-                        <a:t>durées</a:t>
-                      </a:r>
-                      <a:r>
-                        <a:rPr dirty="0">
-                          <a:solidFill>
-                            <a:schemeClr val="accent2">
-                              <a:lumMod val="50000"/>
-                              <a:alpha val="80000"/>
-                            </a:schemeClr>
-                          </a:solidFill>
-                        </a:rPr>
-                        <a:t>, dates, IDs, sports, volumes</a:t>
+                        <a:t>Distances, durées, dates, IDs, sports, volumes</a:t>
                       </a:r>
                     </a:p>
                   </a:txBody>
@@ -8320,7 +8217,7 @@
                         </a:defRPr>
                       </a:pPr>
                       <a:r>
-                        <a:rPr dirty="0">
+                        <a:rPr lang="fr-FR" noProof="0" dirty="0">
                           <a:solidFill>
                             <a:schemeClr val="accent2">
                               <a:lumMod val="50000"/>
@@ -8354,7 +8251,7 @@
                         </a:defRPr>
                       </a:pPr>
                       <a:r>
-                        <a:rPr>
+                        <a:rPr lang="fr-FR" noProof="0" dirty="0">
                           <a:solidFill>
                             <a:schemeClr val="accent2">
                               <a:lumMod val="50000"/>
@@ -8388,7 +8285,7 @@
                         </a:defRPr>
                       </a:pPr>
                       <a:r>
-                        <a:rPr dirty="0" err="1">
+                        <a:rPr lang="fr-FR" noProof="0" dirty="0">
                           <a:solidFill>
                             <a:schemeClr val="accent2">
                               <a:lumMod val="50000"/>
@@ -8396,62 +8293,7 @@
                             </a:schemeClr>
                           </a:solidFill>
                         </a:rPr>
-                        <a:t>Doublons</a:t>
-                      </a:r>
-                      <a:r>
-                        <a:rPr dirty="0">
-                          <a:solidFill>
-                            <a:schemeClr val="accent2">
-                              <a:lumMod val="50000"/>
-                              <a:alpha val="80000"/>
-                            </a:schemeClr>
-                          </a:solidFill>
-                        </a:rPr>
-                        <a:t>, </a:t>
-                      </a:r>
-                      <a:r>
-                        <a:rPr lang="fr-FR" dirty="0">
-                          <a:solidFill>
-                            <a:schemeClr val="accent2">
-                              <a:lumMod val="50000"/>
-                              <a:alpha val="80000"/>
-                            </a:schemeClr>
-                          </a:solidFill>
-                        </a:rPr>
-                        <a:t>salaires</a:t>
-                      </a:r>
-                      <a:r>
-                        <a:rPr dirty="0">
-                          <a:solidFill>
-                            <a:schemeClr val="accent2">
-                              <a:lumMod val="50000"/>
-                              <a:alpha val="80000"/>
-                            </a:schemeClr>
-                          </a:solidFill>
-                        </a:rPr>
-                        <a:t>, dates, </a:t>
-                      </a:r>
-                      <a:r>
-                        <a:rPr dirty="0" err="1">
-                          <a:solidFill>
-                            <a:schemeClr val="accent2">
-                              <a:lumMod val="50000"/>
-                              <a:alpha val="80000"/>
-                            </a:schemeClr>
-                          </a:solidFill>
-                        </a:rPr>
-                        <a:t>complétude</a:t>
-                      </a:r>
-                      <a:r>
-                        <a:rPr dirty="0">
-                          <a:solidFill>
-                            <a:schemeClr val="accent2">
-                              <a:lumMod val="50000"/>
-                              <a:alpha val="80000"/>
-                            </a:schemeClr>
-                          </a:solidFill>
-                        </a:rPr>
-                        <a:t>, pratiques</a:t>
+                        <a:t>Doublons, salaires, dates, complétude, pratiques</a:t>
                       </a:r>
                     </a:p>
                   </a:txBody>
@@ -8484,7 +8326,7 @@
                         </a:defRPr>
                       </a:pPr>
                       <a:r>
-                        <a:rPr>
+                        <a:rPr lang="fr-FR" noProof="0" dirty="0">
                           <a:solidFill>
                             <a:schemeClr val="accent2">
                               <a:lumMod val="50000"/>
@@ -8518,7 +8360,7 @@
                         </a:defRPr>
                       </a:pPr>
                       <a:r>
-                        <a:rPr>
+                        <a:rPr lang="fr-FR" noProof="0" dirty="0">
                           <a:solidFill>
                             <a:schemeClr val="accent2">
                               <a:lumMod val="50000"/>
@@ -8552,7 +8394,7 @@
                         </a:defRPr>
                       </a:pPr>
                       <a:r>
-                        <a:rPr dirty="0">
+                        <a:rPr lang="fr-FR" noProof="0" dirty="0">
                           <a:solidFill>
                             <a:schemeClr val="accent2">
                               <a:lumMod val="50000"/>
@@ -8560,29 +8402,7 @@
                             </a:schemeClr>
                           </a:solidFill>
                         </a:rPr>
-                        <a:t>Primes 5 %, bien-</a:t>
-                      </a:r>
-                      <a:r>
-                        <a:rPr dirty="0" err="1">
-                          <a:solidFill>
-                            <a:schemeClr val="accent2">
-                              <a:lumMod val="50000"/>
-                              <a:alpha val="80000"/>
-                            </a:schemeClr>
-                          </a:solidFill>
-                        </a:rPr>
-                        <a:t>être</a:t>
-                      </a:r>
-                      <a:r>
-                        <a:rPr dirty="0">
-                          <a:solidFill>
-                            <a:schemeClr val="accent2">
-                              <a:lumMod val="50000"/>
-                              <a:alpha val="80000"/>
-                            </a:schemeClr>
-                          </a:solidFill>
-                        </a:rPr>
-                        <a:t> ≥15, impact financier</a:t>
+                        <a:t>Primes 5 %, bien-être ≥15, impact financier</a:t>
                       </a:r>
                     </a:p>
                   </a:txBody>
@@ -8615,7 +8435,7 @@
                         </a:defRPr>
                       </a:pPr>
                       <a:r>
-                        <a:rPr>
+                        <a:rPr lang="fr-FR" noProof="0" dirty="0">
                           <a:solidFill>
                             <a:schemeClr val="accent2">
                               <a:lumMod val="50000"/>
@@ -8649,7 +8469,7 @@
                         </a:defRPr>
                       </a:pPr>
                       <a:r>
-                        <a:rPr>
+                        <a:rPr lang="fr-FR" noProof="0" dirty="0">
                           <a:solidFill>
                             <a:schemeClr val="accent2">
                               <a:lumMod val="50000"/>
@@ -8683,7 +8503,7 @@
                         </a:defRPr>
                       </a:pPr>
                       <a:r>
-                        <a:rPr dirty="0" err="1">
+                        <a:rPr lang="fr-FR" noProof="0" dirty="0">
                           <a:solidFill>
                             <a:schemeClr val="accent2">
                               <a:lumMod val="50000"/>
@@ -8691,10 +8511,10 @@
                             </a:schemeClr>
                           </a:solidFill>
                         </a:rPr>
-                        <a:t>Identités</a:t>
+                        <a:t>Identités RGPD, FK, </a:t>
                       </a:r>
                       <a:r>
-                        <a:rPr dirty="0">
+                        <a:rPr lang="fr-FR" noProof="0" dirty="0" err="1">
                           <a:solidFill>
                             <a:schemeClr val="accent2">
                               <a:lumMod val="50000"/>
@@ -8702,7 +8522,18 @@
                             </a:schemeClr>
                           </a:solidFill>
                         </a:rPr>
-                        <a:t> RGPD, FK, Privacy by Design, droits</a:t>
+                        <a:t>Privacy</a:t>
+                      </a:r>
+                      <a:r>
+                        <a:rPr lang="fr-FR" noProof="0" dirty="0">
+                          <a:solidFill>
+                            <a:schemeClr val="accent2">
+                              <a:lumMod val="50000"/>
+                              <a:alpha val="80000"/>
+                            </a:schemeClr>
+                          </a:solidFill>
+                        </a:rPr>
+                        <a:t> by Design, droits</a:t>
                       </a:r>
                     </a:p>
                   </a:txBody>
@@ -8735,7 +8566,7 @@
                         </a:defRPr>
                       </a:pPr>
                       <a:r>
-                        <a:rPr>
+                        <a:rPr lang="fr-FR" noProof="0" dirty="0">
                           <a:solidFill>
                             <a:schemeClr val="accent2">
                               <a:lumMod val="50000"/>
@@ -8769,7 +8600,7 @@
                         </a:defRPr>
                       </a:pPr>
                       <a:r>
-                        <a:rPr dirty="0">
+                        <a:rPr lang="fr-FR" noProof="0" dirty="0">
                           <a:solidFill>
                             <a:schemeClr val="accent2">
                               <a:lumMod val="50000"/>
@@ -8803,7 +8634,7 @@
                         </a:defRPr>
                       </a:pPr>
                       <a:r>
-                        <a:rPr dirty="0" err="1">
+                        <a:rPr lang="fr-FR" noProof="0" dirty="0">
                           <a:solidFill>
                             <a:schemeClr val="accent2">
                               <a:lumMod val="50000"/>
@@ -8811,10 +8642,10 @@
                             </a:schemeClr>
                           </a:solidFill>
                         </a:rPr>
-                        <a:t>Connexion</a:t>
+                        <a:t>Connexion DB session-</a:t>
                       </a:r>
                       <a:r>
-                        <a:rPr dirty="0">
+                        <a:rPr lang="fr-FR" noProof="0" dirty="0" err="1">
                           <a:solidFill>
                             <a:schemeClr val="accent2">
                               <a:lumMod val="50000"/>
@@ -8822,10 +8653,21 @@
                             </a:schemeClr>
                           </a:solidFill>
                         </a:rPr>
-                        <a:t> DB session-scoped + fixture </a:t>
+                        <a:t>scoped</a:t>
                       </a:r>
                       <a:r>
-                        <a:rPr dirty="0" err="1">
+                        <a:rPr lang="fr-FR" noProof="0" dirty="0">
+                          <a:solidFill>
+                            <a:schemeClr val="accent2">
+                              <a:lumMod val="50000"/>
+                              <a:alpha val="80000"/>
+                            </a:schemeClr>
+                          </a:solidFill>
+                        </a:rPr>
+                        <a:t> + fixture </a:t>
+                      </a:r>
+                      <a:r>
+                        <a:rPr lang="fr-FR" noProof="0" dirty="0" err="1">
                           <a:solidFill>
                             <a:schemeClr val="accent2">
                               <a:lumMod val="50000"/>
@@ -8835,7 +8677,7 @@
                         </a:rPr>
                         <a:t>identites</a:t>
                       </a:r>
-                      <a:endParaRPr dirty="0">
+                      <a:endParaRPr lang="fr-FR" noProof="0" dirty="0">
                         <a:solidFill>
                           <a:schemeClr val="accent2">
                             <a:lumMod val="50000"/>
@@ -8904,7 +8746,7 @@
             </a:r>
           </a:p>
           <a:p>
-            <a:endParaRPr lang="fr-FR" sz="500" u="sng" dirty="0">
+            <a:endParaRPr lang="fr-FR" sz="500" u="sng" noProof="0" dirty="0">
               <a:solidFill>
                 <a:schemeClr val="accent2">
                   <a:lumMod val="60000"/>
@@ -8919,7 +8761,7 @@
               <a:buChar char="-"/>
             </a:pPr>
             <a:r>
-              <a:rPr lang="fr-FR" b="1" dirty="0" err="1">
+              <a:rPr lang="fr-FR" b="1" noProof="0" dirty="0" err="1">
                 <a:solidFill>
                   <a:schemeClr val="accent2">
                     <a:lumMod val="40000"/>
@@ -8930,7 +8772,7 @@
               <a:t>not_null</a:t>
             </a:r>
             <a:r>
-              <a:rPr lang="fr-FR" b="1" dirty="0">
+              <a:rPr lang="fr-FR" b="1" noProof="0" dirty="0">
                 <a:solidFill>
                   <a:schemeClr val="accent2">
                     <a:lumMod val="40000"/>
@@ -8947,7 +8789,7 @@
               <a:buChar char="-"/>
             </a:pPr>
             <a:r>
-              <a:rPr lang="fr-FR" dirty="0">
+              <a:rPr lang="fr-FR" noProof="0" dirty="0">
                 <a:solidFill>
                   <a:schemeClr val="accent2">
                     <a:lumMod val="40000"/>
@@ -8964,7 +8806,7 @@
               <a:buChar char="-"/>
             </a:pPr>
             <a:r>
-              <a:rPr lang="fr-FR" b="1" dirty="0">
+              <a:rPr lang="fr-FR" b="1" noProof="0" dirty="0">
                 <a:solidFill>
                   <a:schemeClr val="accent2">
                     <a:lumMod val="40000"/>
@@ -8981,7 +8823,7 @@
               <a:buChar char="-"/>
             </a:pPr>
             <a:r>
-              <a:rPr lang="fr-FR" dirty="0">
+              <a:rPr lang="fr-FR" noProof="0" dirty="0">
                 <a:solidFill>
                   <a:schemeClr val="accent2">
                     <a:lumMod val="40000"/>
@@ -8992,7 +8834,7 @@
               <a:t>Clés primaires </a:t>
             </a:r>
             <a:r>
-              <a:rPr lang="fr-FR" sz="1200" i="1" dirty="0">
+              <a:rPr lang="fr-FR" sz="1200" i="1" noProof="0" dirty="0">
                 <a:solidFill>
                   <a:schemeClr val="accent2">
                     <a:lumMod val="40000"/>
@@ -9003,7 +8845,7 @@
               <a:t>(</a:t>
             </a:r>
             <a:r>
-              <a:rPr lang="fr-FR" sz="1200" i="1" dirty="0" err="1">
+              <a:rPr lang="fr-FR" sz="1200" i="1" noProof="0" dirty="0" err="1">
                 <a:solidFill>
                   <a:schemeClr val="accent2">
                     <a:lumMod val="40000"/>
@@ -9014,7 +8856,7 @@
               <a:t>id_salarie</a:t>
             </a:r>
             <a:r>
-              <a:rPr lang="fr-FR" sz="1200" i="1" dirty="0">
+              <a:rPr lang="fr-FR" sz="1200" i="1" noProof="0" dirty="0">
                 <a:solidFill>
                   <a:schemeClr val="accent2">
                     <a:lumMod val="40000"/>
@@ -9031,7 +8873,7 @@
               <a:buChar char="-"/>
             </a:pPr>
             <a:r>
-              <a:rPr lang="fr-FR" b="1" dirty="0" err="1">
+              <a:rPr lang="fr-FR" b="1" noProof="0" dirty="0" err="1">
                 <a:solidFill>
                   <a:schemeClr val="accent2">
                     <a:lumMod val="40000"/>
@@ -9041,7 +8883,7 @@
               </a:rPr>
               <a:t>accepted_values</a:t>
             </a:r>
-            <a:endParaRPr lang="fr-FR" b="1" dirty="0">
+            <a:endParaRPr lang="fr-FR" b="1" noProof="0" dirty="0">
               <a:solidFill>
                 <a:schemeClr val="accent2">
                   <a:lumMod val="40000"/>
@@ -9056,7 +8898,7 @@
               <a:buChar char="-"/>
             </a:pPr>
             <a:r>
-              <a:rPr lang="fr-FR" dirty="0" err="1">
+              <a:rPr lang="fr-FR" noProof="0" dirty="0" err="1">
                 <a:solidFill>
                   <a:schemeClr val="accent2">
                     <a:lumMod val="40000"/>
@@ -9067,7 +8909,7 @@
               <a:t>type_sport</a:t>
             </a:r>
             <a:r>
-              <a:rPr lang="fr-FR" dirty="0">
+              <a:rPr lang="fr-FR" noProof="0" dirty="0">
                 <a:solidFill>
                   <a:schemeClr val="accent2">
                     <a:lumMod val="40000"/>
@@ -9078,7 +8920,7 @@
               <a:t> </a:t>
             </a:r>
             <a:r>
-              <a:rPr lang="fr-FR" sz="1200" i="1" dirty="0">
+              <a:rPr lang="fr-FR" sz="1200" i="1" noProof="0" dirty="0">
                 <a:solidFill>
                   <a:schemeClr val="accent2">
                     <a:lumMod val="40000"/>
@@ -9088,7 +8930,7 @@
               </a:rPr>
               <a:t>(15 valeurs)</a:t>
             </a:r>
-            <a:endParaRPr lang="fr-FR" i="1" dirty="0">
+            <a:endParaRPr lang="fr-FR" i="1" noProof="0" dirty="0">
               <a:solidFill>
                 <a:schemeClr val="accent2">
                   <a:lumMod val="40000"/>
@@ -9149,7 +8991,7 @@
           <a:lstStyle/>
           <a:p>
             <a:pPr algn="ctr"/>
-            <a:endParaRPr/>
+            <a:endParaRPr lang="fr-FR" noProof="0" dirty="0"/>
           </a:p>
         </p:txBody>
       </p:sp>
@@ -9199,7 +9041,7 @@
           <a:lstStyle/>
           <a:p>
             <a:pPr algn="ctr"/>
-            <a:endParaRPr/>
+            <a:endParaRPr lang="fr-FR" noProof="0" dirty="0"/>
           </a:p>
         </p:txBody>
       </p:sp>
@@ -9238,7 +9080,7 @@
               </a:defRPr>
             </a:pPr>
             <a:r>
-              <a:rPr dirty="0"/>
+              <a:rPr lang="fr-FR" noProof="0" dirty="0"/>
               <a:t>51 / 51 PASS</a:t>
             </a:r>
           </a:p>
@@ -9279,8 +9121,14 @@
               </a:defRPr>
             </a:pPr>
             <a:r>
-              <a:t>Tests pytest</a:t>
-            </a:r>
+              <a:rPr lang="fr-FR" noProof="0" dirty="0"/>
+              <a:t>Tests </a:t>
+            </a:r>
+            <a:r>
+              <a:rPr lang="fr-FR" noProof="0" dirty="0" err="1"/>
+              <a:t>pytest</a:t>
+            </a:r>
+            <a:endParaRPr lang="fr-FR" noProof="0" dirty="0"/>
           </a:p>
         </p:txBody>
       </p:sp>
@@ -9334,7 +9182,7 @@
           <a:lstStyle/>
           <a:p>
             <a:pPr algn="ctr"/>
-            <a:endParaRPr/>
+            <a:endParaRPr lang="fr-FR" noProof="0" dirty="0"/>
           </a:p>
         </p:txBody>
       </p:sp>
@@ -9384,7 +9232,7 @@
           <a:lstStyle/>
           <a:p>
             <a:pPr algn="ctr"/>
-            <a:endParaRPr/>
+            <a:endParaRPr lang="fr-FR" noProof="0" dirty="0"/>
           </a:p>
         </p:txBody>
       </p:sp>
@@ -9423,6 +9271,7 @@
               </a:defRPr>
             </a:pPr>
             <a:r>
+              <a:rPr lang="fr-FR" noProof="0" dirty="0"/>
               <a:t>37 / 37 PASS</a:t>
             </a:r>
           </a:p>
@@ -9463,8 +9312,14 @@
               </a:defRPr>
             </a:pPr>
             <a:r>
-              <a:t>Tests dbt</a:t>
-            </a:r>
+              <a:rPr lang="fr-FR" noProof="0" dirty="0"/>
+              <a:t>Tests </a:t>
+            </a:r>
+            <a:r>
+              <a:rPr lang="fr-FR" noProof="0" dirty="0" err="1"/>
+              <a:t>dbt</a:t>
+            </a:r>
+            <a:endParaRPr lang="fr-FR" noProof="0" dirty="0"/>
           </a:p>
         </p:txBody>
       </p:sp>
@@ -9518,7 +9373,7 @@
           <a:lstStyle/>
           <a:p>
             <a:pPr algn="ctr"/>
-            <a:endParaRPr/>
+            <a:endParaRPr lang="fr-FR" noProof="0" dirty="0"/>
           </a:p>
         </p:txBody>
       </p:sp>
@@ -9568,7 +9423,7 @@
           <a:lstStyle/>
           <a:p>
             <a:pPr algn="ctr"/>
-            <a:endParaRPr/>
+            <a:endParaRPr lang="fr-FR" noProof="0" dirty="0"/>
           </a:p>
         </p:txBody>
       </p:sp>
@@ -9607,6 +9462,7 @@
               </a:defRPr>
             </a:pPr>
             <a:r>
+              <a:rPr lang="fr-FR" noProof="0" dirty="0"/>
               <a:t>88 / 88 PASS</a:t>
             </a:r>
           </a:p>
@@ -9647,6 +9503,7 @@
               </a:defRPr>
             </a:pPr>
             <a:r>
+              <a:rPr lang="fr-FR" noProof="0" dirty="0"/>
               <a:t>Tests totaux</a:t>
             </a:r>
           </a:p>
@@ -9897,7 +9754,7 @@
           <a:p>
             <a:pPr marL="357188"/>
             <a:r>
-              <a:rPr lang="fr-FR" dirty="0">
+              <a:rPr lang="fr-FR" noProof="0" dirty="0">
                 <a:solidFill>
                   <a:schemeClr val="accent2">
                     <a:lumMod val="40000"/>
@@ -9908,7 +9765,7 @@
               <a:t>Le </a:t>
             </a:r>
             <a:r>
-              <a:rPr lang="fr-FR" dirty="0" err="1">
+              <a:rPr lang="fr-FR" noProof="0" dirty="0" err="1">
                 <a:solidFill>
                   <a:schemeClr val="accent2">
                     <a:lumMod val="40000"/>
@@ -9919,7 +9776,7 @@
               <a:t>dashboard</a:t>
             </a:r>
             <a:r>
-              <a:rPr lang="fr-FR" dirty="0">
+              <a:rPr lang="fr-FR" noProof="0" dirty="0">
                 <a:solidFill>
                   <a:schemeClr val="accent2">
                     <a:lumMod val="40000"/>
@@ -9930,7 +9787,7 @@
               <a:t> </a:t>
             </a:r>
             <a:r>
-              <a:rPr lang="fr-FR" b="1" dirty="0">
+              <a:rPr lang="fr-FR" b="1" noProof="0" dirty="0">
                 <a:solidFill>
                   <a:schemeClr val="accent2">
                     <a:lumMod val="40000"/>
@@ -9941,7 +9798,7 @@
               <a:t>Power BI </a:t>
             </a:r>
             <a:r>
-              <a:rPr lang="fr-FR" dirty="0">
+              <a:rPr lang="fr-FR" noProof="0" dirty="0">
                 <a:solidFill>
                   <a:schemeClr val="accent2">
                     <a:lumMod val="40000"/>
@@ -9952,7 +9809,7 @@
               <a:t>se connecte directement à </a:t>
             </a:r>
             <a:r>
-              <a:rPr lang="fr-FR" b="1" dirty="0">
+              <a:rPr lang="fr-FR" b="1" noProof="0" dirty="0">
                 <a:solidFill>
                   <a:schemeClr val="accent2">
                     <a:lumMod val="40000"/>
@@ -9963,7 +9820,7 @@
               <a:t>PostgreSQL</a:t>
             </a:r>
             <a:r>
-              <a:rPr lang="fr-FR" dirty="0">
+              <a:rPr lang="fr-FR" noProof="0" dirty="0">
                 <a:solidFill>
                   <a:schemeClr val="accent2">
                     <a:lumMod val="40000"/>
@@ -9974,7 +9831,7 @@
               <a:t> en </a:t>
             </a:r>
             <a:r>
-              <a:rPr lang="fr-FR" b="1" dirty="0" err="1">
+              <a:rPr lang="fr-FR" b="1" noProof="0" dirty="0" err="1">
                 <a:solidFill>
                   <a:schemeClr val="accent2">
                     <a:lumMod val="40000"/>
@@ -9985,7 +9842,7 @@
               <a:t>DirectQuery</a:t>
             </a:r>
             <a:r>
-              <a:rPr lang="fr-FR" dirty="0">
+              <a:rPr lang="fr-FR" noProof="0" dirty="0">
                 <a:solidFill>
                   <a:schemeClr val="accent2">
                     <a:lumMod val="40000"/>
@@ -9996,7 +9853,7 @@
               <a:t> </a:t>
             </a:r>
             <a:r>
-              <a:rPr lang="fr-FR" sz="1200" i="1" dirty="0">
+              <a:rPr lang="fr-FR" sz="1200" i="1" noProof="0" dirty="0">
                 <a:solidFill>
                   <a:schemeClr val="accent2">
                     <a:lumMod val="40000"/>
@@ -10007,7 +9864,7 @@
               <a:t>(port 5433, </a:t>
             </a:r>
             <a:r>
-              <a:rPr lang="fr-FR" sz="1200" i="1" dirty="0" err="1">
+              <a:rPr lang="fr-FR" sz="1200" i="1" noProof="0" dirty="0" err="1">
                 <a:solidFill>
                   <a:schemeClr val="accent2">
                     <a:lumMod val="40000"/>
@@ -10018,7 +9875,7 @@
               <a:t>role_analytics</a:t>
             </a:r>
             <a:r>
-              <a:rPr lang="fr-FR" sz="1200" i="1" dirty="0">
+              <a:rPr lang="fr-FR" sz="1200" i="1" noProof="0" dirty="0">
                 <a:solidFill>
                   <a:schemeClr val="accent2">
                     <a:lumMod val="40000"/>
@@ -10029,7 +9886,7 @@
               <a:t>)</a:t>
             </a:r>
             <a:r>
-              <a:rPr lang="fr-FR" dirty="0">
+              <a:rPr lang="fr-FR" noProof="0" dirty="0">
                 <a:solidFill>
                   <a:schemeClr val="accent2">
                     <a:lumMod val="40000"/>
@@ -10040,7 +9897,7 @@
               <a:t>, ce qui garantit des </a:t>
             </a:r>
             <a:r>
-              <a:rPr lang="fr-FR" b="1" dirty="0">
+              <a:rPr lang="fr-FR" b="1" noProof="0" dirty="0">
                 <a:solidFill>
                   <a:schemeClr val="accent2">
                     <a:lumMod val="40000"/>
@@ -10051,7 +9908,7 @@
               <a:t>données toujours à jour </a:t>
             </a:r>
             <a:r>
-              <a:rPr lang="fr-FR" dirty="0">
+              <a:rPr lang="fr-FR" noProof="0" dirty="0">
                 <a:solidFill>
                   <a:schemeClr val="accent2">
                     <a:lumMod val="40000"/>
@@ -10065,7 +9922,7 @@
           <a:p>
             <a:pPr marL="357188"/>
             <a:r>
-              <a:rPr lang="fr-FR" dirty="0">
+              <a:rPr lang="fr-FR" noProof="0" dirty="0">
                 <a:solidFill>
                   <a:schemeClr val="accent2">
                     <a:lumMod val="40000"/>
@@ -10076,7 +9933,7 @@
               <a:t>Le </a:t>
             </a:r>
             <a:r>
-              <a:rPr lang="fr-FR" dirty="0" err="1">
+              <a:rPr lang="fr-FR" noProof="0" dirty="0" err="1">
                 <a:solidFill>
                   <a:schemeClr val="accent2">
                     <a:lumMod val="40000"/>
@@ -10087,7 +9944,7 @@
               <a:t>dashboard</a:t>
             </a:r>
             <a:r>
-              <a:rPr lang="fr-FR" dirty="0">
+              <a:rPr lang="fr-FR" noProof="0" dirty="0">
                 <a:solidFill>
                   <a:schemeClr val="accent2">
                     <a:lumMod val="40000"/>
@@ -10098,7 +9955,7 @@
               <a:t> est organisé en </a:t>
             </a:r>
             <a:r>
-              <a:rPr lang="fr-FR" b="1" dirty="0">
+              <a:rPr lang="fr-FR" b="1" noProof="0" dirty="0">
                 <a:solidFill>
                   <a:schemeClr val="accent2">
                     <a:lumMod val="40000"/>
@@ -10109,7 +9966,7 @@
               <a:t>deux pages</a:t>
             </a:r>
             <a:r>
-              <a:rPr lang="fr-FR" dirty="0">
+              <a:rPr lang="fr-FR" noProof="0" dirty="0">
                 <a:solidFill>
                   <a:schemeClr val="accent2">
                     <a:lumMod val="40000"/>
@@ -10120,7 +9977,7 @@
               <a:t>, séparant les indicateurs </a:t>
             </a:r>
             <a:r>
-              <a:rPr lang="fr-FR" b="1" dirty="0">
+              <a:rPr lang="fr-FR" b="1" noProof="0" dirty="0">
                 <a:solidFill>
                   <a:schemeClr val="accent2">
                     <a:lumMod val="40000"/>
@@ -10131,7 +9988,7 @@
               <a:t>"publics" </a:t>
             </a:r>
             <a:r>
-              <a:rPr lang="fr-FR" dirty="0">
+              <a:rPr lang="fr-FR" noProof="0" dirty="0">
                 <a:solidFill>
                   <a:schemeClr val="accent2">
                     <a:lumMod val="40000"/>
@@ -10142,7 +9999,7 @@
               <a:t>des </a:t>
             </a:r>
             <a:r>
-              <a:rPr lang="fr-FR" b="1" dirty="0">
+              <a:rPr lang="fr-FR" b="1" noProof="0" dirty="0">
                 <a:solidFill>
                   <a:schemeClr val="accent2">
                     <a:lumMod val="40000"/>
@@ -10153,7 +10010,7 @@
               <a:t>données RH sensibles</a:t>
             </a:r>
             <a:r>
-              <a:rPr lang="fr-FR" dirty="0">
+              <a:rPr lang="fr-FR" noProof="0" dirty="0">
                 <a:solidFill>
                   <a:schemeClr val="accent2">
                     <a:lumMod val="40000"/>
@@ -10214,7 +10071,7 @@
           <a:lstStyle/>
           <a:p>
             <a:pPr algn="ctr"/>
-            <a:endParaRPr/>
+            <a:endParaRPr lang="fr-FR" noProof="0" dirty="0"/>
           </a:p>
         </p:txBody>
       </p:sp>
@@ -10264,7 +10121,7 @@
           <a:lstStyle/>
           <a:p>
             <a:pPr algn="ctr"/>
-            <a:endParaRPr/>
+            <a:endParaRPr lang="fr-FR" noProof="0" dirty="0"/>
           </a:p>
         </p:txBody>
       </p:sp>
@@ -10303,42 +10160,14 @@
               </a:defRPr>
             </a:pPr>
             <a:r>
-              <a:rPr lang="fr-FR" dirty="0"/>
-              <a:t>P1 - </a:t>
-            </a:r>
-            <a:r>
-              <a:rPr dirty="0"/>
-              <a:t>KPIs </a:t>
-            </a:r>
-            <a:r>
-              <a:rPr lang="fr-FR" dirty="0"/>
-              <a:t>"</a:t>
-            </a:r>
-            <a:r>
-              <a:rPr dirty="0"/>
-              <a:t>publics</a:t>
-            </a:r>
-            <a:r>
-              <a:rPr lang="fr-FR" dirty="0"/>
-              <a:t>"</a:t>
-            </a:r>
-            <a:r>
-              <a:rPr dirty="0"/>
-              <a:t> </a:t>
-            </a:r>
-            <a:r>
-              <a:rPr sz="1400" i="1" dirty="0"/>
-              <a:t>(</a:t>
-            </a:r>
-            <a:r>
-              <a:rPr lang="fr-FR" sz="1400" i="1" dirty="0"/>
-              <a:t>Vue d'ensemble des activités</a:t>
-            </a:r>
-            <a:r>
-              <a:rPr sz="1400" i="1" dirty="0"/>
-              <a:t>)</a:t>
-            </a:r>
-            <a:endParaRPr i="1" dirty="0"/>
+              <a:rPr lang="fr-FR" noProof="0" dirty="0"/>
+              <a:t>P1 - KPIs "publics" </a:t>
+            </a:r>
+            <a:r>
+              <a:rPr lang="fr-FR" sz="1400" i="1" noProof="0" dirty="0"/>
+              <a:t>(Vue d'ensemble des activités)</a:t>
+            </a:r>
+            <a:endParaRPr lang="fr-FR" i="1" noProof="0" dirty="0"/>
           </a:p>
         </p:txBody>
       </p:sp>
@@ -10380,24 +10209,8 @@
               </a:defRPr>
             </a:pPr>
             <a:r>
-              <a:rPr dirty="0"/>
-              <a:t>• Camembert </a:t>
-            </a:r>
-            <a:r>
-              <a:rPr dirty="0" err="1"/>
-              <a:t>sportifs</a:t>
-            </a:r>
-            <a:r>
-              <a:rPr dirty="0"/>
-              <a:t> / non-</a:t>
-            </a:r>
-            <a:r>
-              <a:rPr dirty="0" err="1"/>
-              <a:t>sportifs</a:t>
-            </a:r>
-            <a:r>
-              <a:rPr dirty="0"/>
-              <a:t> (59 % / 41 %)</a:t>
+              <a:rPr lang="fr-FR" noProof="0" dirty="0"/>
+              <a:t>• Camembert sportifs / non-sportifs (59 % / 41 %)</a:t>
             </a:r>
           </a:p>
           <a:p>
@@ -10413,24 +10226,8 @@
               </a:defRPr>
             </a:pPr>
             <a:r>
-              <a:rPr dirty="0"/>
-              <a:t>• Top 10 sports </a:t>
-            </a:r>
-            <a:r>
-              <a:rPr dirty="0" err="1"/>
-              <a:t>déclarés</a:t>
-            </a:r>
-            <a:r>
-              <a:rPr dirty="0"/>
-              <a:t> (</a:t>
-            </a:r>
-            <a:r>
-              <a:rPr dirty="0" err="1"/>
-              <a:t>histogramme</a:t>
-            </a:r>
-            <a:r>
-              <a:rPr dirty="0"/>
-              <a:t> horizontal)</a:t>
+              <a:rPr lang="fr-FR" noProof="0" dirty="0"/>
+              <a:t>• Top 10 sports déclarés (histogramme horizontal)</a:t>
             </a:r>
           </a:p>
           <a:p>
@@ -10446,40 +10243,8 @@
               </a:defRPr>
             </a:pPr>
             <a:r>
-              <a:rPr dirty="0"/>
-              <a:t>• Top 5 </a:t>
-            </a:r>
-            <a:r>
-              <a:rPr dirty="0" err="1"/>
-              <a:t>sportifs</a:t>
-            </a:r>
-            <a:r>
-              <a:rPr dirty="0"/>
-              <a:t> (</a:t>
-            </a:r>
-            <a:r>
-              <a:rPr dirty="0" err="1"/>
-              <a:t>classement</a:t>
-            </a:r>
-            <a:r>
-              <a:rPr dirty="0"/>
-              <a:t> par </a:t>
-            </a:r>
-            <a:r>
-              <a:rPr dirty="0" err="1"/>
-              <a:t>nb</a:t>
-            </a:r>
-            <a:r>
-              <a:rPr dirty="0"/>
-              <a:t> </a:t>
-            </a:r>
-            <a:r>
-              <a:rPr dirty="0" err="1"/>
-              <a:t>activités</a:t>
-            </a:r>
-            <a:r>
-              <a:rPr dirty="0"/>
-              <a:t>)</a:t>
+              <a:rPr lang="fr-FR" noProof="0" dirty="0"/>
+              <a:t>• Top 5 sportifs (classement par nb activités)</a:t>
             </a:r>
           </a:p>
           <a:p>
@@ -10495,22 +10260,9 @@
               </a:defRPr>
             </a:pPr>
             <a:r>
-              <a:rPr dirty="0"/>
-              <a:t>• Carte </a:t>
-            </a:r>
-            <a:r>
-              <a:rPr dirty="0" err="1"/>
-              <a:t>géographique</a:t>
-            </a:r>
-            <a:r>
-              <a:rPr dirty="0"/>
-              <a:t> des </a:t>
-            </a:r>
-            <a:r>
-              <a:rPr dirty="0" err="1"/>
-              <a:t>salariés</a:t>
-            </a:r>
-            <a:endParaRPr dirty="0"/>
+              <a:rPr lang="fr-FR" noProof="0" dirty="0"/>
+              <a:t>• Carte géographique des salariés</a:t>
+            </a:r>
           </a:p>
           <a:p>
             <a:pPr algn="l">
@@ -10525,32 +10277,8 @@
               </a:defRPr>
             </a:pPr>
             <a:r>
-              <a:rPr dirty="0"/>
-              <a:t>• </a:t>
-            </a:r>
-            <a:r>
-              <a:rPr dirty="0" err="1"/>
-              <a:t>Taux</a:t>
-            </a:r>
-            <a:r>
-              <a:rPr dirty="0"/>
-              <a:t> de participation (3 </a:t>
-            </a:r>
-            <a:r>
-              <a:rPr dirty="0" err="1"/>
-              <a:t>derniers</a:t>
-            </a:r>
-            <a:r>
-              <a:rPr dirty="0"/>
-              <a:t> </a:t>
-            </a:r>
-            <a:r>
-              <a:rPr dirty="0" err="1"/>
-              <a:t>mois</a:t>
-            </a:r>
-            <a:r>
-              <a:rPr dirty="0"/>
-              <a:t>)</a:t>
+              <a:rPr lang="fr-FR" noProof="0" dirty="0"/>
+              <a:t>• Taux de participation (3 derniers mois)</a:t>
             </a:r>
           </a:p>
         </p:txBody>
@@ -10603,7 +10331,7 @@
           <a:lstStyle/>
           <a:p>
             <a:pPr algn="ctr"/>
-            <a:endParaRPr/>
+            <a:endParaRPr lang="fr-FR" noProof="0" dirty="0"/>
           </a:p>
         </p:txBody>
       </p:sp>
@@ -10653,7 +10381,7 @@
           <a:lstStyle/>
           <a:p>
             <a:pPr algn="ctr"/>
-            <a:endParaRPr/>
+            <a:endParaRPr lang="fr-FR" noProof="0" dirty="0"/>
           </a:p>
         </p:txBody>
       </p:sp>
@@ -10692,30 +10420,14 @@
               </a:defRPr>
             </a:pPr>
             <a:r>
-              <a:rPr lang="fr-FR" dirty="0"/>
-              <a:t>P</a:t>
-            </a:r>
-            <a:r>
-              <a:rPr dirty="0"/>
-              <a:t>2 </a:t>
-            </a:r>
-            <a:r>
-              <a:rPr lang="fr-FR" dirty="0"/>
-              <a:t>-</a:t>
-            </a:r>
-            <a:r>
-              <a:rPr dirty="0"/>
-              <a:t> KPIs RH</a:t>
-            </a:r>
-            <a:r>
-              <a:rPr lang="fr-FR" dirty="0"/>
-              <a:t> </a:t>
-            </a:r>
-            <a:r>
-              <a:rPr lang="fr-FR" sz="1400" i="1" dirty="0"/>
+              <a:rPr lang="fr-FR" noProof="0" dirty="0"/>
+              <a:t>P2 - KPIs RH </a:t>
+            </a:r>
+            <a:r>
+              <a:rPr lang="fr-FR" sz="1400" i="1" noProof="0" dirty="0"/>
               <a:t>(Impact financier et éligibilités)</a:t>
             </a:r>
-            <a:endParaRPr i="1" dirty="0"/>
+            <a:endParaRPr lang="fr-FR" i="1" noProof="0" dirty="0"/>
           </a:p>
         </p:txBody>
       </p:sp>
@@ -10757,22 +10469,9 @@
               </a:defRPr>
             </a:pPr>
             <a:r>
-              <a:rPr dirty="0"/>
-              <a:t>• </a:t>
-            </a:r>
-            <a:r>
-              <a:rPr dirty="0" err="1"/>
-              <a:t>Histogramme</a:t>
-            </a:r>
-            <a:r>
-              <a:rPr dirty="0"/>
-              <a:t> type de </a:t>
-            </a:r>
-            <a:r>
-              <a:rPr dirty="0" err="1"/>
-              <a:t>mobilité</a:t>
-            </a:r>
-            <a:endParaRPr dirty="0"/>
+              <a:rPr lang="fr-FR" noProof="0" dirty="0"/>
+              <a:t>• Histogramme type de mobilité</a:t>
+            </a:r>
           </a:p>
           <a:p>
             <a:pPr algn="l">
@@ -10787,22 +10486,9 @@
               </a:defRPr>
             </a:pPr>
             <a:r>
-              <a:rPr dirty="0"/>
-              <a:t>• Table distances + temps de </a:t>
-            </a:r>
-            <a:r>
-              <a:rPr dirty="0" err="1"/>
-              <a:t>trajet</a:t>
-            </a:r>
-            <a:r>
-              <a:rPr dirty="0"/>
-              <a:t> </a:t>
-            </a:r>
-            <a:r>
-              <a:rPr dirty="0" err="1"/>
-              <a:t>estimé</a:t>
-            </a:r>
-            <a:endParaRPr dirty="0"/>
+              <a:rPr lang="fr-FR" noProof="0" dirty="0"/>
+              <a:t>• Table distances + temps de trajet estimé</a:t>
+            </a:r>
           </a:p>
           <a:p>
             <a:pPr algn="l">
@@ -10817,30 +10503,9 @@
               </a:defRPr>
             </a:pPr>
             <a:r>
-              <a:rPr dirty="0"/>
-              <a:t>• Total </a:t>
-            </a:r>
-            <a:r>
-              <a:rPr dirty="0" err="1"/>
-              <a:t>jours</a:t>
-            </a:r>
-            <a:r>
-              <a:rPr dirty="0"/>
-              <a:t> bien-</a:t>
-            </a:r>
-            <a:r>
-              <a:rPr dirty="0" err="1"/>
-              <a:t>être</a:t>
-            </a:r>
-            <a:r>
-              <a:rPr dirty="0"/>
-              <a:t> </a:t>
-            </a:r>
-            <a:r>
-              <a:rPr dirty="0" err="1"/>
-              <a:t>gagnés</a:t>
-            </a:r>
-            <a:endParaRPr dirty="0"/>
+              <a:rPr lang="fr-FR" noProof="0" dirty="0"/>
+              <a:t>• Total jours bien-être gagnés</a:t>
+            </a:r>
           </a:p>
           <a:p>
             <a:pPr algn="l">
@@ -10855,30 +10520,9 @@
               </a:defRPr>
             </a:pPr>
             <a:r>
-              <a:rPr dirty="0"/>
-              <a:t>• Nb </a:t>
-            </a:r>
-            <a:r>
-              <a:rPr dirty="0" err="1"/>
-              <a:t>salariés</a:t>
-            </a:r>
-            <a:r>
-              <a:rPr dirty="0"/>
-              <a:t> </a:t>
-            </a:r>
-            <a:r>
-              <a:rPr dirty="0" err="1"/>
-              <a:t>éligibles</a:t>
-            </a:r>
-            <a:r>
-              <a:rPr dirty="0"/>
-              <a:t> bien-</a:t>
-            </a:r>
-            <a:r>
-              <a:rPr dirty="0" err="1"/>
-              <a:t>être</a:t>
-            </a:r>
-            <a:endParaRPr dirty="0"/>
+              <a:rPr lang="fr-FR" noProof="0" dirty="0"/>
+              <a:t>• Nb salariés éligibles bien-être</a:t>
+            </a:r>
           </a:p>
           <a:p>
             <a:pPr algn="l">
@@ -10893,30 +10537,9 @@
               </a:defRPr>
             </a:pPr>
             <a:r>
-              <a:rPr dirty="0"/>
-              <a:t>• Prime </a:t>
-            </a:r>
-            <a:r>
-              <a:rPr dirty="0" err="1"/>
-              <a:t>moyenne</a:t>
-            </a:r>
-            <a:r>
-              <a:rPr dirty="0"/>
-              <a:t> par </a:t>
-            </a:r>
-            <a:r>
-              <a:rPr dirty="0" err="1"/>
-              <a:t>salarié</a:t>
-            </a:r>
-            <a:r>
-              <a:rPr dirty="0"/>
-              <a:t> </a:t>
-            </a:r>
-            <a:r>
-              <a:rPr dirty="0" err="1"/>
-              <a:t>éligible</a:t>
-            </a:r>
-            <a:endParaRPr dirty="0"/>
+              <a:rPr lang="fr-FR" noProof="0" dirty="0"/>
+              <a:t>• Prime moyenne par salarié éligible</a:t>
+            </a:r>
           </a:p>
           <a:p>
             <a:pPr algn="l">
@@ -10931,7 +10554,7 @@
               </a:defRPr>
             </a:pPr>
             <a:r>
-              <a:rPr dirty="0"/>
+              <a:rPr lang="fr-FR" noProof="0" dirty="0"/>
               <a:t>• Total primes sport</a:t>
             </a:r>
           </a:p>
@@ -10990,7 +10613,7 @@
           <a:p>
             <a:pPr marL="357188"/>
             <a:r>
-              <a:rPr lang="fr-FR" dirty="0">
+              <a:rPr lang="fr-FR" noProof="0" dirty="0">
                 <a:solidFill>
                   <a:schemeClr val="accent2">
                     <a:lumMod val="40000"/>
@@ -11001,7 +10624,7 @@
               <a:t>La page "</a:t>
             </a:r>
             <a:r>
-              <a:rPr lang="fr-FR" b="1" dirty="0">
+              <a:rPr lang="fr-FR" b="1" noProof="0" dirty="0">
                 <a:solidFill>
                   <a:schemeClr val="accent2">
                     <a:lumMod val="40000"/>
@@ -11012,7 +10635,7 @@
               <a:t>publique</a:t>
             </a:r>
             <a:r>
-              <a:rPr lang="fr-FR" dirty="0">
+              <a:rPr lang="fr-FR" noProof="0" dirty="0">
                 <a:solidFill>
                   <a:schemeClr val="accent2">
                     <a:lumMod val="40000"/>
@@ -11023,7 +10646,7 @@
               <a:t>" utilise </a:t>
             </a:r>
             <a:r>
-              <a:rPr lang="fr-FR" b="1" dirty="0" err="1">
+              <a:rPr lang="fr-FR" b="1" noProof="0" dirty="0" err="1">
                 <a:solidFill>
                   <a:schemeClr val="accent2">
                     <a:lumMod val="40000"/>
@@ -11034,7 +10657,7 @@
               <a:t>role_analytics</a:t>
             </a:r>
             <a:r>
-              <a:rPr lang="fr-FR" b="1" dirty="0">
+              <a:rPr lang="fr-FR" b="1" noProof="0" dirty="0">
                 <a:solidFill>
                   <a:schemeClr val="accent2">
                     <a:lumMod val="40000"/>
@@ -11045,7 +10668,7 @@
               <a:t> </a:t>
             </a:r>
             <a:r>
-              <a:rPr lang="fr-FR" sz="1200" i="1" dirty="0">
+              <a:rPr lang="fr-FR" sz="1200" i="1" noProof="0" dirty="0">
                 <a:solidFill>
                   <a:schemeClr val="accent2">
                     <a:lumMod val="40000"/>
@@ -11056,7 +10679,7 @@
               <a:t>(schéma gold en lecture seule, données anonymes)</a:t>
             </a:r>
             <a:r>
-              <a:rPr lang="fr-FR" dirty="0">
+              <a:rPr lang="fr-FR" noProof="0" dirty="0">
                 <a:solidFill>
                   <a:schemeClr val="accent2">
                     <a:lumMod val="40000"/>
@@ -11070,7 +10693,7 @@
           <a:p>
             <a:pPr marL="357188"/>
             <a:r>
-              <a:rPr lang="fr-FR" dirty="0">
+              <a:rPr lang="fr-FR" noProof="0" dirty="0">
                 <a:solidFill>
                   <a:schemeClr val="accent2">
                     <a:lumMod val="40000"/>
@@ -11081,7 +10704,7 @@
               <a:t>La page </a:t>
             </a:r>
             <a:r>
-              <a:rPr lang="fr-FR" b="1" dirty="0">
+              <a:rPr lang="fr-FR" b="1" noProof="0" dirty="0">
                 <a:solidFill>
                   <a:schemeClr val="accent2">
                     <a:lumMod val="40000"/>
@@ -11092,7 +10715,7 @@
               <a:t>RH</a:t>
             </a:r>
             <a:r>
-              <a:rPr lang="fr-FR" dirty="0">
+              <a:rPr lang="fr-FR" noProof="0" dirty="0">
                 <a:solidFill>
                   <a:schemeClr val="accent2">
                     <a:lumMod val="40000"/>
@@ -11103,7 +10726,7 @@
               <a:t>, qui affiche les noms des salariés, utilise </a:t>
             </a:r>
             <a:r>
-              <a:rPr lang="fr-FR" b="1" dirty="0" err="1">
+              <a:rPr lang="fr-FR" b="1" noProof="0" dirty="0" err="1">
                 <a:solidFill>
                   <a:schemeClr val="accent2">
                     <a:lumMod val="40000"/>
@@ -11114,7 +10737,7 @@
               <a:t>role_rh_admin</a:t>
             </a:r>
             <a:r>
-              <a:rPr lang="fr-FR" dirty="0">
+              <a:rPr lang="fr-FR" noProof="0" dirty="0">
                 <a:solidFill>
                   <a:schemeClr val="accent2">
                     <a:lumMod val="40000"/>
@@ -11128,7 +10751,7 @@
           <a:p>
             <a:pPr marL="357188"/>
             <a:r>
-              <a:rPr lang="fr-FR" dirty="0">
+              <a:rPr lang="fr-FR" noProof="0" dirty="0">
                 <a:solidFill>
                   <a:schemeClr val="accent2">
                     <a:lumMod val="40000"/>
@@ -11139,7 +10762,7 @@
               <a:t>Conformément au </a:t>
             </a:r>
             <a:r>
-              <a:rPr lang="fr-FR" b="1" dirty="0">
+              <a:rPr lang="fr-FR" b="1" noProof="0" dirty="0">
                 <a:solidFill>
                   <a:schemeClr val="accent2">
                     <a:lumMod val="40000"/>
@@ -11150,7 +10773,7 @@
               <a:t>principe RGPD </a:t>
             </a:r>
             <a:r>
-              <a:rPr lang="fr-FR" dirty="0">
+              <a:rPr lang="fr-FR" noProof="0" dirty="0">
                 <a:solidFill>
                   <a:schemeClr val="accent2">
                     <a:lumMod val="40000"/>
@@ -11161,7 +10784,7 @@
               <a:t>de moindre privilège, </a:t>
             </a:r>
             <a:r>
-              <a:rPr lang="fr-FR" b="1" dirty="0">
+              <a:rPr lang="fr-FR" b="1" noProof="0" dirty="0">
                 <a:solidFill>
                   <a:schemeClr val="accent2">
                     <a:lumMod val="40000"/>
@@ -11172,7 +10795,7 @@
               <a:t>seuls</a:t>
             </a:r>
             <a:r>
-              <a:rPr lang="fr-FR" dirty="0">
+              <a:rPr lang="fr-FR" noProof="0" dirty="0">
                 <a:solidFill>
                   <a:schemeClr val="accent2">
                     <a:lumMod val="40000"/>
@@ -11183,7 +10806,7 @@
               <a:t> les </a:t>
             </a:r>
             <a:r>
-              <a:rPr lang="fr-FR" b="1" dirty="0">
+              <a:rPr lang="fr-FR" b="1" noProof="0" dirty="0">
                 <a:solidFill>
                   <a:schemeClr val="accent2">
                     <a:lumMod val="40000"/>
@@ -11194,7 +10817,7 @@
               <a:t>profils RH </a:t>
             </a:r>
             <a:r>
-              <a:rPr lang="fr-FR" dirty="0">
+              <a:rPr lang="fr-FR" noProof="0" dirty="0">
                 <a:solidFill>
                   <a:schemeClr val="accent2">
                     <a:lumMod val="40000"/>
@@ -11277,7 +10900,7 @@
           <a:p>
             <a:pPr algn="r"/>
             <a:r>
-              <a:rPr lang="fr-FR" sz="3200" b="1" dirty="0">
+              <a:rPr lang="fr-FR" sz="3200" b="1" noProof="0" dirty="0">
                 <a:solidFill>
                   <a:schemeClr val="accent2">
                     <a:lumMod val="75000"/>
@@ -11286,13 +10909,6 @@
               </a:rPr>
               <a:t>11</a:t>
             </a:r>
-            <a:endParaRPr lang="fr-FR" sz="3200" b="1" noProof="0" dirty="0">
-              <a:solidFill>
-                <a:schemeClr val="accent2">
-                  <a:lumMod val="75000"/>
-                </a:schemeClr>
-              </a:solidFill>
-            </a:endParaRPr>
           </a:p>
         </p:txBody>
       </p:sp>
@@ -11424,7 +11040,7 @@
           <a:lstStyle/>
           <a:p>
             <a:r>
-              <a:rPr lang="fr-FR" dirty="0">
+              <a:rPr lang="fr-FR" noProof="0" dirty="0">
                 <a:solidFill>
                   <a:schemeClr val="accent2">
                     <a:lumMod val="40000"/>
@@ -11459,7 +11075,7 @@
             </a:r>
           </a:p>
           <a:p>
-            <a:endParaRPr lang="fr-FR" sz="500" dirty="0"/>
+            <a:endParaRPr lang="fr-FR" sz="500" noProof="0" dirty="0"/>
           </a:p>
           <a:p>
             <a:pPr marL="642938" indent="-285750">
@@ -11470,7 +11086,7 @@
               <a:buChar char="ü"/>
             </a:pPr>
             <a:r>
-              <a:rPr lang="fr-FR" dirty="0">
+              <a:rPr lang="fr-FR" noProof="0" dirty="0">
                 <a:solidFill>
                   <a:schemeClr val="accent2">
                     <a:lumMod val="40000"/>
@@ -11481,7 +11097,7 @@
               <a:t>Un </a:t>
             </a:r>
             <a:r>
-              <a:rPr lang="fr-FR" b="1" dirty="0">
+              <a:rPr lang="fr-FR" b="1" noProof="0" dirty="0">
                 <a:solidFill>
                   <a:schemeClr val="accent2">
                     <a:lumMod val="40000"/>
@@ -11492,7 +11108,7 @@
               <a:t>pipeline automatisé</a:t>
             </a:r>
             <a:r>
-              <a:rPr lang="fr-FR" dirty="0">
+              <a:rPr lang="fr-FR" noProof="0" dirty="0">
                 <a:solidFill>
                   <a:schemeClr val="accent2">
                     <a:lumMod val="40000"/>
@@ -11503,7 +11119,7 @@
               <a:t> de bout en bout : </a:t>
             </a:r>
             <a:r>
-              <a:rPr lang="fr-FR" b="1" dirty="0">
+              <a:rPr lang="fr-FR" b="1" noProof="0" dirty="0">
                 <a:solidFill>
                   <a:schemeClr val="accent2">
                     <a:lumMod val="40000"/>
@@ -11514,7 +11130,7 @@
               <a:t>ingestion</a:t>
             </a:r>
             <a:r>
-              <a:rPr lang="fr-FR" dirty="0">
+              <a:rPr lang="fr-FR" noProof="0" dirty="0">
                 <a:solidFill>
                   <a:schemeClr val="accent2">
                     <a:lumMod val="40000"/>
@@ -11525,7 +11141,7 @@
               <a:t>, </a:t>
             </a:r>
             <a:r>
-              <a:rPr lang="fr-FR" b="1" dirty="0">
+              <a:rPr lang="fr-FR" b="1" noProof="0" dirty="0">
                 <a:solidFill>
                   <a:schemeClr val="accent2">
                     <a:lumMod val="40000"/>
@@ -11536,7 +11152,7 @@
               <a:t>transformation</a:t>
             </a:r>
             <a:r>
-              <a:rPr lang="fr-FR" dirty="0">
+              <a:rPr lang="fr-FR" noProof="0" dirty="0">
                 <a:solidFill>
                   <a:schemeClr val="accent2">
                     <a:lumMod val="40000"/>
@@ -11547,7 +11163,7 @@
               <a:t>, </a:t>
             </a:r>
             <a:r>
-              <a:rPr lang="fr-FR" b="1" dirty="0">
+              <a:rPr lang="fr-FR" b="1" noProof="0" dirty="0">
                 <a:solidFill>
                   <a:schemeClr val="accent2">
                     <a:lumMod val="40000"/>
@@ -11558,7 +11174,7 @@
               <a:t>orchestration</a:t>
             </a:r>
             <a:r>
-              <a:rPr lang="fr-FR" dirty="0">
+              <a:rPr lang="fr-FR" noProof="0" dirty="0">
                 <a:solidFill>
                   <a:schemeClr val="accent2">
                     <a:lumMod val="40000"/>
@@ -11569,7 +11185,7 @@
               <a:t>, </a:t>
             </a:r>
             <a:r>
-              <a:rPr lang="fr-FR" b="1" dirty="0">
+              <a:rPr lang="fr-FR" b="1" noProof="0" dirty="0">
                 <a:solidFill>
                   <a:schemeClr val="accent2">
                     <a:lumMod val="40000"/>
@@ -11580,7 +11196,7 @@
               <a:t>notification</a:t>
             </a:r>
             <a:r>
-              <a:rPr lang="fr-FR" dirty="0">
+              <a:rPr lang="fr-FR" noProof="0" dirty="0">
                 <a:solidFill>
                   <a:schemeClr val="accent2">
                     <a:lumMod val="40000"/>
@@ -11591,7 +11207,7 @@
               <a:t>, </a:t>
             </a:r>
             <a:r>
-              <a:rPr lang="fr-FR" b="1" dirty="0">
+              <a:rPr lang="fr-FR" b="1" noProof="0" dirty="0">
                 <a:solidFill>
                   <a:schemeClr val="accent2">
                     <a:lumMod val="40000"/>
@@ -11611,7 +11227,7 @@
               <a:buChar char="ü"/>
             </a:pPr>
             <a:r>
-              <a:rPr lang="fr-FR" dirty="0">
+              <a:rPr lang="fr-FR" noProof="0" dirty="0">
                 <a:solidFill>
                   <a:schemeClr val="accent2">
                     <a:lumMod val="40000"/>
@@ -11622,7 +11238,7 @@
               <a:t>Une </a:t>
             </a:r>
             <a:r>
-              <a:rPr lang="fr-FR" b="1" dirty="0">
+              <a:rPr lang="fr-FR" b="1" noProof="0" dirty="0">
                 <a:solidFill>
                   <a:schemeClr val="accent2">
                     <a:lumMod val="40000"/>
@@ -11633,7 +11249,7 @@
               <a:t>architecture </a:t>
             </a:r>
             <a:r>
-              <a:rPr lang="fr-FR" b="1" dirty="0" err="1">
+              <a:rPr lang="fr-FR" b="1" noProof="0" dirty="0" err="1">
                 <a:solidFill>
                   <a:schemeClr val="accent2">
                     <a:lumMod val="40000"/>
@@ -11644,7 +11260,7 @@
               <a:t>Medallion</a:t>
             </a:r>
             <a:r>
-              <a:rPr lang="fr-FR" b="1" dirty="0">
+              <a:rPr lang="fr-FR" b="1" noProof="0" dirty="0">
                 <a:solidFill>
                   <a:schemeClr val="accent2">
                     <a:lumMod val="40000"/>
@@ -11655,7 +11271,7 @@
               <a:t> </a:t>
             </a:r>
             <a:r>
-              <a:rPr lang="fr-FR" dirty="0">
+              <a:rPr lang="fr-FR" noProof="0" dirty="0">
                 <a:solidFill>
                   <a:schemeClr val="accent2">
                     <a:lumMod val="40000"/>
@@ -11666,7 +11282,7 @@
               <a:t>avec </a:t>
             </a:r>
             <a:r>
-              <a:rPr lang="fr-FR" b="1" dirty="0">
+              <a:rPr lang="fr-FR" b="1" noProof="0" dirty="0">
                 <a:solidFill>
                   <a:schemeClr val="accent2">
                     <a:lumMod val="40000"/>
@@ -11677,7 +11293,7 @@
               <a:t>séparation stricte des données personnelles </a:t>
             </a:r>
             <a:r>
-              <a:rPr lang="fr-FR" sz="1200" i="1" dirty="0">
+              <a:rPr lang="fr-FR" sz="1200" i="1" noProof="0" dirty="0">
                 <a:solidFill>
                   <a:schemeClr val="accent2">
                     <a:lumMod val="40000"/>
@@ -11688,7 +11304,7 @@
               <a:t>(</a:t>
             </a:r>
             <a:r>
-              <a:rPr lang="fr-FR" sz="1200" i="1" dirty="0" err="1">
+              <a:rPr lang="fr-FR" sz="1200" i="1" noProof="0" dirty="0" err="1">
                 <a:solidFill>
                   <a:schemeClr val="accent2">
                     <a:lumMod val="40000"/>
@@ -11699,7 +11315,7 @@
               <a:t>Privacy</a:t>
             </a:r>
             <a:r>
-              <a:rPr lang="fr-FR" sz="1200" i="1" dirty="0">
+              <a:rPr lang="fr-FR" sz="1200" i="1" noProof="0" dirty="0">
                 <a:solidFill>
                   <a:schemeClr val="accent2">
                     <a:lumMod val="40000"/>
@@ -11719,7 +11335,7 @@
               <a:buChar char="ü"/>
             </a:pPr>
             <a:r>
-              <a:rPr lang="fr-FR" dirty="0">
+              <a:rPr lang="fr-FR" noProof="0" dirty="0">
                 <a:solidFill>
                   <a:schemeClr val="accent2">
                     <a:lumMod val="40000"/>
@@ -11730,7 +11346,7 @@
               <a:t>Une couverture de </a:t>
             </a:r>
             <a:r>
-              <a:rPr lang="fr-FR" b="1" dirty="0">
+              <a:rPr lang="fr-FR" b="1" noProof="0" dirty="0">
                 <a:solidFill>
                   <a:schemeClr val="accent2">
                     <a:lumMod val="40000"/>
@@ -11741,7 +11357,7 @@
               <a:t>tests exhaustive </a:t>
             </a:r>
             <a:r>
-              <a:rPr lang="fr-FR" sz="1200" i="1" dirty="0">
+              <a:rPr lang="fr-FR" sz="1200" i="1" noProof="0" dirty="0">
                 <a:solidFill>
                   <a:schemeClr val="accent2">
                     <a:lumMod val="40000"/>
@@ -11752,7 +11368,7 @@
               <a:t>(88 tests : 51 </a:t>
             </a:r>
             <a:r>
-              <a:rPr lang="fr-FR" sz="1200" i="1" dirty="0" err="1">
+              <a:rPr lang="fr-FR" sz="1200" i="1" noProof="0" dirty="0" err="1">
                 <a:solidFill>
                   <a:schemeClr val="accent2">
                     <a:lumMod val="40000"/>
@@ -11763,7 +11379,7 @@
               <a:t>pytest</a:t>
             </a:r>
             <a:r>
-              <a:rPr lang="fr-FR" sz="1200" i="1" dirty="0">
+              <a:rPr lang="fr-FR" sz="1200" i="1" noProof="0" dirty="0">
                 <a:solidFill>
                   <a:schemeClr val="accent2">
                     <a:lumMod val="40000"/>
@@ -11774,7 +11390,7 @@
               <a:t> + 37 </a:t>
             </a:r>
             <a:r>
-              <a:rPr lang="fr-FR" sz="1200" i="1" dirty="0" err="1">
+              <a:rPr lang="fr-FR" sz="1200" i="1" noProof="0" dirty="0" err="1">
                 <a:solidFill>
                   <a:schemeClr val="accent2">
                     <a:lumMod val="40000"/>
@@ -11785,7 +11401,7 @@
               <a:t>dbt</a:t>
             </a:r>
             <a:r>
-              <a:rPr lang="fr-FR" sz="1200" i="1" dirty="0">
+              <a:rPr lang="fr-FR" sz="1200" i="1" noProof="0" dirty="0">
                 <a:solidFill>
                   <a:schemeClr val="accent2">
                     <a:lumMod val="40000"/>
@@ -11796,7 +11412,7 @@
               <a:t>) </a:t>
             </a:r>
             <a:r>
-              <a:rPr lang="fr-FR" dirty="0">
+              <a:rPr lang="fr-FR" noProof="0" dirty="0">
                 <a:solidFill>
                   <a:schemeClr val="accent2">
                     <a:lumMod val="40000"/>
@@ -11807,7 +11423,7 @@
               <a:t>garantissant la </a:t>
             </a:r>
             <a:r>
-              <a:rPr lang="fr-FR" b="1" dirty="0">
+              <a:rPr lang="fr-FR" b="1" noProof="0" dirty="0">
                 <a:solidFill>
                   <a:schemeClr val="accent2">
                     <a:lumMod val="40000"/>
@@ -11818,7 +11434,7 @@
               <a:t>fiabilité</a:t>
             </a:r>
             <a:r>
-              <a:rPr lang="fr-FR" dirty="0">
+              <a:rPr lang="fr-FR" noProof="0" dirty="0">
                 <a:solidFill>
                   <a:schemeClr val="accent2">
                     <a:lumMod val="40000"/>
@@ -11829,7 +11445,7 @@
               <a:t> </a:t>
             </a:r>
             <a:r>
-              <a:rPr lang="fr-FR" b="1" dirty="0">
+              <a:rPr lang="fr-FR" b="1" noProof="0" dirty="0">
                 <a:solidFill>
                   <a:schemeClr val="accent2">
                     <a:lumMod val="40000"/>
@@ -11849,7 +11465,7 @@
               <a:buChar char="ü"/>
             </a:pPr>
             <a:r>
-              <a:rPr lang="fr-FR" dirty="0">
+              <a:rPr lang="fr-FR" noProof="0" dirty="0">
                 <a:solidFill>
                   <a:schemeClr val="accent2">
                     <a:lumMod val="40000"/>
@@ -11860,7 +11476,7 @@
               <a:t>Un </a:t>
             </a:r>
             <a:r>
-              <a:rPr lang="fr-FR" b="1" dirty="0" err="1">
+              <a:rPr lang="fr-FR" b="1" noProof="0" dirty="0" err="1">
                 <a:solidFill>
                   <a:schemeClr val="accent2">
                     <a:lumMod val="40000"/>
@@ -11871,7 +11487,7 @@
               <a:t>dashboard</a:t>
             </a:r>
             <a:r>
-              <a:rPr lang="fr-FR" dirty="0">
+              <a:rPr lang="fr-FR" noProof="0" dirty="0">
                 <a:solidFill>
                   <a:schemeClr val="accent2">
                     <a:lumMod val="40000"/>
@@ -11925,7 +11541,7 @@
               <a:buChar char="ü"/>
             </a:pPr>
             <a:r>
-              <a:rPr lang="fr-FR" dirty="0">
+              <a:rPr lang="fr-FR" noProof="0" dirty="0">
                 <a:solidFill>
                   <a:schemeClr val="accent2">
                     <a:lumMod val="40000"/>
@@ -11936,7 +11552,7 @@
               <a:t>La </a:t>
             </a:r>
             <a:r>
-              <a:rPr lang="fr-FR" b="1" dirty="0">
+              <a:rPr lang="fr-FR" b="1" noProof="0" dirty="0">
                 <a:solidFill>
                   <a:schemeClr val="accent2">
                     <a:lumMod val="40000"/>
@@ -11947,7 +11563,7 @@
               <a:t>faisabilité technique </a:t>
             </a:r>
             <a:r>
-              <a:rPr lang="fr-FR" dirty="0">
+              <a:rPr lang="fr-FR" noProof="0" dirty="0">
                 <a:solidFill>
                   <a:schemeClr val="accent2">
                     <a:lumMod val="40000"/>
@@ -11967,7 +11583,7 @@
               <a:buChar char="ü"/>
             </a:pPr>
             <a:r>
-              <a:rPr lang="fr-FR" b="1" dirty="0">
+              <a:rPr lang="fr-FR" b="1" noProof="0" dirty="0">
                 <a:solidFill>
                   <a:schemeClr val="accent2">
                     <a:lumMod val="40000"/>
@@ -11978,7 +11594,7 @@
               <a:t>L'impact financier </a:t>
             </a:r>
             <a:r>
-              <a:rPr lang="fr-FR" dirty="0">
+              <a:rPr lang="fr-FR" noProof="0" dirty="0">
                 <a:solidFill>
                   <a:schemeClr val="accent2">
                     <a:lumMod val="40000"/>
@@ -11989,7 +11605,7 @@
               <a:t>chiffré : </a:t>
             </a:r>
             <a:r>
-              <a:rPr lang="fr-FR" b="1" dirty="0">
+              <a:rPr lang="fr-FR" b="1" noProof="0" dirty="0">
                 <a:solidFill>
                   <a:schemeClr val="accent2">
                     <a:lumMod val="40000"/>
@@ -12000,7 +11616,7 @@
               <a:t>172 482,50 EUR de primes </a:t>
             </a:r>
             <a:r>
-              <a:rPr lang="fr-FR" dirty="0">
+              <a:rPr lang="fr-FR" noProof="0" dirty="0">
                 <a:solidFill>
                   <a:schemeClr val="accent2">
                     <a:lumMod val="40000"/>
@@ -12011,7 +11627,7 @@
               <a:t>pour </a:t>
             </a:r>
             <a:r>
-              <a:rPr lang="fr-FR" b="1" dirty="0">
+              <a:rPr lang="fr-FR" b="1" noProof="0" dirty="0">
                 <a:solidFill>
                   <a:schemeClr val="accent2">
                     <a:lumMod val="40000"/>
@@ -12031,7 +11647,7 @@
               <a:buChar char="ü"/>
             </a:pPr>
             <a:r>
-              <a:rPr lang="fr-FR" dirty="0">
+              <a:rPr lang="fr-FR" noProof="0" dirty="0">
                 <a:solidFill>
                   <a:schemeClr val="accent2">
                     <a:lumMod val="40000"/>
@@ -12042,7 +11658,7 @@
               <a:t>La capacité à </a:t>
             </a:r>
             <a:r>
-              <a:rPr lang="fr-FR" b="1" dirty="0">
+              <a:rPr lang="fr-FR" b="1" noProof="0" dirty="0">
                 <a:solidFill>
                   <a:schemeClr val="accent2">
                     <a:lumMod val="40000"/>
@@ -12053,7 +11669,7 @@
               <a:t>orchestrer</a:t>
             </a:r>
             <a:r>
-              <a:rPr lang="fr-FR" dirty="0">
+              <a:rPr lang="fr-FR" noProof="0" dirty="0">
                 <a:solidFill>
                   <a:schemeClr val="accent2">
                     <a:lumMod val="40000"/>
@@ -12064,7 +11680,7 @@
               <a:t> l'ensemble avec </a:t>
             </a:r>
             <a:r>
-              <a:rPr lang="fr-FR" dirty="0" err="1">
+              <a:rPr lang="fr-FR" noProof="0" dirty="0" err="1">
                 <a:solidFill>
                   <a:schemeClr val="accent2">
                     <a:lumMod val="40000"/>
@@ -12075,7 +11691,7 @@
               <a:t>Kestra</a:t>
             </a:r>
             <a:r>
-              <a:rPr lang="fr-FR" dirty="0">
+              <a:rPr lang="fr-FR" noProof="0" dirty="0">
                 <a:solidFill>
                   <a:schemeClr val="accent2">
                     <a:lumMod val="40000"/>
@@ -12086,7 +11702,7 @@
               <a:t> </a:t>
             </a:r>
             <a:r>
-              <a:rPr lang="fr-FR" b="1" dirty="0">
+              <a:rPr lang="fr-FR" b="1" noProof="0" dirty="0">
                 <a:solidFill>
                   <a:schemeClr val="accent2">
                     <a:lumMod val="40000"/>
@@ -12108,7 +11724,7 @@
             </a:endParaRPr>
           </a:p>
           <a:p>
-            <a:endParaRPr lang="fr-FR" dirty="0">
+            <a:endParaRPr lang="fr-FR" noProof="0" dirty="0">
               <a:solidFill>
                 <a:schemeClr val="accent2">
                   <a:lumMod val="40000"/>
@@ -12118,7 +11734,7 @@
             </a:endParaRPr>
           </a:p>
           <a:p>
-            <a:endParaRPr lang="fr-FR" dirty="0">
+            <a:endParaRPr lang="fr-FR" noProof="0" dirty="0">
               <a:solidFill>
                 <a:schemeClr val="accent2">
                   <a:lumMod val="40000"/>
@@ -12129,7 +11745,7 @@
           </a:p>
           <a:p>
             <a:r>
-              <a:rPr lang="fr-FR" dirty="0">
+              <a:rPr lang="fr-FR" noProof="0" dirty="0">
                 <a:solidFill>
                   <a:schemeClr val="accent2">
                     <a:lumMod val="40000"/>
@@ -12140,7 +11756,7 @@
               <a:t>En un mot : le P</a:t>
             </a:r>
             <a:r>
-              <a:rPr lang="fr-FR" b="1" dirty="0">
+              <a:rPr lang="fr-FR" b="1" noProof="0" dirty="0">
                 <a:solidFill>
                   <a:schemeClr val="accent2">
                     <a:lumMod val="40000"/>
@@ -12151,7 +11767,7 @@
               <a:t>O</a:t>
             </a:r>
             <a:r>
-              <a:rPr lang="fr-FR" dirty="0">
+              <a:rPr lang="fr-FR" noProof="0" dirty="0">
                 <a:solidFill>
                   <a:schemeClr val="accent2">
                     <a:lumMod val="40000"/>
@@ -12162,7 +11778,7 @@
               <a:t>C est </a:t>
             </a:r>
             <a:r>
-              <a:rPr lang="fr-FR" b="1" dirty="0">
+              <a:rPr lang="fr-FR" b="1" noProof="0" dirty="0">
                 <a:solidFill>
                   <a:schemeClr val="accent2">
                     <a:lumMod val="40000"/>
@@ -12173,7 +11789,7 @@
               <a:t>opérationnel</a:t>
             </a:r>
             <a:r>
-              <a:rPr lang="fr-FR" dirty="0">
+              <a:rPr lang="fr-FR" noProof="0" dirty="0">
                 <a:solidFill>
                   <a:schemeClr val="accent2">
                     <a:lumMod val="40000"/>
@@ -12184,7 +11800,7 @@
               <a:t> et </a:t>
             </a:r>
             <a:r>
-              <a:rPr lang="fr-FR" b="1" dirty="0">
+              <a:rPr lang="fr-FR" b="1" noProof="0" dirty="0">
                 <a:solidFill>
                   <a:schemeClr val="accent2">
                     <a:lumMod val="40000"/>
@@ -12195,7 +11811,7 @@
               <a:t>prêt à évoluer </a:t>
             </a:r>
             <a:r>
-              <a:rPr lang="fr-FR" dirty="0">
+              <a:rPr lang="fr-FR" noProof="0" dirty="0">
                 <a:solidFill>
                   <a:schemeClr val="accent2">
                     <a:lumMod val="40000"/>
@@ -12206,7 +11822,7 @@
               <a:t>vers une connexion </a:t>
             </a:r>
             <a:r>
-              <a:rPr lang="fr-FR" dirty="0" err="1">
+              <a:rPr lang="fr-FR" noProof="0" dirty="0" err="1">
                 <a:solidFill>
                   <a:schemeClr val="accent2">
                     <a:lumMod val="40000"/>
@@ -12217,7 +11833,7 @@
               <a:t>Strava</a:t>
             </a:r>
             <a:r>
-              <a:rPr lang="fr-FR" dirty="0">
+              <a:rPr lang="fr-FR" noProof="0" dirty="0">
                 <a:solidFill>
                   <a:schemeClr val="accent2">
                     <a:lumMod val="40000"/>
@@ -12228,7 +11844,7 @@
               <a:t> réelle et un </a:t>
             </a:r>
             <a:r>
-              <a:rPr lang="fr-FR" b="1" dirty="0">
+              <a:rPr lang="fr-FR" b="1" noProof="0" dirty="0">
                 <a:solidFill>
                   <a:schemeClr val="accent2">
                     <a:lumMod val="40000"/>
@@ -12239,7 +11855,7 @@
               <a:t>déploiement cloud</a:t>
             </a:r>
             <a:r>
-              <a:rPr lang="fr-FR" dirty="0">
+              <a:rPr lang="fr-FR" noProof="0" dirty="0">
                 <a:solidFill>
                   <a:schemeClr val="accent2">
                     <a:lumMod val="40000"/>
@@ -15051,7 +14667,7 @@
           <p:nvPr>
             <p:extLst>
               <p:ext uri="{D42A27DB-BD31-4B8C-83A1-F6EECF244321}">
-                <p14:modId xmlns:p14="http://schemas.microsoft.com/office/powerpoint/2010/main" val="3023699095"/>
+                <p14:modId xmlns:p14="http://schemas.microsoft.com/office/powerpoint/2010/main" val="1228260027"/>
               </p:ext>
             </p:extLst>
           </p:nvPr>
@@ -16439,7 +16055,7 @@
           <p:nvPr>
             <p:extLst>
               <p:ext uri="{D42A27DB-BD31-4B8C-83A1-F6EECF244321}">
-                <p14:modId xmlns:p14="http://schemas.microsoft.com/office/powerpoint/2010/main" val="547907630"/>
+                <p14:modId xmlns:p14="http://schemas.microsoft.com/office/powerpoint/2010/main" val="1283242967"/>
               </p:ext>
             </p:extLst>
           </p:nvPr>
@@ -17291,7 +16907,7 @@
                   </a:schemeClr>
                 </a:solidFill>
               </a:rPr>
-              <a:t>PIPELINE ETL</a:t>
+              <a:t>PIPELINE ELT</a:t>
             </a:r>
           </a:p>
         </p:txBody>
@@ -18100,29 +17716,7 @@
                   </a:schemeClr>
                 </a:solidFill>
               </a:rPr>
-              <a:t>Ingère le XLSX Sportif, </a:t>
-            </a:r>
-            <a:r>
-              <a:rPr lang="fr-FR" noProof="0" dirty="0" err="1">
-                <a:solidFill>
-                  <a:schemeClr val="accent2">
-                    <a:lumMod val="40000"/>
-                    <a:lumOff val="60000"/>
-                  </a:schemeClr>
-                </a:solidFill>
-              </a:rPr>
-              <a:t>nettoi</a:t>
-            </a:r>
-            <a:r>
-              <a:rPr lang="fr-FR" noProof="0" dirty="0">
-                <a:solidFill>
-                  <a:schemeClr val="accent2">
-                    <a:lumMod val="40000"/>
-                    <a:lumOff val="60000"/>
-                  </a:schemeClr>
-                </a:solidFill>
-              </a:rPr>
-              <a:t> ,et typos</a:t>
+              <a:t>Ingère le XLSX Sportif, nettoyé et typos corrigés</a:t>
             </a:r>
           </a:p>
         </p:txBody>
@@ -19002,7 +18596,7 @@
               <a:buChar char="•"/>
             </a:pPr>
             <a:r>
-              <a:rPr lang="fr-FR" b="1" dirty="0">
+              <a:rPr lang="fr-FR" b="1" noProof="0" dirty="0">
                 <a:solidFill>
                   <a:schemeClr val="accent2">
                     <a:lumMod val="40000"/>
@@ -19013,7 +18607,7 @@
               <a:t>4 modèles SQL </a:t>
             </a:r>
             <a:r>
-              <a:rPr lang="fr-FR" sz="1200" i="1" dirty="0">
+              <a:rPr lang="fr-FR" sz="1200" i="1" noProof="0" dirty="0">
                 <a:solidFill>
                   <a:schemeClr val="accent2">
                     <a:lumMod val="40000"/>
@@ -19024,7 +18618,7 @@
               <a:t>(</a:t>
             </a:r>
             <a:r>
-              <a:rPr lang="fr-FR" sz="1200" i="1" dirty="0" err="1">
+              <a:rPr lang="fr-FR" sz="1200" i="1" noProof="0" dirty="0" err="1">
                 <a:solidFill>
                   <a:schemeClr val="accent2">
                     <a:lumMod val="40000"/>
@@ -19035,7 +18629,7 @@
               <a:t>staging</a:t>
             </a:r>
             <a:r>
-              <a:rPr lang="fr-FR" sz="1200" i="1" dirty="0">
+              <a:rPr lang="fr-FR" sz="1200" i="1" noProof="0" dirty="0">
                 <a:solidFill>
                   <a:schemeClr val="accent2">
                     <a:lumMod val="40000"/>
@@ -19045,7 +18639,7 @@
               </a:rPr>
               <a:t> + gold) </a:t>
             </a:r>
-            <a:endParaRPr lang="fr-FR" i="1" dirty="0">
+            <a:endParaRPr lang="fr-FR" i="1" noProof="0" dirty="0">
               <a:solidFill>
                 <a:schemeClr val="accent2">
                   <a:lumMod val="40000"/>
@@ -19059,16 +18653,6 @@
               <a:buFontTx/>
               <a:buChar char="-"/>
             </a:pPr>
-            <a:endParaRPr lang="fr-FR" sz="2400" u="sng" dirty="0">
-              <a:solidFill>
-                <a:schemeClr val="accent2">
-                  <a:lumMod val="60000"/>
-                  <a:lumOff val="40000"/>
-                </a:schemeClr>
-              </a:solidFill>
-            </a:endParaRPr>
-          </a:p>
-          <a:p>
             <a:endParaRPr lang="fr-FR" sz="2400" u="sng" noProof="0" dirty="0">
               <a:solidFill>
                 <a:schemeClr val="accent2">
@@ -19079,7 +18663,7 @@
             </a:endParaRPr>
           </a:p>
           <a:p>
-            <a:endParaRPr lang="fr-FR" sz="2400" u="sng" dirty="0">
+            <a:endParaRPr lang="fr-FR" sz="2400" u="sng" noProof="0" dirty="0">
               <a:solidFill>
                 <a:schemeClr val="accent2">
                   <a:lumMod val="60000"/>
@@ -19089,7 +18673,7 @@
             </a:endParaRPr>
           </a:p>
           <a:p>
-            <a:endParaRPr lang="fr-FR" sz="2400" u="sng" dirty="0">
+            <a:endParaRPr lang="fr-FR" sz="2400" u="sng" noProof="0" dirty="0">
               <a:solidFill>
                 <a:schemeClr val="accent2">
                   <a:lumMod val="60000"/>
@@ -19099,12 +18683,22 @@
             </a:endParaRPr>
           </a:p>
           <a:p>
+            <a:endParaRPr lang="fr-FR" sz="2400" u="sng" noProof="0" dirty="0">
+              <a:solidFill>
+                <a:schemeClr val="accent2">
+                  <a:lumMod val="60000"/>
+                  <a:lumOff val="40000"/>
+                </a:schemeClr>
+              </a:solidFill>
+            </a:endParaRPr>
+          </a:p>
+          <a:p>
             <a:pPr marL="742950" lvl="1" indent="-285750">
               <a:buFont typeface="Arial" panose="020B0604020202020204" pitchFamily="34" charset="0"/>
               <a:buChar char="•"/>
             </a:pPr>
             <a:r>
-              <a:rPr lang="fr-FR" b="1" dirty="0">
+              <a:rPr lang="fr-FR" b="1" noProof="0" dirty="0">
                 <a:solidFill>
                   <a:schemeClr val="accent2">
                     <a:lumMod val="40000"/>
@@ -19115,7 +18709,7 @@
               <a:t>37 tests </a:t>
             </a:r>
             <a:r>
-              <a:rPr lang="fr-FR" b="1" dirty="0" err="1">
+              <a:rPr lang="fr-FR" b="1" noProof="0" dirty="0" err="1">
                 <a:solidFill>
                   <a:schemeClr val="accent2">
                     <a:lumMod val="40000"/>
@@ -19125,7 +18719,7 @@
               </a:rPr>
               <a:t>dbt</a:t>
             </a:r>
-            <a:endParaRPr lang="fr-FR" b="1" dirty="0">
+            <a:endParaRPr lang="fr-FR" b="1" noProof="0" dirty="0">
               <a:solidFill>
                 <a:schemeClr val="accent2">
                   <a:lumMod val="40000"/>
@@ -19140,7 +18734,18 @@
               <a:buChar char="Ø"/>
             </a:pPr>
             <a:r>
-              <a:rPr lang="fr-FR" dirty="0" err="1">
+              <a:rPr lang="fr-FR" noProof="0" dirty="0">
+                <a:solidFill>
+                  <a:schemeClr val="accent2">
+                    <a:lumMod val="40000"/>
+                    <a:lumOff val="60000"/>
+                  </a:schemeClr>
+                </a:solidFill>
+              </a:rPr>
+              <a:t>Vérification des </a:t>
+            </a:r>
+            <a:r>
+              <a:rPr lang="fr-FR" b="1" noProof="0" dirty="0" err="1">
                 <a:solidFill>
                   <a:schemeClr val="accent2">
                     <a:lumMod val="40000"/>
@@ -19151,15 +18756,26 @@
               <a:t>not_null</a:t>
             </a:r>
             <a:r>
-              <a:rPr lang="fr-FR" dirty="0">
-                <a:solidFill>
-                  <a:schemeClr val="accent2">
-                    <a:lumMod val="40000"/>
-                    <a:lumOff val="60000"/>
-                  </a:schemeClr>
-                </a:solidFill>
-              </a:rPr>
-              <a:t> sur toutes les clés et colonnes critiques</a:t>
+              <a:rPr lang="fr-FR" b="1" noProof="0" dirty="0">
+                <a:solidFill>
+                  <a:schemeClr val="accent2">
+                    <a:lumMod val="40000"/>
+                    <a:lumOff val="60000"/>
+                  </a:schemeClr>
+                </a:solidFill>
+              </a:rPr>
+              <a:t> </a:t>
+            </a:r>
+            <a:r>
+              <a:rPr lang="fr-FR" noProof="0" dirty="0">
+                <a:solidFill>
+                  <a:schemeClr val="accent2">
+                    <a:lumMod val="40000"/>
+                    <a:lumOff val="60000"/>
+                  </a:schemeClr>
+                </a:solidFill>
+              </a:rPr>
+              <a:t>sur toutes les clés et colonnes critiques</a:t>
             </a:r>
           </a:p>
           <a:p>
@@ -19168,18 +18784,29 @@
               <a:buChar char="Ø"/>
             </a:pPr>
             <a:r>
-              <a:rPr lang="fr-FR" dirty="0">
-                <a:solidFill>
-                  <a:schemeClr val="accent2">
-                    <a:lumMod val="40000"/>
-                    <a:lumOff val="60000"/>
-                  </a:schemeClr>
-                </a:solidFill>
-              </a:rPr>
-              <a:t>unique sur les clés primaires (</a:t>
-            </a:r>
-            <a:r>
-              <a:rPr lang="fr-FR" dirty="0" err="1">
+              <a:rPr lang="fr-FR" noProof="0" dirty="0">
+                <a:solidFill>
+                  <a:schemeClr val="accent2">
+                    <a:lumMod val="40000"/>
+                    <a:lumOff val="60000"/>
+                  </a:schemeClr>
+                </a:solidFill>
+              </a:rPr>
+              <a:t>Contrainte d'unicité sur les clés primaires </a:t>
+            </a:r>
+            <a:r>
+              <a:rPr lang="fr-FR" sz="1200" i="1" noProof="0" dirty="0">
+                <a:solidFill>
+                  <a:schemeClr val="accent2">
+                    <a:lumMod val="40000"/>
+                    <a:lumOff val="60000"/>
+                  </a:schemeClr>
+                </a:solidFill>
+              </a:rPr>
+              <a:t>(</a:t>
+            </a:r>
+            <a:r>
+              <a:rPr lang="fr-FR" sz="1200" i="1" noProof="0" dirty="0" err="1">
                 <a:solidFill>
                   <a:schemeClr val="accent2">
                     <a:lumMod val="40000"/>
@@ -19190,7 +18817,7 @@
               <a:t>id_salarie</a:t>
             </a:r>
             <a:r>
-              <a:rPr lang="fr-FR" dirty="0">
+              <a:rPr lang="fr-FR" sz="1200" i="1" noProof="0" dirty="0">
                 <a:solidFill>
                   <a:schemeClr val="accent2">
                     <a:lumMod val="40000"/>
@@ -19207,7 +18834,7 @@
               <a:buChar char="Ø"/>
             </a:pPr>
             <a:r>
-              <a:rPr lang="fr-FR" dirty="0" err="1">
+              <a:rPr lang="fr-FR" noProof="0" dirty="0" err="1">
                 <a:solidFill>
                   <a:schemeClr val="accent2">
                     <a:lumMod val="40000"/>
@@ -19218,7 +18845,7 @@
               <a:t>accepted_values</a:t>
             </a:r>
             <a:r>
-              <a:rPr lang="fr-FR" dirty="0">
+              <a:rPr lang="fr-FR" noProof="0" dirty="0">
                 <a:solidFill>
                   <a:schemeClr val="accent2">
                     <a:lumMod val="40000"/>
@@ -19229,7 +18856,7 @@
               <a:t> sur </a:t>
             </a:r>
             <a:r>
-              <a:rPr lang="fr-FR" dirty="0" err="1">
+              <a:rPr lang="fr-FR" noProof="0" dirty="0" err="1">
                 <a:solidFill>
                   <a:schemeClr val="accent2">
                     <a:lumMod val="40000"/>
@@ -19240,16 +18867,35 @@
               <a:t>type_sport</a:t>
             </a:r>
             <a:r>
-              <a:rPr lang="fr-FR" dirty="0">
-                <a:solidFill>
-                  <a:schemeClr val="accent2">
-                    <a:lumMod val="40000"/>
-                    <a:lumOff val="60000"/>
-                  </a:schemeClr>
-                </a:solidFill>
-              </a:rPr>
-              <a:t> (15 sports) </a:t>
-            </a:r>
+              <a:rPr lang="fr-FR" noProof="0" dirty="0">
+                <a:solidFill>
+                  <a:schemeClr val="accent2">
+                    <a:lumMod val="40000"/>
+                    <a:lumOff val="60000"/>
+                  </a:schemeClr>
+                </a:solidFill>
+              </a:rPr>
+              <a:t> </a:t>
+            </a:r>
+            <a:r>
+              <a:rPr lang="fr-FR" sz="1200" i="1" noProof="0" dirty="0">
+                <a:solidFill>
+                  <a:schemeClr val="accent2">
+                    <a:lumMod val="40000"/>
+                    <a:lumOff val="60000"/>
+                  </a:schemeClr>
+                </a:solidFill>
+              </a:rPr>
+              <a:t>(15 sports) </a:t>
+            </a:r>
+            <a:endParaRPr lang="fr-FR" i="1" noProof="0" dirty="0">
+              <a:solidFill>
+                <a:schemeClr val="accent2">
+                  <a:lumMod val="40000"/>
+                  <a:lumOff val="60000"/>
+                </a:schemeClr>
+              </a:solidFill>
+            </a:endParaRPr>
           </a:p>
           <a:p>
             <a:pPr marL="742950" lvl="1" indent="-285750">
@@ -19257,7 +18903,7 @@
               <a:buChar char="•"/>
             </a:pPr>
             <a:r>
-              <a:rPr lang="fr-FR" b="1" dirty="0">
+              <a:rPr lang="fr-FR" b="1" noProof="0" dirty="0">
                 <a:solidFill>
                   <a:schemeClr val="accent2">
                     <a:lumMod val="40000"/>
@@ -19268,7 +18914,7 @@
               <a:t>Documentation auto </a:t>
             </a:r>
             <a:r>
-              <a:rPr lang="fr-FR" sz="1200" i="1" dirty="0">
+              <a:rPr lang="fr-FR" sz="1200" i="1" noProof="0" dirty="0">
                 <a:solidFill>
                   <a:schemeClr val="accent2">
                     <a:lumMod val="40000"/>
@@ -19330,7 +18976,7 @@
           <p:nvPr>
             <p:extLst>
               <p:ext uri="{D42A27DB-BD31-4B8C-83A1-F6EECF244321}">
-                <p14:modId xmlns:p14="http://schemas.microsoft.com/office/powerpoint/2010/main" val="3773509393"/>
+                <p14:modId xmlns:p14="http://schemas.microsoft.com/office/powerpoint/2010/main" val="808330861"/>
               </p:ext>
             </p:extLst>
           </p:nvPr>
@@ -20513,17 +20159,6 @@
           <a:p>
             <a:pPr marL="539750"/>
             <a:r>
-              <a:rPr lang="fr-FR" dirty="0">
-                <a:solidFill>
-                  <a:schemeClr val="accent2">
-                    <a:lumMod val="40000"/>
-                    <a:lumOff val="60000"/>
-                  </a:schemeClr>
-                </a:solidFill>
-              </a:rPr>
-              <a:t>C’</a:t>
-            </a:r>
-            <a:r>
               <a:rPr lang="fr-FR" noProof="0" dirty="0">
                 <a:solidFill>
                   <a:schemeClr val="accent2">
@@ -20532,7 +20167,7 @@
                   </a:schemeClr>
                 </a:solidFill>
               </a:rPr>
-              <a:t>est un </a:t>
+              <a:t>C’est un </a:t>
             </a:r>
             <a:r>
               <a:rPr lang="fr-FR" b="1" noProof="0" dirty="0">
@@ -20712,7 +20347,7 @@
             </a:r>
           </a:p>
           <a:p>
-            <a:endParaRPr lang="fr-FR" dirty="0">
+            <a:endParaRPr lang="fr-FR" noProof="0" dirty="0">
               <a:solidFill>
                 <a:schemeClr val="accent2">
                   <a:lumMod val="40000"/>
@@ -20722,7 +20357,7 @@
             </a:endParaRPr>
           </a:p>
           <a:p>
-            <a:endParaRPr lang="fr-FR" dirty="0">
+            <a:endParaRPr lang="fr-FR" noProof="0" dirty="0">
               <a:solidFill>
                 <a:schemeClr val="accent2">
                   <a:lumMod val="40000"/>
@@ -20806,27 +20441,8 @@
                   </a:schemeClr>
                 </a:solidFill>
               </a:rPr>
-              <a:t>Da</a:t>
-            </a:r>
-            <a:r>
-              <a:rPr lang="fr-FR" sz="2400" u="sng" dirty="0">
-                <a:solidFill>
-                  <a:schemeClr val="accent2">
-                    <a:lumMod val="60000"/>
-                    <a:lumOff val="40000"/>
-                  </a:schemeClr>
-                </a:solidFill>
-              </a:rPr>
-              <a:t>ns notre cas :</a:t>
-            </a:r>
-            <a:endParaRPr lang="fr-FR" sz="2400" u="sng" noProof="0" dirty="0">
-              <a:solidFill>
-                <a:schemeClr val="accent2">
-                  <a:lumMod val="60000"/>
-                  <a:lumOff val="40000"/>
-                </a:schemeClr>
-              </a:solidFill>
-            </a:endParaRPr>
+              <a:t>Dans notre cas :</a:t>
+            </a:r>
           </a:p>
           <a:p>
             <a:endParaRPr lang="fr-FR" sz="500" u="sng" noProof="0" dirty="0">
@@ -20841,7 +20457,7 @@
           <a:p>
             <a:pPr marL="539750"/>
             <a:r>
-              <a:rPr lang="fr-FR" dirty="0">
+              <a:rPr lang="fr-FR" noProof="0" dirty="0">
                 <a:solidFill>
                   <a:schemeClr val="accent2">
                     <a:lumMod val="40000"/>
@@ -20852,7 +20468,7 @@
               <a:t>Le </a:t>
             </a:r>
             <a:r>
-              <a:rPr lang="fr-FR" b="1" dirty="0">
+              <a:rPr lang="fr-FR" b="1" noProof="0" dirty="0">
                 <a:solidFill>
                   <a:schemeClr val="accent2">
                     <a:lumMod val="40000"/>
@@ -20863,7 +20479,7 @@
               <a:t>flow </a:t>
             </a:r>
             <a:r>
-              <a:rPr lang="fr-FR" b="1" dirty="0" err="1">
+              <a:rPr lang="fr-FR" b="1" noProof="0" dirty="0" err="1">
                 <a:solidFill>
                   <a:schemeClr val="accent2">
                     <a:lumMod val="40000"/>
@@ -20874,7 +20490,7 @@
               <a:t>Kestra</a:t>
             </a:r>
             <a:r>
-              <a:rPr lang="fr-FR" b="1" dirty="0">
+              <a:rPr lang="fr-FR" b="1" noProof="0" dirty="0">
                 <a:solidFill>
                   <a:schemeClr val="accent2">
                     <a:lumMod val="40000"/>
@@ -20885,7 +20501,7 @@
               <a:t> </a:t>
             </a:r>
             <a:r>
-              <a:rPr lang="fr-FR" dirty="0">
+              <a:rPr lang="fr-FR" noProof="0" dirty="0">
                 <a:solidFill>
                   <a:schemeClr val="accent2">
                     <a:lumMod val="40000"/>
@@ -20896,7 +20512,7 @@
               <a:t>s'exécute </a:t>
             </a:r>
             <a:r>
-              <a:rPr lang="fr-FR" b="1" dirty="0">
+              <a:rPr lang="fr-FR" b="1" noProof="0" dirty="0">
                 <a:solidFill>
                   <a:schemeClr val="accent2">
                     <a:lumMod val="40000"/>
@@ -20907,7 +20523,7 @@
               <a:t>chaque jour </a:t>
             </a:r>
             <a:r>
-              <a:rPr lang="fr-FR" dirty="0">
+              <a:rPr lang="fr-FR" noProof="0" dirty="0">
                 <a:solidFill>
                   <a:schemeClr val="accent2">
                     <a:lumMod val="40000"/>
@@ -20918,7 +20534,7 @@
               <a:t>à </a:t>
             </a:r>
             <a:r>
-              <a:rPr lang="fr-FR" b="1" dirty="0">
+              <a:rPr lang="fr-FR" b="1" noProof="0" dirty="0">
                 <a:solidFill>
                   <a:schemeClr val="accent2">
                     <a:lumMod val="40000"/>
@@ -20929,7 +20545,7 @@
               <a:t>06h00</a:t>
             </a:r>
             <a:r>
-              <a:rPr lang="fr-FR" dirty="0">
+              <a:rPr lang="fr-FR" noProof="0" dirty="0">
                 <a:solidFill>
                   <a:schemeClr val="accent2">
                     <a:lumMod val="40000"/>
@@ -20946,7 +20562,7 @@
               <a:buChar char="-"/>
             </a:pPr>
             <a:r>
-              <a:rPr lang="fr-FR" b="1" dirty="0">
+              <a:rPr lang="fr-FR" b="1" noProof="0" dirty="0">
                 <a:solidFill>
                   <a:schemeClr val="accent2">
                     <a:lumMod val="40000"/>
@@ -20957,7 +20573,7 @@
               <a:t>Détection</a:t>
             </a:r>
             <a:r>
-              <a:rPr lang="fr-FR" dirty="0">
+              <a:rPr lang="fr-FR" noProof="0" dirty="0">
                 <a:solidFill>
                   <a:schemeClr val="accent2">
                     <a:lumMod val="40000"/>
@@ -20968,7 +20584,7 @@
               <a:t> : Vérification des xlsx et </a:t>
             </a:r>
             <a:r>
-              <a:rPr lang="fr-FR" dirty="0" err="1">
+              <a:rPr lang="fr-FR" noProof="0" dirty="0" err="1">
                 <a:solidFill>
                   <a:schemeClr val="accent2">
                     <a:lumMod val="40000"/>
@@ -20979,7 +20595,7 @@
               <a:t>watermark</a:t>
             </a:r>
             <a:r>
-              <a:rPr lang="fr-FR" dirty="0">
+              <a:rPr lang="fr-FR" noProof="0" dirty="0">
                 <a:solidFill>
                   <a:schemeClr val="accent2">
                     <a:lumMod val="40000"/>
@@ -20990,7 +20606,7 @@
               <a:t> </a:t>
             </a:r>
             <a:r>
-              <a:rPr lang="fr-FR" dirty="0" err="1">
+              <a:rPr lang="fr-FR" noProof="0" dirty="0" err="1">
                 <a:solidFill>
                   <a:schemeClr val="accent2">
                     <a:lumMod val="40000"/>
@@ -21000,7 +20616,7 @@
               </a:rPr>
               <a:t>Strava</a:t>
             </a:r>
-            <a:endParaRPr lang="fr-FR" dirty="0">
+            <a:endParaRPr lang="fr-FR" noProof="0" dirty="0">
               <a:solidFill>
                 <a:schemeClr val="accent2">
                   <a:lumMod val="40000"/>
@@ -21015,7 +20631,7 @@
               <a:buChar char="-"/>
             </a:pPr>
             <a:r>
-              <a:rPr lang="fr-FR" b="1" dirty="0">
+              <a:rPr lang="fr-FR" b="1" noProof="0" dirty="0">
                 <a:solidFill>
                   <a:schemeClr val="accent2">
                     <a:lumMod val="40000"/>
@@ -21026,7 +20642,7 @@
               <a:t>Ingestion conditionnelle </a:t>
             </a:r>
             <a:r>
-              <a:rPr lang="fr-FR" dirty="0">
+              <a:rPr lang="fr-FR" noProof="0" dirty="0">
                 <a:solidFill>
                   <a:schemeClr val="accent2">
                     <a:lumMod val="40000"/>
@@ -21043,7 +20659,7 @@
               <a:buChar char="-"/>
             </a:pPr>
             <a:r>
-              <a:rPr lang="fr-FR" dirty="0">
+              <a:rPr lang="fr-FR" noProof="0" dirty="0">
                 <a:solidFill>
                   <a:schemeClr val="accent2">
                     <a:lumMod val="40000"/>
@@ -21060,7 +20676,7 @@
               <a:buChar char="-"/>
             </a:pPr>
             <a:r>
-              <a:rPr lang="fr-FR" dirty="0">
+              <a:rPr lang="fr-FR" noProof="0" dirty="0">
                 <a:solidFill>
                   <a:schemeClr val="accent2">
                     <a:lumMod val="40000"/>
@@ -21077,7 +20693,7 @@
               <a:buChar char="-"/>
             </a:pPr>
             <a:r>
-              <a:rPr lang="fr-FR" dirty="0">
+              <a:rPr lang="fr-FR" noProof="0" dirty="0">
                 <a:solidFill>
                   <a:schemeClr val="accent2">
                     <a:lumMod val="40000"/>
@@ -21088,7 +20704,7 @@
               <a:t>Calcule les distances via Google </a:t>
             </a:r>
             <a:r>
-              <a:rPr lang="fr-FR" dirty="0" err="1">
+              <a:rPr lang="fr-FR" noProof="0" dirty="0" err="1">
                 <a:solidFill>
                   <a:schemeClr val="accent2">
                     <a:lumMod val="40000"/>
@@ -21099,7 +20715,7 @@
               <a:t>Maps</a:t>
             </a:r>
             <a:r>
-              <a:rPr lang="fr-FR" dirty="0">
+              <a:rPr lang="fr-FR" noProof="0" dirty="0">
                 <a:solidFill>
                   <a:schemeClr val="accent2">
                     <a:lumMod val="40000"/>
@@ -21116,7 +20732,7 @@
               <a:buChar char="-"/>
             </a:pPr>
             <a:r>
-              <a:rPr lang="fr-FR" b="1" dirty="0">
+              <a:rPr lang="fr-FR" b="1" noProof="0" dirty="0">
                 <a:solidFill>
                   <a:schemeClr val="accent2">
                     <a:lumMod val="40000"/>
@@ -21127,7 +20743,7 @@
               <a:t>Transformations </a:t>
             </a:r>
             <a:r>
-              <a:rPr lang="fr-FR" b="1" dirty="0" err="1">
+              <a:rPr lang="fr-FR" b="1" noProof="0" dirty="0" err="1">
                 <a:solidFill>
                   <a:schemeClr val="accent2">
                     <a:lumMod val="40000"/>
@@ -21138,7 +20754,7 @@
               <a:t>dbt</a:t>
             </a:r>
             <a:r>
-              <a:rPr lang="fr-FR" b="1" dirty="0">
+              <a:rPr lang="fr-FR" b="1" noProof="0" dirty="0">
                 <a:solidFill>
                   <a:schemeClr val="accent2">
                     <a:lumMod val="40000"/>
@@ -21149,7 +20765,7 @@
               <a:t> </a:t>
             </a:r>
             <a:r>
-              <a:rPr lang="fr-FR" sz="1200" i="1" dirty="0">
+              <a:rPr lang="fr-FR" sz="1200" i="1" noProof="0" dirty="0">
                 <a:solidFill>
                   <a:schemeClr val="accent2">
                     <a:lumMod val="40000"/>
@@ -21166,7 +20782,7 @@
               <a:buChar char="-"/>
             </a:pPr>
             <a:r>
-              <a:rPr lang="fr-FR" b="1" dirty="0">
+              <a:rPr lang="fr-FR" b="1" noProof="0" dirty="0">
                 <a:solidFill>
                   <a:schemeClr val="accent2">
                     <a:lumMod val="40000"/>
@@ -21177,7 +20793,7 @@
               <a:t>Notifications Slack </a:t>
             </a:r>
             <a:r>
-              <a:rPr lang="fr-FR" sz="1200" i="1" dirty="0">
+              <a:rPr lang="fr-FR" sz="1200" i="1" noProof="0" dirty="0">
                 <a:solidFill>
                   <a:schemeClr val="accent2">
                     <a:lumMod val="40000"/>
@@ -21188,7 +20804,7 @@
               <a:t>(1 message personnalisé par nouvelle activité </a:t>
             </a:r>
             <a:r>
-              <a:rPr lang="fr-FR" sz="1200" i="1" dirty="0" err="1">
+              <a:rPr lang="fr-FR" sz="1200" i="1" noProof="0" dirty="0" err="1">
                 <a:solidFill>
                   <a:schemeClr val="accent2">
                     <a:lumMod val="40000"/>
@@ -21199,7 +20815,7 @@
               <a:t>Strava</a:t>
             </a:r>
             <a:r>
-              <a:rPr lang="fr-FR" sz="1200" i="1" dirty="0">
+              <a:rPr lang="fr-FR" sz="1200" i="1" noProof="0" dirty="0">
                 <a:solidFill>
                   <a:schemeClr val="accent2">
                     <a:lumMod val="40000"/>
@@ -21216,7 +20832,7 @@
               <a:buChar char="-"/>
             </a:pPr>
             <a:r>
-              <a:rPr lang="fr-FR" b="1" dirty="0">
+              <a:rPr lang="fr-FR" b="1" noProof="0" dirty="0">
                 <a:solidFill>
                   <a:schemeClr val="accent2">
                     <a:lumMod val="40000"/>
@@ -21227,7 +20843,7 @@
               <a:t>Finalisation</a:t>
             </a:r>
             <a:r>
-              <a:rPr lang="fr-FR" dirty="0">
+              <a:rPr lang="fr-FR" noProof="0" dirty="0">
                 <a:solidFill>
                   <a:schemeClr val="accent2">
                     <a:lumMod val="40000"/>
@@ -21238,7 +20854,7 @@
               <a:t> </a:t>
             </a:r>
             <a:r>
-              <a:rPr lang="fr-FR" sz="1200" i="1" dirty="0">
+              <a:rPr lang="fr-FR" sz="1200" i="1" noProof="0" dirty="0">
                 <a:solidFill>
                   <a:schemeClr val="accent2">
                     <a:lumMod val="40000"/>
@@ -21249,7 +20865,7 @@
               <a:t>(Mise à jour du </a:t>
             </a:r>
             <a:r>
-              <a:rPr lang="fr-FR" sz="1200" i="1" dirty="0" err="1">
+              <a:rPr lang="fr-FR" sz="1200" i="1" noProof="0" dirty="0" err="1">
                 <a:solidFill>
                   <a:schemeClr val="accent2">
                     <a:lumMod val="40000"/>
@@ -21260,7 +20876,7 @@
               <a:t>watermark</a:t>
             </a:r>
             <a:r>
-              <a:rPr lang="fr-FR" sz="1200" i="1" dirty="0">
+              <a:rPr lang="fr-FR" sz="1200" i="1" noProof="0" dirty="0">
                 <a:solidFill>
                   <a:schemeClr val="accent2">
                     <a:lumMod val="40000"/>
@@ -21271,7 +20887,7 @@
               <a:t> + INSERT dans </a:t>
             </a:r>
             <a:r>
-              <a:rPr lang="fr-FR" sz="1200" i="1" dirty="0" err="1">
+              <a:rPr lang="fr-FR" sz="1200" i="1" noProof="0" dirty="0" err="1">
                 <a:solidFill>
                   <a:schemeClr val="accent2">
                     <a:lumMod val="40000"/>
@@ -21282,7 +20898,7 @@
               <a:t>meta.pipeline_runs</a:t>
             </a:r>
             <a:r>
-              <a:rPr lang="fr-FR" sz="1200" i="1" dirty="0">
+              <a:rPr lang="fr-FR" sz="1200" i="1" noProof="0" dirty="0">
                 <a:solidFill>
                   <a:schemeClr val="accent2">
                     <a:lumMod val="40000"/>
@@ -21292,7 +20908,7 @@
               </a:rPr>
               <a:t> + compte-rendu Slack)</a:t>
             </a:r>
-            <a:endParaRPr lang="fr-FR" i="1" dirty="0">
+            <a:endParaRPr lang="fr-FR" i="1" noProof="0" dirty="0">
               <a:solidFill>
                 <a:schemeClr val="accent2">
                   <a:lumMod val="40000"/>
@@ -21307,7 +20923,7 @@
               <a:buChar char="-"/>
             </a:pPr>
             <a:r>
-              <a:rPr lang="fr-FR" b="1" dirty="0" err="1">
+              <a:rPr lang="fr-FR" b="1" noProof="0" dirty="0" err="1">
                 <a:solidFill>
                   <a:schemeClr val="accent2">
                     <a:lumMod val="40000"/>
@@ -21318,7 +20934,7 @@
               <a:t>Error</a:t>
             </a:r>
             <a:r>
-              <a:rPr lang="fr-FR" b="1" dirty="0">
+              <a:rPr lang="fr-FR" b="1" noProof="0" dirty="0">
                 <a:solidFill>
                   <a:schemeClr val="accent2">
                     <a:lumMod val="40000"/>
@@ -21329,7 +20945,7 @@
               <a:t> handler </a:t>
             </a:r>
             <a:r>
-              <a:rPr lang="fr-FR" sz="1200" i="1" dirty="0">
+              <a:rPr lang="fr-FR" sz="1200" i="1" noProof="0" dirty="0">
                 <a:solidFill>
                   <a:schemeClr val="accent2">
                     <a:lumMod val="40000"/>
@@ -21340,7 +20956,7 @@
               <a:t>(En cas d'échec à n'importe quelle étape : log en base (</a:t>
             </a:r>
             <a:r>
-              <a:rPr lang="fr-FR" sz="1200" i="1" dirty="0" err="1">
+              <a:rPr lang="fr-FR" sz="1200" i="1" noProof="0" dirty="0" err="1">
                 <a:solidFill>
                   <a:schemeClr val="accent2">
                     <a:lumMod val="40000"/>
@@ -21351,7 +20967,7 @@
               <a:t>status</a:t>
             </a:r>
             <a:r>
-              <a:rPr lang="fr-FR" sz="1200" i="1" dirty="0">
+              <a:rPr lang="fr-FR" sz="1200" i="1" noProof="0" dirty="0">
                 <a:solidFill>
                   <a:schemeClr val="accent2">
                     <a:lumMod val="40000"/>
@@ -21362,7 +20978,7 @@
               <a:t>=</a:t>
             </a:r>
             <a:r>
-              <a:rPr lang="fr-FR" sz="1200" i="1" dirty="0" err="1">
+              <a:rPr lang="fr-FR" sz="1200" i="1" noProof="0" dirty="0" err="1">
                 <a:solidFill>
                   <a:schemeClr val="accent2">
                     <a:lumMod val="40000"/>
@@ -21373,7 +20989,7 @@
               <a:t>failed</a:t>
             </a:r>
             <a:r>
-              <a:rPr lang="fr-FR" sz="1200" i="1" dirty="0">
+              <a:rPr lang="fr-FR" sz="1200" i="1" noProof="0" dirty="0">
                 <a:solidFill>
                   <a:schemeClr val="accent2">
                     <a:lumMod val="40000"/>
@@ -21383,7 +20999,7 @@
               </a:rPr>
               <a:t>) + notification Slack)</a:t>
             </a:r>
-            <a:endParaRPr lang="fr-FR" i="1" dirty="0">
+            <a:endParaRPr lang="fr-FR" i="1" noProof="0" dirty="0">
               <a:solidFill>
                 <a:schemeClr val="accent2">
                   <a:lumMod val="40000"/>
